--- a/docs/한은협업_여정보고_대표_2026-09-01.pptx
+++ b/docs/한은협업_여정보고_대표_2026-09-01.pptx
@@ -651,7 +651,7 @@
           <a:lstStyle/>
           <a:p>
             <a:r>
-              <a:t>여정의 구조가 메시지: 우리는 실패를 숨기지 않고 기록했고, 그 기록(무엇이 왜 안 되는가)이 지금 한은과의 공동 논문 재료가 됨. 8월 기준선 격변 때 당일 재검증으로 대응한 것이 신뢰의 전환점.</a:t>
+              <a:t>여정의 구조가 메시지: 우리는 실패를 숨기지 않고 기록했고, 그 기록(무엇이 왜 안 되는가)이 지금 한은과의 공동 논문 재료가 됨. 8월 기준선 격변 때 당일 재검증으로 대응한 것이 신뢰의 전환점. (구두 보충용 — 문서 명시 금지: BISTRO 논문의 1저자가 현 신임 총재(BIS 재직 시)이며, 디지털혁신실의 해석 질의가 이 프로젝트의 기점. 8월의 원본 실측·LoRA 개선으로 출발 질문에 답을 완성한 수미상관 구조.)</a:t>
             </a:r>
           </a:p>
         </p:txBody>
@@ -5057,7 +5057,7 @@
                 <a:latin typeface="Apple SD Gothic Neo"/>
                 <a:ea typeface="Apple SD Gothic Neo"/>
               </a:rPr>
-              <a:t>FDE로서의 3개월: 고객의 코드 결함에 당일 재검증으로, 고객의 진단에 원인 규명으로, 고객의 제안에 첫 실증으로 답했습니다.</a:t>
+              <a:t>FDE로서의 3개월: 출발점이었던 BISTRO 해석 질의에 원본 실측과 적응 개선으로 답하며 한 바퀴를 완성 — 고객의 결함엔 당일 재검증으로, 진단엔 원인 규명으로, 제안엔 첫 실증으로.</a:t>
             </a:r>
           </a:p>
         </p:txBody>
@@ -5434,7 +5434,7 @@
                 <a:latin typeface="Apple SD Gothic Neo"/>
                 <a:ea typeface="Apple SD Gothic Neo"/>
               </a:rPr>
-              <a:t>한은 현행 시스템(DFM+XGBoost)을 실시간 빈티지로 재현 — 모든 비교의 잣대 확립</a:t>
+              <a:t>한은 측의 시계열 파운데이션 모델(BISTRO, BIS WP 1337) 해석 질의에서 출발 — 현행 시스템(DFM+XGBoost)을 실시간 빈티지로 재현해 검증 기반 확립</a:t>
             </a:r>
           </a:p>
         </p:txBody>

--- a/docs/한은협업_여정보고_대표_2026-09-01.pptx
+++ b/docs/한은협업_여정보고_대표_2026-09-01.pptx
@@ -15,6 +15,7 @@
     <p:sldId id="263" r:id="rId15"/>
     <p:sldId id="264" r:id="rId16"/>
     <p:sldId id="265" r:id="rId17"/>
+    <p:sldId id="266" r:id="rId18"/>
   </p:sldIdLst>
   <p:sldSz cx="12191695" cy="6858000" type="screen4x3"/>
   <p:notesSz cx="6858000" cy="9144000"/>
@@ -537,6 +538,76 @@
 </file>
 
 <file path=ppt/notesSlides/notesSlide10.xml><?xml version="1.0" encoding="utf-8"?>
+<p:notes xmlns:a="http://schemas.openxmlformats.org/drawingml/2006/main" xmlns:p="http://schemas.openxmlformats.org/presentationml/2006/main" xmlns:r="http://schemas.openxmlformats.org/officeDocument/2006/relationships">
+  <p:cSld>
+    <p:spTree>
+      <p:nvGrpSpPr>
+        <p:cNvPr id="1" name=""/>
+        <p:cNvGrpSpPr/>
+        <p:nvPr/>
+      </p:nvGrpSpPr>
+      <p:grpSpPr>
+        <a:xfrm>
+          <a:off x="0" y="0"/>
+          <a:ext cx="0" cy="0"/>
+          <a:chOff x="0" y="0"/>
+          <a:chExt cx="0" cy="0"/>
+        </a:xfrm>
+      </p:grpSpPr>
+      <p:sp>
+        <p:nvSpPr>
+          <p:cNvPr id="2" name="Slide Image Placeholder 1"/>
+          <p:cNvSpPr>
+            <a:spLocks noGrp="1"/>
+          </p:cNvSpPr>
+          <p:nvPr>
+            <p:ph type="sldImg" idx="2"/>
+          </p:nvPr>
+        </p:nvSpPr>
+        <p:spPr/>
+      </p:sp>
+      <p:sp>
+        <p:nvSpPr>
+          <p:cNvPr id="3" name="Notes Placeholder 2"/>
+          <p:cNvSpPr>
+            <a:spLocks noGrp="1"/>
+          </p:cNvSpPr>
+          <p:nvPr>
+            <p:ph type="body" idx="3" sz="quarter"/>
+          </p:nvPr>
+        </p:nvSpPr>
+        <p:spPr/>
+        <p:txBody>
+          <a:bodyPr/>
+          <a:lstStyle/>
+          <a:p>
+            <a:r>
+              <a:t>FDE 활동의 실체를 보여주는 장. 핵심 주장: 고객의 커밋을 읽는 능력(diff에서 단위 결함·실험 설계를 독해)과 재현 가능한 코드로 회신하는 속도(당일 재검증, 3일 내 실증)가 FDE의 차별점. 기밀 관리도 언급 가능 — 한은 빈티지 데이터는 저장소 분리·커밋 금지 규칙 유지.</a:t>
+            </a:r>
+          </a:p>
+        </p:txBody>
+      </p:sp>
+      <p:sp>
+        <p:nvSpPr>
+          <p:cNvPr id="4" name="Slide Number Placeholder 3"/>
+          <p:cNvSpPr>
+            <a:spLocks noGrp="1"/>
+          </p:cNvSpPr>
+          <p:nvPr>
+            <p:ph type="sldNum" idx="5" sz="quarter"/>
+          </p:nvPr>
+        </p:nvSpPr>
+        <p:spPr/>
+      </p:sp>
+    </p:spTree>
+  </p:cSld>
+  <p:clrMapOvr>
+    <a:masterClrMapping/>
+  </p:clrMapOvr>
+</p:notes>
+</file>
+
+<file path=ppt/notesSlides/notesSlide11.xml><?xml version="1.0" encoding="utf-8"?>
 <p:notes xmlns:a="http://schemas.openxmlformats.org/drawingml/2006/main" xmlns:p="http://schemas.openxmlformats.org/presentationml/2006/main" xmlns:r="http://schemas.openxmlformats.org/officeDocument/2006/relationships">
   <p:cSld>
     <p:spTree>
@@ -4446,7 +4517,7 @@
                 <a:latin typeface="Apple SD Gothic Neo"/>
                 <a:ea typeface="Apple SD Gothic Neo"/>
               </a:rPr>
-              <a:t>9  |  성과와 다음 단계</a:t>
+              <a:t>9  |  일하는 방식</a:t>
             </a:r>
           </a:p>
         </p:txBody>
@@ -4486,7 +4557,7 @@
                 <a:latin typeface="Apple SD Gothic Neo"/>
                 <a:ea typeface="Apple SD Gothic Neo"/>
               </a:rPr>
-              <a:t>협업의 위치가 바뀌었습니다 — 검증 파트너에서 공동 연구 파트너로</a:t>
+              <a:t>회의보다 커밋 — 모든 협업이 GitHub 문서·코드 리뷰로 진행됐습니다</a:t>
             </a:r>
           </a:p>
         </p:txBody>
@@ -4528,20 +4599,175 @@
       </p:cxnSp>
       <p:sp>
         <p:nvSpPr>
-          <p:cNvPr id="5" name="Rectangle 4"/>
+          <p:cNvPr id="5" name="TextBox 4"/>
+          <p:cNvSpPr txBox="1"/>
+          <p:nvPr/>
+        </p:nvSpPr>
+        <p:spPr>
+          <a:xfrm>
+            <a:off x="548640" y="1298448"/>
+            <a:ext cx="11064240" cy="320040"/>
+          </a:xfrm>
+          <a:prstGeom prst="rect">
+            <a:avLst/>
+          </a:prstGeom>
+          <a:noFill/>
+        </p:spPr>
+        <p:txBody>
+          <a:bodyPr wrap="square" anchor="t" lIns="18288" rIns="18288" tIns="9144" bIns="9144">
+            <a:spAutoFit/>
+          </a:bodyPr>
+          <a:lstStyle/>
+          <a:p>
+            <a:pPr algn="l">
+              <a:spcAft>
+                <a:spcPts val="200"/>
+              </a:spcAft>
+            </a:pPr>
+            <a:r>
+              <a:rPr sz="1050" b="0">
+                <a:solidFill>
+                  <a:srgbClr val="262626"/>
+                </a:solidFill>
+                <a:latin typeface="Apple SD Gothic Neo"/>
+                <a:ea typeface="Apple SD Gothic Neo"/>
+              </a:rPr>
+              <a:t>한은이 코드와 리포트를 커밋하면, 당사가 커밋 단위로 리뷰·재검증하고 재현 가능한 스크립트와 문서로 회신하는 비동기 협업 — 요구사항 분석이 곧 코드 리뷰였습니다.</a:t>
+            </a:r>
+          </a:p>
+        </p:txBody>
+      </p:sp>
+      <p:sp>
+        <p:nvSpPr>
+          <p:cNvPr id="6" name="TextBox 5"/>
+          <p:cNvSpPr txBox="1"/>
+          <p:nvPr/>
+        </p:nvSpPr>
+        <p:spPr>
+          <a:xfrm>
+            <a:off x="548640" y="1828800"/>
+            <a:ext cx="5394960" cy="320040"/>
+          </a:xfrm>
+          <a:prstGeom prst="rect">
+            <a:avLst/>
+          </a:prstGeom>
+          <a:noFill/>
+        </p:spPr>
+        <p:txBody>
+          <a:bodyPr wrap="square" anchor="t" lIns="18288" rIns="18288" tIns="9144" bIns="9144">
+            <a:spAutoFit/>
+          </a:bodyPr>
+          <a:lstStyle/>
+          <a:p>
+            <a:pPr algn="l">
+              <a:spcAft>
+                <a:spcPts val="200"/>
+              </a:spcAft>
+            </a:pPr>
+            <a:r>
+              <a:rPr sz="1200" b="1">
+                <a:solidFill>
+                  <a:srgbClr val="243447"/>
+                </a:solidFill>
+                <a:latin typeface="Apple SD Gothic Neo"/>
+                <a:ea typeface="Apple SD Gothic Neo"/>
+              </a:rPr>
+              <a:t>이창훈 과장(한은)의 커밋</a:t>
+            </a:r>
+          </a:p>
+        </p:txBody>
+      </p:sp>
+      <p:sp>
+        <p:nvSpPr>
+          <p:cNvPr id="7" name="TextBox 6"/>
+          <p:cNvSpPr txBox="1"/>
+          <p:nvPr/>
+        </p:nvSpPr>
+        <p:spPr>
+          <a:xfrm>
+            <a:off x="6309360" y="1828800"/>
+            <a:ext cx="5303520" cy="320040"/>
+          </a:xfrm>
+          <a:prstGeom prst="rect">
+            <a:avLst/>
+          </a:prstGeom>
+          <a:noFill/>
+        </p:spPr>
+        <p:txBody>
+          <a:bodyPr wrap="square" anchor="t" lIns="18288" rIns="18288" tIns="9144" bIns="9144">
+            <a:spAutoFit/>
+          </a:bodyPr>
+          <a:lstStyle/>
+          <a:p>
+            <a:pPr algn="l">
+              <a:spcAft>
+                <a:spcPts val="200"/>
+              </a:spcAft>
+            </a:pPr>
+            <a:r>
+              <a:rPr sz="1200" b="1">
+                <a:solidFill>
+                  <a:srgbClr val="008A3E"/>
+                </a:solidFill>
+                <a:latin typeface="Apple SD Gothic Neo"/>
+                <a:ea typeface="Apple SD Gothic Neo"/>
+              </a:rPr>
+              <a:t>당사의 응답</a:t>
+            </a:r>
+          </a:p>
+        </p:txBody>
+      </p:sp>
+      <p:cxnSp>
+        <p:nvCxnSpPr>
+          <p:cNvPr id="8" name="Connector 7"/>
+          <p:cNvCxnSpPr/>
+          <p:nvPr/>
+        </p:nvCxnSpPr>
+        <p:spPr>
+          <a:xfrm>
+            <a:off x="548640" y="2157984"/>
+            <a:ext cx="11091672" cy="0"/>
+          </a:xfrm>
+          <a:prstGeom prst="line">
+            <a:avLst/>
+          </a:prstGeom>
+          <a:ln w="12700">
+            <a:solidFill>
+              <a:srgbClr val="C9C9C9"/>
+            </a:solidFill>
+          </a:ln>
+        </p:spPr>
+        <p:style>
+          <a:lnRef idx="2">
+            <a:schemeClr val="accent1"/>
+          </a:lnRef>
+          <a:fillRef idx="0">
+            <a:schemeClr val="accent1"/>
+          </a:fillRef>
+          <a:effectRef idx="1">
+            <a:schemeClr val="accent1"/>
+          </a:effectRef>
+          <a:fontRef idx="minor">
+            <a:schemeClr val="tx1"/>
+          </a:fontRef>
+        </p:style>
+      </p:cxnSp>
+      <p:sp>
+        <p:nvSpPr>
+          <p:cNvPr id="9" name="Rectangle 8"/>
           <p:cNvSpPr/>
           <p:nvPr/>
         </p:nvSpPr>
         <p:spPr>
           <a:xfrm>
-            <a:off x="548640" y="1371600"/>
-            <a:ext cx="41148" cy="1005840"/>
+            <a:off x="548640" y="2286000"/>
+            <a:ext cx="41148" cy="1051560"/>
           </a:xfrm>
           <a:prstGeom prst="rect">
             <a:avLst/>
           </a:prstGeom>
           <a:solidFill>
-            <a:srgbClr val="008A3E"/>
+            <a:srgbClr val="243447"/>
           </a:solidFill>
           <a:ln>
             <a:noFill/>
@@ -4572,14 +4798,14 @@
       </p:sp>
       <p:sp>
         <p:nvSpPr>
-          <p:cNvPr id="6" name="TextBox 5"/>
+          <p:cNvPr id="10" name="TextBox 9"/>
           <p:cNvSpPr txBox="1"/>
           <p:nvPr/>
         </p:nvSpPr>
         <p:spPr>
           <a:xfrm>
-            <a:off x="777240" y="1371600"/>
-            <a:ext cx="1920240" cy="365760"/>
+            <a:off x="749808" y="2286000"/>
+            <a:ext cx="5212080" cy="320040"/>
           </a:xfrm>
           <a:prstGeom prst="rect">
             <a:avLst/>
@@ -4598,28 +4824,28 @@
               </a:spcAft>
             </a:pPr>
             <a:r>
-              <a:rPr sz="1250" b="1">
-                <a:solidFill>
-                  <a:srgbClr val="243447"/>
-                </a:solidFill>
-                <a:latin typeface="Apple SD Gothic Neo"/>
-                <a:ea typeface="Apple SD Gothic Neo"/>
-              </a:rPr>
-              <a:t>협업 관계</a:t>
-            </a:r>
-          </a:p>
-        </p:txBody>
-      </p:sp>
-      <p:sp>
-        <p:nvSpPr>
-          <p:cNvPr id="7" name="TextBox 6"/>
+              <a:rPr sz="1050" b="1">
+                <a:solidFill>
+                  <a:srgbClr val="262626"/>
+                </a:solidFill>
+                <a:latin typeface="Apple SD Gothic Neo"/>
+                <a:ea typeface="Apple SD Gothic Neo"/>
+              </a:rPr>
+              <a:t>8/4  "코드 수정 및 산출물 저장"</a:t>
+            </a:r>
+          </a:p>
+        </p:txBody>
+      </p:sp>
+      <p:sp>
+        <p:nvSpPr>
+          <p:cNvPr id="11" name="TextBox 10"/>
           <p:cNvSpPr txBox="1"/>
           <p:nvPr/>
         </p:nvSpPr>
         <p:spPr>
           <a:xfrm>
-            <a:off x="2788920" y="1371600"/>
-            <a:ext cx="8778240" cy="822960"/>
+            <a:off x="749808" y="2596896"/>
+            <a:ext cx="5257800" cy="731520"/>
           </a:xfrm>
           <a:prstGeom prst="rect">
             <a:avLst/>
@@ -4638,34 +4864,34 @@
               </a:spcAft>
             </a:pPr>
             <a:r>
-              <a:rPr sz="1050" b="0">
-                <a:solidFill>
-                  <a:srgbClr val="262626"/>
-                </a:solidFill>
-                <a:latin typeface="Apple SD Gothic Neo"/>
-                <a:ea typeface="Apple SD Gothic Neo"/>
-              </a:rPr>
-              <a:t>한은이 당사 자료를 자체 저장소에 수록하고, 적응학습으로의 협업 범위 확대를 먼저 제안 — 역할 분담 협의 중</a:t>
-            </a:r>
-          </a:p>
-        </p:txBody>
-      </p:sp>
-      <p:sp>
-        <p:nvSpPr>
-          <p:cNvPr id="8" name="Rectangle 7"/>
+              <a:rPr sz="930" b="0">
+                <a:solidFill>
+                  <a:srgbClr val="6B6B6B"/>
+                </a:solidFill>
+                <a:latin typeface="Apple SD Gothic Neo"/>
+                <a:ea typeface="Apple SD Gothic Neo"/>
+              </a:rPr>
+              <a:t>예측단위 개정(schema v2) — diff에서 단위 결함 수정과 검증 로직 강화를 파악</a:t>
+            </a:r>
+          </a:p>
+        </p:txBody>
+      </p:sp>
+      <p:sp>
+        <p:nvSpPr>
+          <p:cNvPr id="12" name="Rectangle 11"/>
           <p:cNvSpPr/>
           <p:nvPr/>
         </p:nvSpPr>
         <p:spPr>
           <a:xfrm>
-            <a:off x="548640" y="2560320"/>
-            <a:ext cx="41148" cy="1005840"/>
+            <a:off x="6309360" y="2286000"/>
+            <a:ext cx="41148" cy="1051560"/>
           </a:xfrm>
           <a:prstGeom prst="rect">
             <a:avLst/>
           </a:prstGeom>
           <a:solidFill>
-            <a:srgbClr val="243447"/>
+            <a:srgbClr val="008A3E"/>
           </a:solidFill>
           <a:ln>
             <a:noFill/>
@@ -4696,14 +4922,14 @@
       </p:sp>
       <p:sp>
         <p:nvSpPr>
-          <p:cNvPr id="9" name="TextBox 8"/>
+          <p:cNvPr id="13" name="TextBox 12"/>
           <p:cNvSpPr txBox="1"/>
           <p:nvPr/>
         </p:nvSpPr>
         <p:spPr>
           <a:xfrm>
-            <a:off x="777240" y="2560320"/>
-            <a:ext cx="1920240" cy="365760"/>
+            <a:off x="6510528" y="2286000"/>
+            <a:ext cx="2377440" cy="320040"/>
           </a:xfrm>
           <a:prstGeom prst="rect">
             <a:avLst/>
@@ -4722,28 +4948,28 @@
               </a:spcAft>
             </a:pPr>
             <a:r>
-              <a:rPr sz="1250" b="1">
-                <a:solidFill>
-                  <a:srgbClr val="243447"/>
-                </a:solidFill>
-                <a:latin typeface="Apple SD Gothic Neo"/>
-                <a:ea typeface="Apple SD Gothic Neo"/>
-              </a:rPr>
-              <a:t>기술 자산</a:t>
-            </a:r>
-          </a:p>
-        </p:txBody>
-      </p:sp>
-      <p:sp>
-        <p:nvSpPr>
-          <p:cNvPr id="10" name="TextBox 9"/>
+              <a:rPr sz="1050" b="1">
+                <a:solidFill>
+                  <a:srgbClr val="008A3E"/>
+                </a:solidFill>
+                <a:latin typeface="Apple SD Gothic Neo"/>
+                <a:ea typeface="Apple SD Gothic Neo"/>
+              </a:rPr>
+              <a:t>당일 재검증</a:t>
+            </a:r>
+          </a:p>
+        </p:txBody>
+      </p:sp>
+      <p:sp>
+        <p:nvSpPr>
+          <p:cNvPr id="14" name="TextBox 13"/>
           <p:cNvSpPr txBox="1"/>
           <p:nvPr/>
         </p:nvSpPr>
         <p:spPr>
           <a:xfrm>
-            <a:off x="2788920" y="2560320"/>
-            <a:ext cx="8778240" cy="822960"/>
+            <a:off x="6510528" y="2596896"/>
+            <a:ext cx="5074920" cy="731520"/>
           </a:xfrm>
           <a:prstGeom prst="rect">
             <a:avLst/>
@@ -4762,28 +4988,28 @@
               </a:spcAft>
             </a:pPr>
             <a:r>
-              <a:rPr sz="1050" b="0">
+              <a:rPr sz="930" b="0">
                 <a:solidFill>
                   <a:srgbClr val="262626"/>
                 </a:solidFill>
                 <a:latin typeface="Apple SD Gothic Neo"/>
                 <a:ea typeface="Apple SD Gothic Neo"/>
               </a:rPr>
-              <a:t>실시간 검증 하네스 · 일별 빠른신호 파이프라인 · FM 절제/흡수력 진단 프레임 · LoRA 적응 러너 — 전부 재현 가능 스크립트로 관리 (50여 종)</a:t>
-            </a:r>
-          </a:p>
-        </p:txBody>
-      </p:sp>
-      <p:sp>
-        <p:nvSpPr>
-          <p:cNvPr id="11" name="Rectangle 10"/>
+              <a:t>40여 구성 전면 재채점 → 신 기준선(XGBoost 단독) 확정, 당사 종전 기록도 함께 폐기</a:t>
+            </a:r>
+          </a:p>
+        </p:txBody>
+      </p:sp>
+      <p:sp>
+        <p:nvSpPr>
+          <p:cNvPr id="15" name="Rectangle 14"/>
           <p:cNvSpPr/>
           <p:nvPr/>
         </p:nvSpPr>
         <p:spPr>
           <a:xfrm>
-            <a:off x="548640" y="3749039"/>
-            <a:ext cx="41148" cy="1005840"/>
+            <a:off x="548640" y="3493008"/>
+            <a:ext cx="41148" cy="1051560"/>
           </a:xfrm>
           <a:prstGeom prst="rect">
             <a:avLst/>
@@ -4820,14 +5046,14 @@
       </p:sp>
       <p:sp>
         <p:nvSpPr>
-          <p:cNvPr id="12" name="TextBox 11"/>
+          <p:cNvPr id="16" name="TextBox 15"/>
           <p:cNvSpPr txBox="1"/>
           <p:nvPr/>
         </p:nvSpPr>
         <p:spPr>
           <a:xfrm>
-            <a:off x="777240" y="3749039"/>
-            <a:ext cx="1920240" cy="365760"/>
+            <a:off x="749808" y="3493008"/>
+            <a:ext cx="5212080" cy="320040"/>
           </a:xfrm>
           <a:prstGeom prst="rect">
             <a:avLst/>
@@ -4846,28 +5072,28 @@
               </a:spcAft>
             </a:pPr>
             <a:r>
-              <a:rPr sz="1250" b="1">
-                <a:solidFill>
-                  <a:srgbClr val="243447"/>
-                </a:solidFill>
-                <a:latin typeface="Apple SD Gothic Neo"/>
-                <a:ea typeface="Apple SD Gothic Neo"/>
-              </a:rPr>
-              <a:t>공동 논문</a:t>
-            </a:r>
-          </a:p>
-        </p:txBody>
-      </p:sp>
-      <p:sp>
-        <p:nvSpPr>
-          <p:cNvPr id="13" name="TextBox 12"/>
+              <a:rPr sz="1050" b="1">
+                <a:solidFill>
+                  <a:srgbClr val="262626"/>
+                </a:solidFill>
+                <a:latin typeface="Apple SD Gothic Neo"/>
+                <a:ea typeface="Apple SD Gothic Neo"/>
+              </a:rPr>
+              <a:t>8/25  "Add BISTRO nowcasting experiments..."</a:t>
+            </a:r>
+          </a:p>
+        </p:txBody>
+      </p:sp>
+      <p:sp>
+        <p:nvSpPr>
+          <p:cNvPr id="17" name="TextBox 16"/>
           <p:cNvSpPr txBox="1"/>
           <p:nvPr/>
         </p:nvSpPr>
         <p:spPr>
           <a:xfrm>
-            <a:off x="2788920" y="3749039"/>
-            <a:ext cx="8778240" cy="822960"/>
+            <a:off x="749808" y="3803904"/>
+            <a:ext cx="5257800" cy="731520"/>
           </a:xfrm>
           <a:prstGeom prst="rect">
             <a:avLst/>
@@ -4886,34 +5112,34 @@
               </a:spcAft>
             </a:pPr>
             <a:r>
-              <a:rPr sz="1050" b="0">
-                <a:solidFill>
-                  <a:srgbClr val="262626"/>
-                </a:solidFill>
-                <a:latin typeface="Apple SD Gothic Neo"/>
-                <a:ea typeface="Apple SD Gothic Neo"/>
-              </a:rPr>
-              <a:t>"사전학습 시계열 모델은 언제 가치를 더하는가" — 기여 5건 실측 완료 + 적응학습 장(章) 추가. 한은 WP 선행 후 국제 학술지(IJF) 투고 구도</a:t>
-            </a:r>
-          </a:p>
-        </p:txBody>
-      </p:sp>
-      <p:sp>
-        <p:nvSpPr>
-          <p:cNvPr id="14" name="Rectangle 13"/>
+              <a:rPr sz="930" b="0">
+                <a:solidFill>
+                  <a:srgbClr val="6B6B6B"/>
+                </a:solidFill>
+                <a:latin typeface="Apple SD Gothic Neo"/>
+                <a:ea typeface="Apple SD Gothic Neo"/>
+              </a:rPr>
+              <a:t>실험 코드 16종 + 테스트 + 회의자료(typ) 3.7만 줄 — 코드에서 실험 설계·한계까지 독해</a:t>
+            </a:r>
+          </a:p>
+        </p:txBody>
+      </p:sp>
+      <p:sp>
+        <p:nvSpPr>
+          <p:cNvPr id="18" name="Rectangle 17"/>
           <p:cNvSpPr/>
           <p:nvPr/>
         </p:nvSpPr>
         <p:spPr>
           <a:xfrm>
-            <a:off x="548640" y="4937759"/>
-            <a:ext cx="41148" cy="1005840"/>
+            <a:off x="6309360" y="3493008"/>
+            <a:ext cx="41148" cy="1051560"/>
           </a:xfrm>
           <a:prstGeom prst="rect">
             <a:avLst/>
           </a:prstGeom>
           <a:solidFill>
-            <a:srgbClr val="B0532F"/>
+            <a:srgbClr val="008A3E"/>
           </a:solidFill>
           <a:ln>
             <a:noFill/>
@@ -4944,14 +5170,14 @@
       </p:sp>
       <p:sp>
         <p:nvSpPr>
-          <p:cNvPr id="15" name="TextBox 14"/>
+          <p:cNvPr id="19" name="TextBox 18"/>
           <p:cNvSpPr txBox="1"/>
           <p:nvPr/>
         </p:nvSpPr>
         <p:spPr>
           <a:xfrm>
-            <a:off x="777240" y="4937759"/>
-            <a:ext cx="1920240" cy="365760"/>
+            <a:off x="6510528" y="3493008"/>
+            <a:ext cx="2377440" cy="320040"/>
           </a:xfrm>
           <a:prstGeom prst="rect">
             <a:avLst/>
@@ -4970,28 +5196,28 @@
               </a:spcAft>
             </a:pPr>
             <a:r>
-              <a:rPr sz="1250" b="1">
-                <a:solidFill>
-                  <a:srgbClr val="243447"/>
-                </a:solidFill>
-                <a:latin typeface="Apple SD Gothic Neo"/>
-                <a:ea typeface="Apple SD Gothic Neo"/>
-              </a:rPr>
-              <a:t>다음 결정</a:t>
-            </a:r>
-          </a:p>
-        </p:txBody>
-      </p:sp>
-      <p:sp>
-        <p:nvSpPr>
-          <p:cNvPr id="16" name="TextBox 15"/>
+              <a:rPr sz="1050" b="1">
+                <a:solidFill>
+                  <a:srgbClr val="008A3E"/>
+                </a:solidFill>
+                <a:latin typeface="Apple SD Gothic Neo"/>
+                <a:ea typeface="Apple SD Gothic Neo"/>
+              </a:rPr>
+              <a:t>익일 진단 재현 → 3일 내 첫 실증</a:t>
+            </a:r>
+          </a:p>
+        </p:txBody>
+      </p:sp>
+      <p:sp>
+        <p:nvSpPr>
+          <p:cNvPr id="20" name="TextBox 19"/>
           <p:cNvSpPr txBox="1"/>
           <p:nvPr/>
         </p:nvSpPr>
         <p:spPr>
           <a:xfrm>
-            <a:off x="2788920" y="4937759"/>
-            <a:ext cx="8778240" cy="822960"/>
+            <a:off x="6510528" y="3803904"/>
+            <a:ext cx="5074920" cy="731520"/>
           </a:xfrm>
           <a:prstGeom prst="rect">
             <a:avLst/>
@@ -5010,28 +5236,72 @@
               </a:spcAft>
             </a:pPr>
             <a:r>
-              <a:rPr sz="1050" b="0">
+              <a:rPr sz="930" b="0">
                 <a:solidFill>
                   <a:srgbClr val="262626"/>
                 </a:solidFill>
                 <a:latin typeface="Apple SD Gothic Neo"/>
                 <a:ea typeface="Apple SD Gothic Neo"/>
               </a:rPr>
-              <a:t>① 적응학습 역할 분담 확정(당사: Chronos-2 트랙·적응 안정화) ② 논문 집필 착수 ③ 운영 권고안의 병행 산출 개시 여부</a:t>
-            </a:r>
-          </a:p>
-        </p:txBody>
-      </p:sp>
-      <p:sp>
-        <p:nvSpPr>
-          <p:cNvPr id="17" name="TextBox 16"/>
+              <a:t>주차별 흡수력 진단 재현·원인 규명(회의대응 1p) → 그들이 제안만 한 적응학습을 LoRA로 첫 실측</a:t>
+            </a:r>
+          </a:p>
+        </p:txBody>
+      </p:sp>
+      <p:sp>
+        <p:nvSpPr>
+          <p:cNvPr id="21" name="Rectangle 20"/>
+          <p:cNvSpPr/>
+          <p:nvPr/>
+        </p:nvSpPr>
+        <p:spPr>
+          <a:xfrm>
+            <a:off x="548640" y="4700016"/>
+            <a:ext cx="41148" cy="1051560"/>
+          </a:xfrm>
+          <a:prstGeom prst="rect">
+            <a:avLst/>
+          </a:prstGeom>
+          <a:solidFill>
+            <a:srgbClr val="243447"/>
+          </a:solidFill>
+          <a:ln>
+            <a:noFill/>
+          </a:ln>
+          <a:effectLst/>
+        </p:spPr>
+        <p:style>
+          <a:lnRef idx="1">
+            <a:schemeClr val="accent1"/>
+          </a:lnRef>
+          <a:fillRef idx="3">
+            <a:schemeClr val="accent1"/>
+          </a:fillRef>
+          <a:effectRef idx="2">
+            <a:schemeClr val="accent1"/>
+          </a:effectRef>
+          <a:fontRef idx="minor">
+            <a:schemeClr val="lt1"/>
+          </a:fontRef>
+        </p:style>
+        <p:txBody>
+          <a:bodyPr rtlCol="0" anchor="ctr"/>
+          <a:lstStyle/>
+          <a:p>
+            <a:pPr algn="ctr"/>
+          </a:p>
+        </p:txBody>
+      </p:sp>
+      <p:sp>
+        <p:nvSpPr>
+          <p:cNvPr id="22" name="TextBox 21"/>
           <p:cNvSpPr txBox="1"/>
           <p:nvPr/>
         </p:nvSpPr>
         <p:spPr>
           <a:xfrm>
-            <a:off x="548640" y="6172200"/>
-            <a:ext cx="10972800" cy="274320"/>
+            <a:off x="749808" y="4700016"/>
+            <a:ext cx="5212080" cy="320040"/>
           </a:xfrm>
           <a:prstGeom prst="rect">
             <a:avLst/>
@@ -5050,28 +5320,28 @@
               </a:spcAft>
             </a:pPr>
             <a:r>
-              <a:rPr sz="1100" b="1">
-                <a:solidFill>
-                  <a:srgbClr val="243447"/>
-                </a:solidFill>
-                <a:latin typeface="Apple SD Gothic Neo"/>
-                <a:ea typeface="Apple SD Gothic Neo"/>
-              </a:rPr>
-              <a:t>FDE로서의 3개월: 출발점이었던 BISTRO 해석 질의에 원본 실측과 적응 개선으로 답하며 한 바퀴를 완성 — 고객의 결함엔 당일 재검증으로, 진단엔 원인 규명으로, 제안엔 첫 실증으로.</a:t>
-            </a:r>
-          </a:p>
-        </p:txBody>
-      </p:sp>
-      <p:sp>
-        <p:nvSpPr>
-          <p:cNvPr id="18" name="TextBox 17"/>
+              <a:rPr sz="1050" b="1">
+                <a:solidFill>
+                  <a:srgbClr val="262626"/>
+                </a:solidFill>
+                <a:latin typeface="Apple SD Gothic Neo"/>
+                <a:ea typeface="Apple SD Gothic Neo"/>
+              </a:rPr>
+              <a:t>(수신 확인도 커밋으로)</a:t>
+            </a:r>
+          </a:p>
+        </p:txBody>
+      </p:sp>
+      <p:sp>
+        <p:nvSpPr>
+          <p:cNvPr id="23" name="TextBox 22"/>
           <p:cNvSpPr txBox="1"/>
           <p:nvPr/>
         </p:nvSpPr>
         <p:spPr>
           <a:xfrm>
-            <a:off x="548640" y="6492240"/>
-            <a:ext cx="10607040" cy="274320"/>
+            <a:off x="749808" y="5010912"/>
+            <a:ext cx="5257800" cy="731520"/>
           </a:xfrm>
           <a:prstGeom prst="rect">
             <a:avLst/>
@@ -5090,28 +5360,72 @@
               </a:spcAft>
             </a:pPr>
             <a:r>
-              <a:rPr sz="800" b="0">
+              <a:rPr sz="930" b="0">
                 <a:solidFill>
                   <a:srgbClr val="6B6B6B"/>
                 </a:solidFill>
                 <a:latin typeface="Apple SD Gothic Neo"/>
                 <a:ea typeface="Apple SD Gothic Neo"/>
               </a:rPr>
-              <a:t>주: 공통 규약: 한은 실시간 빈티지 · 속보치 기준 · 전망주차 w[-19,-1] 평균 RMSE · 2018Q1~2025Q4(32개 분기). 낮을수록 정확.</a:t>
-            </a:r>
-          </a:p>
-        </p:txBody>
-      </p:sp>
-      <p:sp>
-        <p:nvSpPr>
-          <p:cNvPr id="19" name="TextBox 18"/>
+              <a:t>당사 종합리포트 PDF를 한은이 자기 저장소에 커밋 — 산출물이 고객의 공식 기록에 편입</a:t>
+            </a:r>
+          </a:p>
+        </p:txBody>
+      </p:sp>
+      <p:sp>
+        <p:nvSpPr>
+          <p:cNvPr id="24" name="Rectangle 23"/>
+          <p:cNvSpPr/>
+          <p:nvPr/>
+        </p:nvSpPr>
+        <p:spPr>
+          <a:xfrm>
+            <a:off x="6309360" y="4700016"/>
+            <a:ext cx="41148" cy="1051560"/>
+          </a:xfrm>
+          <a:prstGeom prst="rect">
+            <a:avLst/>
+          </a:prstGeom>
+          <a:solidFill>
+            <a:srgbClr val="008A3E"/>
+          </a:solidFill>
+          <a:ln>
+            <a:noFill/>
+          </a:ln>
+          <a:effectLst/>
+        </p:spPr>
+        <p:style>
+          <a:lnRef idx="1">
+            <a:schemeClr val="accent1"/>
+          </a:lnRef>
+          <a:fillRef idx="3">
+            <a:schemeClr val="accent1"/>
+          </a:fillRef>
+          <a:effectRef idx="2">
+            <a:schemeClr val="accent1"/>
+          </a:effectRef>
+          <a:fontRef idx="minor">
+            <a:schemeClr val="lt1"/>
+          </a:fontRef>
+        </p:style>
+        <p:txBody>
+          <a:bodyPr rtlCol="0" anchor="ctr"/>
+          <a:lstStyle/>
+          <a:p>
+            <a:pPr algn="ctr"/>
+          </a:p>
+        </p:txBody>
+      </p:sp>
+      <p:sp>
+        <p:nvSpPr>
+          <p:cNvPr id="25" name="TextBox 24"/>
           <p:cNvSpPr txBox="1"/>
           <p:nvPr/>
         </p:nvSpPr>
         <p:spPr>
           <a:xfrm>
-            <a:off x="11750040" y="6492240"/>
-            <a:ext cx="365760" cy="228600"/>
+            <a:off x="6510528" y="4700016"/>
+            <a:ext cx="2377440" cy="320040"/>
           </a:xfrm>
           <a:prstGeom prst="rect">
             <a:avLst/>
@@ -5124,6 +5438,254 @@
           </a:bodyPr>
           <a:lstStyle/>
           <a:p>
+            <a:pPr algn="l">
+              <a:spcAft>
+                <a:spcPts val="200"/>
+              </a:spcAft>
+            </a:pPr>
+            <a:r>
+              <a:rPr sz="1050" b="1">
+                <a:solidFill>
+                  <a:srgbClr val="008A3E"/>
+                </a:solidFill>
+                <a:latin typeface="Apple SD Gothic Neo"/>
+                <a:ea typeface="Apple SD Gothic Neo"/>
+              </a:rPr>
+              <a:t>산출물 = 코드</a:t>
+            </a:r>
+          </a:p>
+        </p:txBody>
+      </p:sp>
+      <p:sp>
+        <p:nvSpPr>
+          <p:cNvPr id="26" name="TextBox 25"/>
+          <p:cNvSpPr txBox="1"/>
+          <p:nvPr/>
+        </p:nvSpPr>
+        <p:spPr>
+          <a:xfrm>
+            <a:off x="6510528" y="5010912"/>
+            <a:ext cx="5074920" cy="731520"/>
+          </a:xfrm>
+          <a:prstGeom prst="rect">
+            <a:avLst/>
+          </a:prstGeom>
+          <a:noFill/>
+        </p:spPr>
+        <p:txBody>
+          <a:bodyPr wrap="square" anchor="t" lIns="18288" rIns="18288" tIns="9144" bIns="9144">
+            <a:spAutoFit/>
+          </a:bodyPr>
+          <a:lstStyle/>
+          <a:p>
+            <a:pPr algn="l">
+              <a:spcAft>
+                <a:spcPts val="200"/>
+              </a:spcAft>
+            </a:pPr>
+            <a:r>
+              <a:rPr sz="930" b="0">
+                <a:solidFill>
+                  <a:srgbClr val="262626"/>
+                </a:solidFill>
+                <a:latin typeface="Apple SD Gothic Neo"/>
+                <a:ea typeface="Apple SD Gothic Neo"/>
+              </a:rPr>
+              <a:t>실험 스크립트 50여 종을 결과·교훈 주석과 함께 커밋 — 실패(기각 실험)도 재현 가능한 기록으로</a:t>
+            </a:r>
+          </a:p>
+        </p:txBody>
+      </p:sp>
+      <p:sp>
+        <p:nvSpPr>
+          <p:cNvPr id="27" name="Rectangle 26"/>
+          <p:cNvSpPr/>
+          <p:nvPr/>
+        </p:nvSpPr>
+        <p:spPr>
+          <a:xfrm>
+            <a:off x="548640" y="5943600"/>
+            <a:ext cx="11091672" cy="457200"/>
+          </a:xfrm>
+          <a:prstGeom prst="rect">
+            <a:avLst/>
+          </a:prstGeom>
+          <a:solidFill>
+            <a:srgbClr val="F5F5F4"/>
+          </a:solidFill>
+          <a:ln>
+            <a:noFill/>
+          </a:ln>
+          <a:effectLst/>
+        </p:spPr>
+        <p:style>
+          <a:lnRef idx="1">
+            <a:schemeClr val="accent1"/>
+          </a:lnRef>
+          <a:fillRef idx="3">
+            <a:schemeClr val="accent1"/>
+          </a:fillRef>
+          <a:effectRef idx="2">
+            <a:schemeClr val="accent1"/>
+          </a:effectRef>
+          <a:fontRef idx="minor">
+            <a:schemeClr val="lt1"/>
+          </a:fontRef>
+        </p:style>
+        <p:txBody>
+          <a:bodyPr rtlCol="0" anchor="ctr"/>
+          <a:lstStyle/>
+          <a:p>
+            <a:pPr algn="ctr"/>
+          </a:p>
+        </p:txBody>
+      </p:sp>
+      <p:sp>
+        <p:nvSpPr>
+          <p:cNvPr id="28" name="Rectangle 27"/>
+          <p:cNvSpPr/>
+          <p:nvPr/>
+        </p:nvSpPr>
+        <p:spPr>
+          <a:xfrm>
+            <a:off x="548640" y="5943600"/>
+            <a:ext cx="41148" cy="457200"/>
+          </a:xfrm>
+          <a:prstGeom prst="rect">
+            <a:avLst/>
+          </a:prstGeom>
+          <a:solidFill>
+            <a:srgbClr val="243447"/>
+          </a:solidFill>
+          <a:ln>
+            <a:noFill/>
+          </a:ln>
+          <a:effectLst/>
+        </p:spPr>
+        <p:style>
+          <a:lnRef idx="1">
+            <a:schemeClr val="accent1"/>
+          </a:lnRef>
+          <a:fillRef idx="3">
+            <a:schemeClr val="accent1"/>
+          </a:fillRef>
+          <a:effectRef idx="2">
+            <a:schemeClr val="accent1"/>
+          </a:effectRef>
+          <a:fontRef idx="minor">
+            <a:schemeClr val="lt1"/>
+          </a:fontRef>
+        </p:style>
+        <p:txBody>
+          <a:bodyPr rtlCol="0" anchor="ctr"/>
+          <a:lstStyle/>
+          <a:p>
+            <a:pPr algn="ctr"/>
+          </a:p>
+        </p:txBody>
+      </p:sp>
+      <p:sp>
+        <p:nvSpPr>
+          <p:cNvPr id="29" name="TextBox 28"/>
+          <p:cNvSpPr txBox="1"/>
+          <p:nvPr/>
+        </p:nvSpPr>
+        <p:spPr>
+          <a:xfrm>
+            <a:off x="777240" y="6016752"/>
+            <a:ext cx="10698480" cy="320040"/>
+          </a:xfrm>
+          <a:prstGeom prst="rect">
+            <a:avLst/>
+          </a:prstGeom>
+          <a:noFill/>
+        </p:spPr>
+        <p:txBody>
+          <a:bodyPr wrap="square" anchor="t" lIns="18288" rIns="18288" tIns="9144" bIns="9144">
+            <a:spAutoFit/>
+          </a:bodyPr>
+          <a:lstStyle/>
+          <a:p>
+            <a:pPr algn="l">
+              <a:spcAft>
+                <a:spcPts val="200"/>
+              </a:spcAft>
+            </a:pPr>
+            <a:r>
+              <a:rPr sz="1050" b="1">
+                <a:solidFill>
+                  <a:srgbClr val="243447"/>
+                </a:solidFill>
+                <a:latin typeface="Apple SD Gothic Neo"/>
+                <a:ea typeface="Apple SD Gothic Neo"/>
+              </a:rPr>
+              <a:t>이 방식의 가치: 협업의 전 과정이 커밋 로그로 남아 재현·감사가 가능 — 중앙은행과 일하는 형식 그 자체가 신뢰의 근거가 됩니다.</a:t>
+            </a:r>
+          </a:p>
+        </p:txBody>
+      </p:sp>
+      <p:sp>
+        <p:nvSpPr>
+          <p:cNvPr id="30" name="TextBox 29"/>
+          <p:cNvSpPr txBox="1"/>
+          <p:nvPr/>
+        </p:nvSpPr>
+        <p:spPr>
+          <a:xfrm>
+            <a:off x="548640" y="6492240"/>
+            <a:ext cx="10607040" cy="274320"/>
+          </a:xfrm>
+          <a:prstGeom prst="rect">
+            <a:avLst/>
+          </a:prstGeom>
+          <a:noFill/>
+        </p:spPr>
+        <p:txBody>
+          <a:bodyPr wrap="square" anchor="t" lIns="18288" rIns="18288" tIns="9144" bIns="9144">
+            <a:spAutoFit/>
+          </a:bodyPr>
+          <a:lstStyle/>
+          <a:p>
+            <a:pPr algn="l">
+              <a:spcAft>
+                <a:spcPts val="200"/>
+              </a:spcAft>
+            </a:pPr>
+            <a:r>
+              <a:rPr sz="800" b="0">
+                <a:solidFill>
+                  <a:srgbClr val="6B6B6B"/>
+                </a:solidFill>
+                <a:latin typeface="Apple SD Gothic Neo"/>
+                <a:ea typeface="Apple SD Gothic Neo"/>
+              </a:rPr>
+              <a:t>주: 당사 저장소 커밋 90여 건(6~8월) · 한은 저장소는 pull 전용(푸시하지 않음) — 산출물은 문서·PDF로 전달.</a:t>
+            </a:r>
+          </a:p>
+        </p:txBody>
+      </p:sp>
+      <p:sp>
+        <p:nvSpPr>
+          <p:cNvPr id="31" name="TextBox 30"/>
+          <p:cNvSpPr txBox="1"/>
+          <p:nvPr/>
+        </p:nvSpPr>
+        <p:spPr>
+          <a:xfrm>
+            <a:off x="11750040" y="6492240"/>
+            <a:ext cx="365760" cy="228600"/>
+          </a:xfrm>
+          <a:prstGeom prst="rect">
+            <a:avLst/>
+          </a:prstGeom>
+          <a:noFill/>
+        </p:spPr>
+        <p:txBody>
+          <a:bodyPr wrap="square" anchor="t" lIns="18288" rIns="18288" tIns="9144" bIns="9144">
+            <a:spAutoFit/>
+          </a:bodyPr>
+          <a:lstStyle/>
+          <a:p>
             <a:pPr algn="r">
               <a:spcAft>
                 <a:spcPts val="200"/>
@@ -5138,6 +5700,755 @@
                 <a:ea typeface="Apple SD Gothic Neo"/>
               </a:rPr>
               <a:t>10</a:t>
+            </a:r>
+          </a:p>
+        </p:txBody>
+      </p:sp>
+    </p:spTree>
+  </p:cSld>
+  <p:clrMapOvr>
+    <a:masterClrMapping/>
+  </p:clrMapOvr>
+</p:sld>
+</file>
+
+<file path=ppt/slides/slide11.xml><?xml version="1.0" encoding="utf-8"?>
+<p:sld xmlns:a="http://schemas.openxmlformats.org/drawingml/2006/main" xmlns:p="http://schemas.openxmlformats.org/presentationml/2006/main" xmlns:r="http://schemas.openxmlformats.org/officeDocument/2006/relationships">
+  <p:cSld>
+    <p:spTree>
+      <p:nvGrpSpPr>
+        <p:cNvPr id="1" name=""/>
+        <p:cNvGrpSpPr/>
+        <p:nvPr/>
+      </p:nvGrpSpPr>
+      <p:grpSpPr/>
+      <p:sp>
+        <p:nvSpPr>
+          <p:cNvPr id="2" name="TextBox 1"/>
+          <p:cNvSpPr txBox="1"/>
+          <p:nvPr/>
+        </p:nvSpPr>
+        <p:spPr>
+          <a:xfrm>
+            <a:off x="548640" y="292608"/>
+            <a:ext cx="10515600" cy="274320"/>
+          </a:xfrm>
+          <a:prstGeom prst="rect">
+            <a:avLst/>
+          </a:prstGeom>
+          <a:noFill/>
+        </p:spPr>
+        <p:txBody>
+          <a:bodyPr wrap="square" anchor="t" lIns="18288" rIns="18288" tIns="9144" bIns="9144">
+            <a:spAutoFit/>
+          </a:bodyPr>
+          <a:lstStyle/>
+          <a:p>
+            <a:pPr algn="l">
+              <a:spcAft>
+                <a:spcPts val="200"/>
+              </a:spcAft>
+            </a:pPr>
+            <a:r>
+              <a:rPr sz="1050" b="1">
+                <a:solidFill>
+                  <a:srgbClr val="6B6B6B"/>
+                </a:solidFill>
+                <a:latin typeface="Apple SD Gothic Neo"/>
+                <a:ea typeface="Apple SD Gothic Neo"/>
+              </a:rPr>
+              <a:t>10  |  성과와 다음 단계</a:t>
+            </a:r>
+          </a:p>
+        </p:txBody>
+      </p:sp>
+      <p:sp>
+        <p:nvSpPr>
+          <p:cNvPr id="3" name="TextBox 2"/>
+          <p:cNvSpPr txBox="1"/>
+          <p:nvPr/>
+        </p:nvSpPr>
+        <p:spPr>
+          <a:xfrm>
+            <a:off x="548640" y="548640"/>
+            <a:ext cx="11064240" cy="548640"/>
+          </a:xfrm>
+          <a:prstGeom prst="rect">
+            <a:avLst/>
+          </a:prstGeom>
+          <a:noFill/>
+        </p:spPr>
+        <p:txBody>
+          <a:bodyPr wrap="square" anchor="t" lIns="18288" rIns="18288" tIns="9144" bIns="9144">
+            <a:spAutoFit/>
+          </a:bodyPr>
+          <a:lstStyle/>
+          <a:p>
+            <a:pPr algn="l">
+              <a:spcAft>
+                <a:spcPts val="200"/>
+              </a:spcAft>
+            </a:pPr>
+            <a:r>
+              <a:rPr sz="1700" b="1">
+                <a:solidFill>
+                  <a:srgbClr val="243447"/>
+                </a:solidFill>
+                <a:latin typeface="Apple SD Gothic Neo"/>
+                <a:ea typeface="Apple SD Gothic Neo"/>
+              </a:rPr>
+              <a:t>협업의 위치가 바뀌었습니다 — 검증 파트너에서 공동 연구 파트너로</a:t>
+            </a:r>
+          </a:p>
+        </p:txBody>
+      </p:sp>
+      <p:cxnSp>
+        <p:nvCxnSpPr>
+          <p:cNvPr id="4" name="Connector 3"/>
+          <p:cNvCxnSpPr/>
+          <p:nvPr/>
+        </p:nvCxnSpPr>
+        <p:spPr>
+          <a:xfrm>
+            <a:off x="548640" y="1115568"/>
+            <a:ext cx="11091672" cy="0"/>
+          </a:xfrm>
+          <a:prstGeom prst="line">
+            <a:avLst/>
+          </a:prstGeom>
+          <a:ln w="15240">
+            <a:solidFill>
+              <a:srgbClr val="243447"/>
+            </a:solidFill>
+          </a:ln>
+        </p:spPr>
+        <p:style>
+          <a:lnRef idx="2">
+            <a:schemeClr val="accent1"/>
+          </a:lnRef>
+          <a:fillRef idx="0">
+            <a:schemeClr val="accent1"/>
+          </a:fillRef>
+          <a:effectRef idx="1">
+            <a:schemeClr val="accent1"/>
+          </a:effectRef>
+          <a:fontRef idx="minor">
+            <a:schemeClr val="tx1"/>
+          </a:fontRef>
+        </p:style>
+      </p:cxnSp>
+      <p:sp>
+        <p:nvSpPr>
+          <p:cNvPr id="5" name="Rectangle 4"/>
+          <p:cNvSpPr/>
+          <p:nvPr/>
+        </p:nvSpPr>
+        <p:spPr>
+          <a:xfrm>
+            <a:off x="548640" y="1371600"/>
+            <a:ext cx="41148" cy="1005840"/>
+          </a:xfrm>
+          <a:prstGeom prst="rect">
+            <a:avLst/>
+          </a:prstGeom>
+          <a:solidFill>
+            <a:srgbClr val="008A3E"/>
+          </a:solidFill>
+          <a:ln>
+            <a:noFill/>
+          </a:ln>
+          <a:effectLst/>
+        </p:spPr>
+        <p:style>
+          <a:lnRef idx="1">
+            <a:schemeClr val="accent1"/>
+          </a:lnRef>
+          <a:fillRef idx="3">
+            <a:schemeClr val="accent1"/>
+          </a:fillRef>
+          <a:effectRef idx="2">
+            <a:schemeClr val="accent1"/>
+          </a:effectRef>
+          <a:fontRef idx="minor">
+            <a:schemeClr val="lt1"/>
+          </a:fontRef>
+        </p:style>
+        <p:txBody>
+          <a:bodyPr rtlCol="0" anchor="ctr"/>
+          <a:lstStyle/>
+          <a:p>
+            <a:pPr algn="ctr"/>
+          </a:p>
+        </p:txBody>
+      </p:sp>
+      <p:sp>
+        <p:nvSpPr>
+          <p:cNvPr id="6" name="TextBox 5"/>
+          <p:cNvSpPr txBox="1"/>
+          <p:nvPr/>
+        </p:nvSpPr>
+        <p:spPr>
+          <a:xfrm>
+            <a:off x="777240" y="1371600"/>
+            <a:ext cx="1920240" cy="365760"/>
+          </a:xfrm>
+          <a:prstGeom prst="rect">
+            <a:avLst/>
+          </a:prstGeom>
+          <a:noFill/>
+        </p:spPr>
+        <p:txBody>
+          <a:bodyPr wrap="square" anchor="t" lIns="18288" rIns="18288" tIns="9144" bIns="9144">
+            <a:spAutoFit/>
+          </a:bodyPr>
+          <a:lstStyle/>
+          <a:p>
+            <a:pPr algn="l">
+              <a:spcAft>
+                <a:spcPts val="200"/>
+              </a:spcAft>
+            </a:pPr>
+            <a:r>
+              <a:rPr sz="1250" b="1">
+                <a:solidFill>
+                  <a:srgbClr val="243447"/>
+                </a:solidFill>
+                <a:latin typeface="Apple SD Gothic Neo"/>
+                <a:ea typeface="Apple SD Gothic Neo"/>
+              </a:rPr>
+              <a:t>협업 관계</a:t>
+            </a:r>
+          </a:p>
+        </p:txBody>
+      </p:sp>
+      <p:sp>
+        <p:nvSpPr>
+          <p:cNvPr id="7" name="TextBox 6"/>
+          <p:cNvSpPr txBox="1"/>
+          <p:nvPr/>
+        </p:nvSpPr>
+        <p:spPr>
+          <a:xfrm>
+            <a:off x="2788920" y="1371600"/>
+            <a:ext cx="8778240" cy="822960"/>
+          </a:xfrm>
+          <a:prstGeom prst="rect">
+            <a:avLst/>
+          </a:prstGeom>
+          <a:noFill/>
+        </p:spPr>
+        <p:txBody>
+          <a:bodyPr wrap="square" anchor="t" lIns="18288" rIns="18288" tIns="9144" bIns="9144">
+            <a:spAutoFit/>
+          </a:bodyPr>
+          <a:lstStyle/>
+          <a:p>
+            <a:pPr algn="l">
+              <a:spcAft>
+                <a:spcPts val="200"/>
+              </a:spcAft>
+            </a:pPr>
+            <a:r>
+              <a:rPr sz="1050" b="0">
+                <a:solidFill>
+                  <a:srgbClr val="262626"/>
+                </a:solidFill>
+                <a:latin typeface="Apple SD Gothic Neo"/>
+                <a:ea typeface="Apple SD Gothic Neo"/>
+              </a:rPr>
+              <a:t>한은이 당사 자료를 자체 저장소에 수록하고, 적응학습으로의 협업 범위 확대를 먼저 제안 — 역할 분담 협의 중</a:t>
+            </a:r>
+          </a:p>
+        </p:txBody>
+      </p:sp>
+      <p:sp>
+        <p:nvSpPr>
+          <p:cNvPr id="8" name="Rectangle 7"/>
+          <p:cNvSpPr/>
+          <p:nvPr/>
+        </p:nvSpPr>
+        <p:spPr>
+          <a:xfrm>
+            <a:off x="548640" y="2560320"/>
+            <a:ext cx="41148" cy="1005840"/>
+          </a:xfrm>
+          <a:prstGeom prst="rect">
+            <a:avLst/>
+          </a:prstGeom>
+          <a:solidFill>
+            <a:srgbClr val="243447"/>
+          </a:solidFill>
+          <a:ln>
+            <a:noFill/>
+          </a:ln>
+          <a:effectLst/>
+        </p:spPr>
+        <p:style>
+          <a:lnRef idx="1">
+            <a:schemeClr val="accent1"/>
+          </a:lnRef>
+          <a:fillRef idx="3">
+            <a:schemeClr val="accent1"/>
+          </a:fillRef>
+          <a:effectRef idx="2">
+            <a:schemeClr val="accent1"/>
+          </a:effectRef>
+          <a:fontRef idx="minor">
+            <a:schemeClr val="lt1"/>
+          </a:fontRef>
+        </p:style>
+        <p:txBody>
+          <a:bodyPr rtlCol="0" anchor="ctr"/>
+          <a:lstStyle/>
+          <a:p>
+            <a:pPr algn="ctr"/>
+          </a:p>
+        </p:txBody>
+      </p:sp>
+      <p:sp>
+        <p:nvSpPr>
+          <p:cNvPr id="9" name="TextBox 8"/>
+          <p:cNvSpPr txBox="1"/>
+          <p:nvPr/>
+        </p:nvSpPr>
+        <p:spPr>
+          <a:xfrm>
+            <a:off x="777240" y="2560320"/>
+            <a:ext cx="1920240" cy="365760"/>
+          </a:xfrm>
+          <a:prstGeom prst="rect">
+            <a:avLst/>
+          </a:prstGeom>
+          <a:noFill/>
+        </p:spPr>
+        <p:txBody>
+          <a:bodyPr wrap="square" anchor="t" lIns="18288" rIns="18288" tIns="9144" bIns="9144">
+            <a:spAutoFit/>
+          </a:bodyPr>
+          <a:lstStyle/>
+          <a:p>
+            <a:pPr algn="l">
+              <a:spcAft>
+                <a:spcPts val="200"/>
+              </a:spcAft>
+            </a:pPr>
+            <a:r>
+              <a:rPr sz="1250" b="1">
+                <a:solidFill>
+                  <a:srgbClr val="243447"/>
+                </a:solidFill>
+                <a:latin typeface="Apple SD Gothic Neo"/>
+                <a:ea typeface="Apple SD Gothic Neo"/>
+              </a:rPr>
+              <a:t>기술 자산</a:t>
+            </a:r>
+          </a:p>
+        </p:txBody>
+      </p:sp>
+      <p:sp>
+        <p:nvSpPr>
+          <p:cNvPr id="10" name="TextBox 9"/>
+          <p:cNvSpPr txBox="1"/>
+          <p:nvPr/>
+        </p:nvSpPr>
+        <p:spPr>
+          <a:xfrm>
+            <a:off x="2788920" y="2560320"/>
+            <a:ext cx="8778240" cy="822960"/>
+          </a:xfrm>
+          <a:prstGeom prst="rect">
+            <a:avLst/>
+          </a:prstGeom>
+          <a:noFill/>
+        </p:spPr>
+        <p:txBody>
+          <a:bodyPr wrap="square" anchor="t" lIns="18288" rIns="18288" tIns="9144" bIns="9144">
+            <a:spAutoFit/>
+          </a:bodyPr>
+          <a:lstStyle/>
+          <a:p>
+            <a:pPr algn="l">
+              <a:spcAft>
+                <a:spcPts val="200"/>
+              </a:spcAft>
+            </a:pPr>
+            <a:r>
+              <a:rPr sz="1050" b="0">
+                <a:solidFill>
+                  <a:srgbClr val="262626"/>
+                </a:solidFill>
+                <a:latin typeface="Apple SD Gothic Neo"/>
+                <a:ea typeface="Apple SD Gothic Neo"/>
+              </a:rPr>
+              <a:t>실시간 검증 하네스 · 일별 빠른신호 파이프라인 · FM 절제/흡수력 진단 프레임 · LoRA 적응 러너 — 전부 재현 가능 스크립트로 관리 (50여 종)</a:t>
+            </a:r>
+          </a:p>
+        </p:txBody>
+      </p:sp>
+      <p:sp>
+        <p:nvSpPr>
+          <p:cNvPr id="11" name="Rectangle 10"/>
+          <p:cNvSpPr/>
+          <p:nvPr/>
+        </p:nvSpPr>
+        <p:spPr>
+          <a:xfrm>
+            <a:off x="548640" y="3749039"/>
+            <a:ext cx="41148" cy="1005840"/>
+          </a:xfrm>
+          <a:prstGeom prst="rect">
+            <a:avLst/>
+          </a:prstGeom>
+          <a:solidFill>
+            <a:srgbClr val="243447"/>
+          </a:solidFill>
+          <a:ln>
+            <a:noFill/>
+          </a:ln>
+          <a:effectLst/>
+        </p:spPr>
+        <p:style>
+          <a:lnRef idx="1">
+            <a:schemeClr val="accent1"/>
+          </a:lnRef>
+          <a:fillRef idx="3">
+            <a:schemeClr val="accent1"/>
+          </a:fillRef>
+          <a:effectRef idx="2">
+            <a:schemeClr val="accent1"/>
+          </a:effectRef>
+          <a:fontRef idx="minor">
+            <a:schemeClr val="lt1"/>
+          </a:fontRef>
+        </p:style>
+        <p:txBody>
+          <a:bodyPr rtlCol="0" anchor="ctr"/>
+          <a:lstStyle/>
+          <a:p>
+            <a:pPr algn="ctr"/>
+          </a:p>
+        </p:txBody>
+      </p:sp>
+      <p:sp>
+        <p:nvSpPr>
+          <p:cNvPr id="12" name="TextBox 11"/>
+          <p:cNvSpPr txBox="1"/>
+          <p:nvPr/>
+        </p:nvSpPr>
+        <p:spPr>
+          <a:xfrm>
+            <a:off x="777240" y="3749039"/>
+            <a:ext cx="1920240" cy="365760"/>
+          </a:xfrm>
+          <a:prstGeom prst="rect">
+            <a:avLst/>
+          </a:prstGeom>
+          <a:noFill/>
+        </p:spPr>
+        <p:txBody>
+          <a:bodyPr wrap="square" anchor="t" lIns="18288" rIns="18288" tIns="9144" bIns="9144">
+            <a:spAutoFit/>
+          </a:bodyPr>
+          <a:lstStyle/>
+          <a:p>
+            <a:pPr algn="l">
+              <a:spcAft>
+                <a:spcPts val="200"/>
+              </a:spcAft>
+            </a:pPr>
+            <a:r>
+              <a:rPr sz="1250" b="1">
+                <a:solidFill>
+                  <a:srgbClr val="243447"/>
+                </a:solidFill>
+                <a:latin typeface="Apple SD Gothic Neo"/>
+                <a:ea typeface="Apple SD Gothic Neo"/>
+              </a:rPr>
+              <a:t>공동 논문</a:t>
+            </a:r>
+          </a:p>
+        </p:txBody>
+      </p:sp>
+      <p:sp>
+        <p:nvSpPr>
+          <p:cNvPr id="13" name="TextBox 12"/>
+          <p:cNvSpPr txBox="1"/>
+          <p:nvPr/>
+        </p:nvSpPr>
+        <p:spPr>
+          <a:xfrm>
+            <a:off x="2788920" y="3749039"/>
+            <a:ext cx="8778240" cy="822960"/>
+          </a:xfrm>
+          <a:prstGeom prst="rect">
+            <a:avLst/>
+          </a:prstGeom>
+          <a:noFill/>
+        </p:spPr>
+        <p:txBody>
+          <a:bodyPr wrap="square" anchor="t" lIns="18288" rIns="18288" tIns="9144" bIns="9144">
+            <a:spAutoFit/>
+          </a:bodyPr>
+          <a:lstStyle/>
+          <a:p>
+            <a:pPr algn="l">
+              <a:spcAft>
+                <a:spcPts val="200"/>
+              </a:spcAft>
+            </a:pPr>
+            <a:r>
+              <a:rPr sz="1050" b="0">
+                <a:solidFill>
+                  <a:srgbClr val="262626"/>
+                </a:solidFill>
+                <a:latin typeface="Apple SD Gothic Neo"/>
+                <a:ea typeface="Apple SD Gothic Neo"/>
+              </a:rPr>
+              <a:t>"사전학습 시계열 모델은 언제 가치를 더하는가" — 기여 5건 실측 완료 + 적응학습 장(章) 추가. 한은 WP 선행 후 국제 학술지(IJF) 투고 구도</a:t>
+            </a:r>
+          </a:p>
+        </p:txBody>
+      </p:sp>
+      <p:sp>
+        <p:nvSpPr>
+          <p:cNvPr id="14" name="Rectangle 13"/>
+          <p:cNvSpPr/>
+          <p:nvPr/>
+        </p:nvSpPr>
+        <p:spPr>
+          <a:xfrm>
+            <a:off x="548640" y="4937759"/>
+            <a:ext cx="41148" cy="1005840"/>
+          </a:xfrm>
+          <a:prstGeom prst="rect">
+            <a:avLst/>
+          </a:prstGeom>
+          <a:solidFill>
+            <a:srgbClr val="B0532F"/>
+          </a:solidFill>
+          <a:ln>
+            <a:noFill/>
+          </a:ln>
+          <a:effectLst/>
+        </p:spPr>
+        <p:style>
+          <a:lnRef idx="1">
+            <a:schemeClr val="accent1"/>
+          </a:lnRef>
+          <a:fillRef idx="3">
+            <a:schemeClr val="accent1"/>
+          </a:fillRef>
+          <a:effectRef idx="2">
+            <a:schemeClr val="accent1"/>
+          </a:effectRef>
+          <a:fontRef idx="minor">
+            <a:schemeClr val="lt1"/>
+          </a:fontRef>
+        </p:style>
+        <p:txBody>
+          <a:bodyPr rtlCol="0" anchor="ctr"/>
+          <a:lstStyle/>
+          <a:p>
+            <a:pPr algn="ctr"/>
+          </a:p>
+        </p:txBody>
+      </p:sp>
+      <p:sp>
+        <p:nvSpPr>
+          <p:cNvPr id="15" name="TextBox 14"/>
+          <p:cNvSpPr txBox="1"/>
+          <p:nvPr/>
+        </p:nvSpPr>
+        <p:spPr>
+          <a:xfrm>
+            <a:off x="777240" y="4937759"/>
+            <a:ext cx="1920240" cy="365760"/>
+          </a:xfrm>
+          <a:prstGeom prst="rect">
+            <a:avLst/>
+          </a:prstGeom>
+          <a:noFill/>
+        </p:spPr>
+        <p:txBody>
+          <a:bodyPr wrap="square" anchor="t" lIns="18288" rIns="18288" tIns="9144" bIns="9144">
+            <a:spAutoFit/>
+          </a:bodyPr>
+          <a:lstStyle/>
+          <a:p>
+            <a:pPr algn="l">
+              <a:spcAft>
+                <a:spcPts val="200"/>
+              </a:spcAft>
+            </a:pPr>
+            <a:r>
+              <a:rPr sz="1250" b="1">
+                <a:solidFill>
+                  <a:srgbClr val="243447"/>
+                </a:solidFill>
+                <a:latin typeface="Apple SD Gothic Neo"/>
+                <a:ea typeface="Apple SD Gothic Neo"/>
+              </a:rPr>
+              <a:t>다음 결정</a:t>
+            </a:r>
+          </a:p>
+        </p:txBody>
+      </p:sp>
+      <p:sp>
+        <p:nvSpPr>
+          <p:cNvPr id="16" name="TextBox 15"/>
+          <p:cNvSpPr txBox="1"/>
+          <p:nvPr/>
+        </p:nvSpPr>
+        <p:spPr>
+          <a:xfrm>
+            <a:off x="2788920" y="4937759"/>
+            <a:ext cx="8778240" cy="822960"/>
+          </a:xfrm>
+          <a:prstGeom prst="rect">
+            <a:avLst/>
+          </a:prstGeom>
+          <a:noFill/>
+        </p:spPr>
+        <p:txBody>
+          <a:bodyPr wrap="square" anchor="t" lIns="18288" rIns="18288" tIns="9144" bIns="9144">
+            <a:spAutoFit/>
+          </a:bodyPr>
+          <a:lstStyle/>
+          <a:p>
+            <a:pPr algn="l">
+              <a:spcAft>
+                <a:spcPts val="200"/>
+              </a:spcAft>
+            </a:pPr>
+            <a:r>
+              <a:rPr sz="1050" b="0">
+                <a:solidFill>
+                  <a:srgbClr val="262626"/>
+                </a:solidFill>
+                <a:latin typeface="Apple SD Gothic Neo"/>
+                <a:ea typeface="Apple SD Gothic Neo"/>
+              </a:rPr>
+              <a:t>① 적응학습 역할 분담 확정(당사: Chronos-2 트랙·적응 안정화) ② 논문 집필 착수 ③ 운영 권고안의 병행 산출 개시 여부</a:t>
+            </a:r>
+          </a:p>
+        </p:txBody>
+      </p:sp>
+      <p:sp>
+        <p:nvSpPr>
+          <p:cNvPr id="17" name="TextBox 16"/>
+          <p:cNvSpPr txBox="1"/>
+          <p:nvPr/>
+        </p:nvSpPr>
+        <p:spPr>
+          <a:xfrm>
+            <a:off x="548640" y="6172200"/>
+            <a:ext cx="10972800" cy="274320"/>
+          </a:xfrm>
+          <a:prstGeom prst="rect">
+            <a:avLst/>
+          </a:prstGeom>
+          <a:noFill/>
+        </p:spPr>
+        <p:txBody>
+          <a:bodyPr wrap="square" anchor="t" lIns="18288" rIns="18288" tIns="9144" bIns="9144">
+            <a:spAutoFit/>
+          </a:bodyPr>
+          <a:lstStyle/>
+          <a:p>
+            <a:pPr algn="l">
+              <a:spcAft>
+                <a:spcPts val="200"/>
+              </a:spcAft>
+            </a:pPr>
+            <a:r>
+              <a:rPr sz="1100" b="1">
+                <a:solidFill>
+                  <a:srgbClr val="243447"/>
+                </a:solidFill>
+                <a:latin typeface="Apple SD Gothic Neo"/>
+                <a:ea typeface="Apple SD Gothic Neo"/>
+              </a:rPr>
+              <a:t>FDE로서의 3개월: 출발점이었던 BISTRO 해석 질의에 원본 실측과 적응 개선으로 답하며 한 바퀴를 완성 — 고객의 결함엔 당일 재검증으로, 진단엔 원인 규명으로, 제안엔 첫 실증으로.</a:t>
+            </a:r>
+          </a:p>
+        </p:txBody>
+      </p:sp>
+      <p:sp>
+        <p:nvSpPr>
+          <p:cNvPr id="18" name="TextBox 17"/>
+          <p:cNvSpPr txBox="1"/>
+          <p:nvPr/>
+        </p:nvSpPr>
+        <p:spPr>
+          <a:xfrm>
+            <a:off x="548640" y="6492240"/>
+            <a:ext cx="10607040" cy="274320"/>
+          </a:xfrm>
+          <a:prstGeom prst="rect">
+            <a:avLst/>
+          </a:prstGeom>
+          <a:noFill/>
+        </p:spPr>
+        <p:txBody>
+          <a:bodyPr wrap="square" anchor="t" lIns="18288" rIns="18288" tIns="9144" bIns="9144">
+            <a:spAutoFit/>
+          </a:bodyPr>
+          <a:lstStyle/>
+          <a:p>
+            <a:pPr algn="l">
+              <a:spcAft>
+                <a:spcPts val="200"/>
+              </a:spcAft>
+            </a:pPr>
+            <a:r>
+              <a:rPr sz="800" b="0">
+                <a:solidFill>
+                  <a:srgbClr val="6B6B6B"/>
+                </a:solidFill>
+                <a:latin typeface="Apple SD Gothic Neo"/>
+                <a:ea typeface="Apple SD Gothic Neo"/>
+              </a:rPr>
+              <a:t>주: 공통 규약: 한은 실시간 빈티지 · 속보치 기준 · 전망주차 w[-19,-1] 평균 RMSE · 2018Q1~2025Q4(32개 분기). 낮을수록 정확.</a:t>
+            </a:r>
+          </a:p>
+        </p:txBody>
+      </p:sp>
+      <p:sp>
+        <p:nvSpPr>
+          <p:cNvPr id="19" name="TextBox 18"/>
+          <p:cNvSpPr txBox="1"/>
+          <p:nvPr/>
+        </p:nvSpPr>
+        <p:spPr>
+          <a:xfrm>
+            <a:off x="11750040" y="6492240"/>
+            <a:ext cx="365760" cy="228600"/>
+          </a:xfrm>
+          <a:prstGeom prst="rect">
+            <a:avLst/>
+          </a:prstGeom>
+          <a:noFill/>
+        </p:spPr>
+        <p:txBody>
+          <a:bodyPr wrap="square" anchor="t" lIns="18288" rIns="18288" tIns="9144" bIns="9144">
+            <a:spAutoFit/>
+          </a:bodyPr>
+          <a:lstStyle/>
+          <a:p>
+            <a:pPr algn="r">
+              <a:spcAft>
+                <a:spcPts val="200"/>
+              </a:spcAft>
+            </a:pPr>
+            <a:r>
+              <a:rPr sz="900" b="0">
+                <a:solidFill>
+                  <a:srgbClr val="6B6B6B"/>
+                </a:solidFill>
+                <a:latin typeface="Apple SD Gothic Neo"/>
+                <a:ea typeface="Apple SD Gothic Neo"/>
+              </a:rPr>
+              <a:t>11</a:t>
             </a:r>
           </a:p>
         </p:txBody>

--- a/docs/한은협업_여정보고_대표_2026-09-01.pptx
+++ b/docs/한은협업_여정보고_대표_2026-09-01.pptx
@@ -582,7 +582,7 @@
           <a:lstStyle/>
           <a:p>
             <a:r>
-              <a:t>FDE 활동의 실체를 보여주는 장. 핵심 주장: 고객의 커밋을 읽는 능력(diff에서 단위 결함·실험 설계를 독해)과 재현 가능한 코드로 회신하는 속도(당일 재검증, 3일 내 실증)가 FDE의 차별점. 기밀 관리도 언급 가능 — 한은 빈티지 데이터는 저장소 분리·커밋 금지 규칙 유지.</a:t>
+              <a:t>FDE 활동의 실체를 보여주는 장. 양방향 초상: 한은은 데이터·기준점을 명확히 하는 파트너(빈티지 정비, 자기 결함 개정, 실험 코드 공개)였고, 당사는 그 커밋을 읽고(diff에서 단위 결함·실험 설계 독해) 재현 가능한 코드로 빠르게 회신(당일 재검증, 3일 내 실증)하는 파트너. 기밀 관리 구두 포인트 — 한은 빈티지 데이터는 저장소 분리·커밋 금지 규칙 유지.</a:t>
             </a:r>
           </a:p>
         </p:txBody>
@@ -4557,7 +4557,7 @@
                 <a:latin typeface="Apple SD Gothic Neo"/>
                 <a:ea typeface="Apple SD Gothic Neo"/>
               </a:rPr>
-              <a:t>회의보다 커밋 — 모든 협업이 GitHub 문서·코드 리뷰로 진행됐습니다</a:t>
+              <a:t>모든 협업을 GitHub 문서와 코드 리뷰로 진행했습니다</a:t>
             </a:r>
           </a:p>
         </p:txBody>
@@ -4632,7 +4632,7 @@
                 <a:latin typeface="Apple SD Gothic Neo"/>
                 <a:ea typeface="Apple SD Gothic Neo"/>
               </a:rPr>
-              <a:t>한은이 코드와 리포트를 커밋하면, 당사가 커밋 단위로 리뷰·재검증하고 재현 가능한 스크립트와 문서로 회신하는 비동기 협업 — 요구사항 분석이 곧 코드 리뷰였습니다.</a:t>
+              <a:t>한은이 코드와 리포트를 커밋하면, 당사가 커밋 단위로 리뷰·재검증하고 재현 가능한 스크립트와 문서로 회신하는 비동기 협업 방식이었습니다. 고객 코드를 읽는 것이 요구사항 분석이었습니다.</a:t>
             </a:r>
           </a:p>
         </p:txBody>
@@ -4760,8 +4760,8 @@
         </p:nvSpPr>
         <p:spPr>
           <a:xfrm>
-            <a:off x="548640" y="2286000"/>
-            <a:ext cx="41148" cy="1051560"/>
+            <a:off x="548640" y="2267712"/>
+            <a:ext cx="41148" cy="841248"/>
           </a:xfrm>
           <a:prstGeom prst="rect">
             <a:avLst/>
@@ -4804,8 +4804,8 @@
         </p:nvSpPr>
         <p:spPr>
           <a:xfrm>
-            <a:off x="749808" y="2286000"/>
-            <a:ext cx="5212080" cy="320040"/>
+            <a:off x="749808" y="2267712"/>
+            <a:ext cx="5212080" cy="292608"/>
           </a:xfrm>
           <a:prstGeom prst="rect">
             <a:avLst/>
@@ -4831,7 +4831,7 @@
                 <a:latin typeface="Apple SD Gothic Neo"/>
                 <a:ea typeface="Apple SD Gothic Neo"/>
               </a:rPr>
-              <a:t>8/4  "코드 수정 및 산출물 저장"</a:t>
+              <a:t>6월~  빈티지 데이터셋·평가 기준 정비</a:t>
             </a:r>
           </a:p>
         </p:txBody>
@@ -4844,8 +4844,8 @@
         </p:nvSpPr>
         <p:spPr>
           <a:xfrm>
-            <a:off x="749808" y="2596896"/>
-            <a:ext cx="5257800" cy="731520"/>
+            <a:off x="749808" y="2560320"/>
+            <a:ext cx="5257800" cy="566928"/>
           </a:xfrm>
           <a:prstGeom prst="rect">
             <a:avLst/>
@@ -4864,14 +4864,14 @@
               </a:spcAft>
             </a:pPr>
             <a:r>
-              <a:rPr sz="930" b="0">
+              <a:rPr sz="919" b="0">
                 <a:solidFill>
                   <a:srgbClr val="6B6B6B"/>
                 </a:solidFill>
                 <a:latin typeface="Apple SD Gothic Neo"/>
                 <a:ea typeface="Apple SD Gothic Neo"/>
               </a:rPr>
-              <a:t>예측단위 개정(schema v2) — diff에서 단위 결함 수정과 검증 로직 강화를 파악</a:t>
+              <a:t>주간 실시간 빈티지(73개 지표)·기준모형 예측·평가 그리드를 정비해 제공 — 협업의 공통 잣대를 한은이 먼저 명확히 함</a:t>
             </a:r>
           </a:p>
         </p:txBody>
@@ -4884,8 +4884,8 @@
         </p:nvSpPr>
         <p:spPr>
           <a:xfrm>
-            <a:off x="6309360" y="2286000"/>
-            <a:ext cx="41148" cy="1051560"/>
+            <a:off x="6309360" y="2267712"/>
+            <a:ext cx="41148" cy="841248"/>
           </a:xfrm>
           <a:prstGeom prst="rect">
             <a:avLst/>
@@ -4928,8 +4928,8 @@
         </p:nvSpPr>
         <p:spPr>
           <a:xfrm>
-            <a:off x="6510528" y="2286000"/>
-            <a:ext cx="2377440" cy="320040"/>
+            <a:off x="6510528" y="2267712"/>
+            <a:ext cx="2651760" cy="292608"/>
           </a:xfrm>
           <a:prstGeom prst="rect">
             <a:avLst/>
@@ -4955,7 +4955,7 @@
                 <a:latin typeface="Apple SD Gothic Neo"/>
                 <a:ea typeface="Apple SD Gothic Neo"/>
               </a:rPr>
-              <a:t>당일 재검증</a:t>
+              <a:t>그 잣대 위에 하네스</a:t>
             </a:r>
           </a:p>
         </p:txBody>
@@ -4968,8 +4968,8 @@
         </p:nvSpPr>
         <p:spPr>
           <a:xfrm>
-            <a:off x="6510528" y="2596896"/>
-            <a:ext cx="5074920" cy="731520"/>
+            <a:off x="6510528" y="2560320"/>
+            <a:ext cx="5074920" cy="566928"/>
           </a:xfrm>
           <a:prstGeom prst="rect">
             <a:avLst/>
@@ -4988,14 +4988,14 @@
               </a:spcAft>
             </a:pPr>
             <a:r>
-              <a:rPr sz="930" b="0">
+              <a:rPr sz="919" b="0">
                 <a:solidFill>
                   <a:srgbClr val="262626"/>
                 </a:solidFill>
                 <a:latin typeface="Apple SD Gothic Neo"/>
                 <a:ea typeface="Apple SD Gothic Neo"/>
               </a:rPr>
-              <a:t>40여 구성 전면 재채점 → 신 기준선(XGBoost 단독) 확정, 당사 종전 기록도 함께 폐기</a:t>
+              <a:t>제공 그리드 그대로 재현 채점 체계 구축 — 이후 모든 실험(양측)이 같은 잣대로 비교 가능해짐</a:t>
             </a:r>
           </a:p>
         </p:txBody>
@@ -5008,8 +5008,8 @@
         </p:nvSpPr>
         <p:spPr>
           <a:xfrm>
-            <a:off x="548640" y="3493008"/>
-            <a:ext cx="41148" cy="1051560"/>
+            <a:off x="548640" y="3236976"/>
+            <a:ext cx="41148" cy="841248"/>
           </a:xfrm>
           <a:prstGeom prst="rect">
             <a:avLst/>
@@ -5052,8 +5052,8 @@
         </p:nvSpPr>
         <p:spPr>
           <a:xfrm>
-            <a:off x="749808" y="3493008"/>
-            <a:ext cx="5212080" cy="320040"/>
+            <a:off x="749808" y="3236976"/>
+            <a:ext cx="5212080" cy="292608"/>
           </a:xfrm>
           <a:prstGeom prst="rect">
             <a:avLst/>
@@ -5079,7 +5079,7 @@
                 <a:latin typeface="Apple SD Gothic Neo"/>
                 <a:ea typeface="Apple SD Gothic Neo"/>
               </a:rPr>
-              <a:t>8/25  "Add BISTRO nowcasting experiments..."</a:t>
+              <a:t>8/4  "코드 수정 및 산출물 저장"</a:t>
             </a:r>
           </a:p>
         </p:txBody>
@@ -5092,8 +5092,8 @@
         </p:nvSpPr>
         <p:spPr>
           <a:xfrm>
-            <a:off x="749808" y="3803904"/>
-            <a:ext cx="5257800" cy="731520"/>
+            <a:off x="749808" y="3529584"/>
+            <a:ext cx="5257800" cy="566928"/>
           </a:xfrm>
           <a:prstGeom prst="rect">
             <a:avLst/>
@@ -5112,14 +5112,14 @@
               </a:spcAft>
             </a:pPr>
             <a:r>
-              <a:rPr sz="930" b="0">
+              <a:rPr sz="919" b="0">
                 <a:solidFill>
                   <a:srgbClr val="6B6B6B"/>
                 </a:solidFill>
                 <a:latin typeface="Apple SD Gothic Neo"/>
                 <a:ea typeface="Apple SD Gothic Neo"/>
               </a:rPr>
-              <a:t>실험 코드 16종 + 테스트 + 회의자료(typ) 3.7만 줄 — 코드에서 실험 설계·한계까지 독해</a:t>
+              <a:t>예측단위 개정(schema v2) + 구버전 산출물 차단 검증 로직 — 기준점을 스스로 바로잡음</a:t>
             </a:r>
           </a:p>
         </p:txBody>
@@ -5132,8 +5132,8 @@
         </p:nvSpPr>
         <p:spPr>
           <a:xfrm>
-            <a:off x="6309360" y="3493008"/>
-            <a:ext cx="41148" cy="1051560"/>
+            <a:off x="6309360" y="3236976"/>
+            <a:ext cx="41148" cy="841248"/>
           </a:xfrm>
           <a:prstGeom prst="rect">
             <a:avLst/>
@@ -5176,8 +5176,8 @@
         </p:nvSpPr>
         <p:spPr>
           <a:xfrm>
-            <a:off x="6510528" y="3493008"/>
-            <a:ext cx="2377440" cy="320040"/>
+            <a:off x="6510528" y="3236976"/>
+            <a:ext cx="2651760" cy="292608"/>
           </a:xfrm>
           <a:prstGeom prst="rect">
             <a:avLst/>
@@ -5203,7 +5203,7 @@
                 <a:latin typeface="Apple SD Gothic Neo"/>
                 <a:ea typeface="Apple SD Gothic Neo"/>
               </a:rPr>
-              <a:t>익일 진단 재현 → 3일 내 첫 실증</a:t>
+              <a:t>당일 재검증</a:t>
             </a:r>
           </a:p>
         </p:txBody>
@@ -5216,8 +5216,8 @@
         </p:nvSpPr>
         <p:spPr>
           <a:xfrm>
-            <a:off x="6510528" y="3803904"/>
-            <a:ext cx="5074920" cy="731520"/>
+            <a:off x="6510528" y="3529584"/>
+            <a:ext cx="5074920" cy="566928"/>
           </a:xfrm>
           <a:prstGeom prst="rect">
             <a:avLst/>
@@ -5236,14 +5236,14 @@
               </a:spcAft>
             </a:pPr>
             <a:r>
-              <a:rPr sz="930" b="0">
+              <a:rPr sz="919" b="0">
                 <a:solidFill>
                   <a:srgbClr val="262626"/>
                 </a:solidFill>
                 <a:latin typeface="Apple SD Gothic Neo"/>
                 <a:ea typeface="Apple SD Gothic Neo"/>
               </a:rPr>
-              <a:t>주차별 흡수력 진단 재현·원인 규명(회의대응 1p) → 그들이 제안만 한 적응학습을 LoRA로 첫 실측</a:t>
+              <a:t>40여 구성 전면 재채점 → 신 기준선(XGBoost 단독) 확정, 당사 종전 기록도 함께 폐기</a:t>
             </a:r>
           </a:p>
         </p:txBody>
@@ -5256,8 +5256,8 @@
         </p:nvSpPr>
         <p:spPr>
           <a:xfrm>
-            <a:off x="548640" y="4700016"/>
-            <a:ext cx="41148" cy="1051560"/>
+            <a:off x="548640" y="4206240"/>
+            <a:ext cx="41148" cy="841248"/>
           </a:xfrm>
           <a:prstGeom prst="rect">
             <a:avLst/>
@@ -5300,8 +5300,8 @@
         </p:nvSpPr>
         <p:spPr>
           <a:xfrm>
-            <a:off x="749808" y="4700016"/>
-            <a:ext cx="5212080" cy="320040"/>
+            <a:off x="749808" y="4206240"/>
+            <a:ext cx="5212080" cy="292608"/>
           </a:xfrm>
           <a:prstGeom prst="rect">
             <a:avLst/>
@@ -5327,7 +5327,7 @@
                 <a:latin typeface="Apple SD Gothic Neo"/>
                 <a:ea typeface="Apple SD Gothic Neo"/>
               </a:rPr>
-              <a:t>(수신 확인도 커밋으로)</a:t>
+              <a:t>8/25  "Add BISTRO nowcasting experiments..."</a:t>
             </a:r>
           </a:p>
         </p:txBody>
@@ -5340,8 +5340,8 @@
         </p:nvSpPr>
         <p:spPr>
           <a:xfrm>
-            <a:off x="749808" y="5010912"/>
-            <a:ext cx="5257800" cy="731520"/>
+            <a:off x="749808" y="4498848"/>
+            <a:ext cx="5257800" cy="566928"/>
           </a:xfrm>
           <a:prstGeom prst="rect">
             <a:avLst/>
@@ -5360,14 +5360,14 @@
               </a:spcAft>
             </a:pPr>
             <a:r>
-              <a:rPr sz="930" b="0">
+              <a:rPr sz="919" b="0">
                 <a:solidFill>
                   <a:srgbClr val="6B6B6B"/>
                 </a:solidFill>
                 <a:latin typeface="Apple SD Gothic Neo"/>
                 <a:ea typeface="Apple SD Gothic Neo"/>
               </a:rPr>
-              <a:t>당사 종합리포트 PDF를 한은이 자기 저장소에 커밋 — 산출물이 고객의 공식 기록에 편입</a:t>
+              <a:t>실험 코드 16종 + 테스트 + 회의자료 3.7만 줄 — 코드에서 실험 설계·한계까지 독해</a:t>
             </a:r>
           </a:p>
         </p:txBody>
@@ -5380,8 +5380,8 @@
         </p:nvSpPr>
         <p:spPr>
           <a:xfrm>
-            <a:off x="6309360" y="4700016"/>
-            <a:ext cx="41148" cy="1051560"/>
+            <a:off x="6309360" y="4206240"/>
+            <a:ext cx="41148" cy="841248"/>
           </a:xfrm>
           <a:prstGeom prst="rect">
             <a:avLst/>
@@ -5424,8 +5424,8 @@
         </p:nvSpPr>
         <p:spPr>
           <a:xfrm>
-            <a:off x="6510528" y="4700016"/>
-            <a:ext cx="2377440" cy="320040"/>
+            <a:off x="6510528" y="4206240"/>
+            <a:ext cx="2651760" cy="292608"/>
           </a:xfrm>
           <a:prstGeom prst="rect">
             <a:avLst/>
@@ -5451,7 +5451,7 @@
                 <a:latin typeface="Apple SD Gothic Neo"/>
                 <a:ea typeface="Apple SD Gothic Neo"/>
               </a:rPr>
-              <a:t>산출물 = 코드</a:t>
+              <a:t>익일 진단 재현 → 3일 내 첫 실증</a:t>
             </a:r>
           </a:p>
         </p:txBody>
@@ -5464,8 +5464,8 @@
         </p:nvSpPr>
         <p:spPr>
           <a:xfrm>
-            <a:off x="6510528" y="5010912"/>
-            <a:ext cx="5074920" cy="731520"/>
+            <a:off x="6510528" y="4498848"/>
+            <a:ext cx="5074920" cy="566928"/>
           </a:xfrm>
           <a:prstGeom prst="rect">
             <a:avLst/>
@@ -5484,14 +5484,14 @@
               </a:spcAft>
             </a:pPr>
             <a:r>
-              <a:rPr sz="930" b="0">
+              <a:rPr sz="919" b="0">
                 <a:solidFill>
                   <a:srgbClr val="262626"/>
                 </a:solidFill>
                 <a:latin typeface="Apple SD Gothic Neo"/>
                 <a:ea typeface="Apple SD Gothic Neo"/>
               </a:rPr>
-              <a:t>실험 스크립트 50여 종을 결과·교훈 주석과 함께 커밋 — 실패(기각 실험)도 재현 가능한 기록으로</a:t>
+              <a:t>주차별 흡수력 진단 재현·원인 규명 → 그들이 제안만 한 적응학습을 LoRA로 첫 실측</a:t>
             </a:r>
           </a:p>
         </p:txBody>
@@ -5504,14 +5504,14 @@
         </p:nvSpPr>
         <p:spPr>
           <a:xfrm>
-            <a:off x="548640" y="5943600"/>
-            <a:ext cx="11091672" cy="457200"/>
+            <a:off x="548640" y="5175504"/>
+            <a:ext cx="41148" cy="841248"/>
           </a:xfrm>
           <a:prstGeom prst="rect">
             <a:avLst/>
           </a:prstGeom>
           <a:solidFill>
-            <a:srgbClr val="F5F5F4"/>
+            <a:srgbClr val="243447"/>
           </a:solidFill>
           <a:ln>
             <a:noFill/>
@@ -5542,20 +5542,100 @@
       </p:sp>
       <p:sp>
         <p:nvSpPr>
-          <p:cNvPr id="28" name="Rectangle 27"/>
+          <p:cNvPr id="28" name="TextBox 27"/>
+          <p:cNvSpPr txBox="1"/>
+          <p:nvPr/>
+        </p:nvSpPr>
+        <p:spPr>
+          <a:xfrm>
+            <a:off x="749808" y="5175504"/>
+            <a:ext cx="5212080" cy="292608"/>
+          </a:xfrm>
+          <a:prstGeom prst="rect">
+            <a:avLst/>
+          </a:prstGeom>
+          <a:noFill/>
+        </p:spPr>
+        <p:txBody>
+          <a:bodyPr wrap="square" anchor="t" lIns="18288" rIns="18288" tIns="9144" bIns="9144">
+            <a:spAutoFit/>
+          </a:bodyPr>
+          <a:lstStyle/>
+          <a:p>
+            <a:pPr algn="l">
+              <a:spcAft>
+                <a:spcPts val="200"/>
+              </a:spcAft>
+            </a:pPr>
+            <a:r>
+              <a:rPr sz="1050" b="1">
+                <a:solidFill>
+                  <a:srgbClr val="262626"/>
+                </a:solidFill>
+                <a:latin typeface="Apple SD Gothic Neo"/>
+                <a:ea typeface="Apple SD Gothic Neo"/>
+              </a:rPr>
+              <a:t>(수신 확인도 커밋으로)</a:t>
+            </a:r>
+          </a:p>
+        </p:txBody>
+      </p:sp>
+      <p:sp>
+        <p:nvSpPr>
+          <p:cNvPr id="29" name="TextBox 28"/>
+          <p:cNvSpPr txBox="1"/>
+          <p:nvPr/>
+        </p:nvSpPr>
+        <p:spPr>
+          <a:xfrm>
+            <a:off x="749808" y="5468112"/>
+            <a:ext cx="5257800" cy="566928"/>
+          </a:xfrm>
+          <a:prstGeom prst="rect">
+            <a:avLst/>
+          </a:prstGeom>
+          <a:noFill/>
+        </p:spPr>
+        <p:txBody>
+          <a:bodyPr wrap="square" anchor="t" lIns="18288" rIns="18288" tIns="9144" bIns="9144">
+            <a:spAutoFit/>
+          </a:bodyPr>
+          <a:lstStyle/>
+          <a:p>
+            <a:pPr algn="l">
+              <a:spcAft>
+                <a:spcPts val="200"/>
+              </a:spcAft>
+            </a:pPr>
+            <a:r>
+              <a:rPr sz="919" b="0">
+                <a:solidFill>
+                  <a:srgbClr val="6B6B6B"/>
+                </a:solidFill>
+                <a:latin typeface="Apple SD Gothic Neo"/>
+                <a:ea typeface="Apple SD Gothic Neo"/>
+              </a:rPr>
+              <a:t>당사 종합리포트 PDF를 한은이 자기 저장소에 커밋 — 산출물이 고객의 공식 기록에 편입</a:t>
+            </a:r>
+          </a:p>
+        </p:txBody>
+      </p:sp>
+      <p:sp>
+        <p:nvSpPr>
+          <p:cNvPr id="30" name="Rectangle 29"/>
           <p:cNvSpPr/>
           <p:nvPr/>
         </p:nvSpPr>
         <p:spPr>
           <a:xfrm>
-            <a:off x="548640" y="5943600"/>
-            <a:ext cx="41148" cy="457200"/>
+            <a:off x="6309360" y="5175504"/>
+            <a:ext cx="41148" cy="841248"/>
           </a:xfrm>
           <a:prstGeom prst="rect">
             <a:avLst/>
           </a:prstGeom>
           <a:solidFill>
-            <a:srgbClr val="243447"/>
+            <a:srgbClr val="008A3E"/>
           </a:solidFill>
           <a:ln>
             <a:noFill/>
@@ -5586,14 +5666,14 @@
       </p:sp>
       <p:sp>
         <p:nvSpPr>
-          <p:cNvPr id="29" name="TextBox 28"/>
+          <p:cNvPr id="31" name="TextBox 30"/>
           <p:cNvSpPr txBox="1"/>
           <p:nvPr/>
         </p:nvSpPr>
         <p:spPr>
           <a:xfrm>
-            <a:off x="777240" y="6016752"/>
-            <a:ext cx="10698480" cy="320040"/>
+            <a:off x="6510528" y="5175504"/>
+            <a:ext cx="2651760" cy="292608"/>
           </a:xfrm>
           <a:prstGeom prst="rect">
             <a:avLst/>
@@ -5614,26 +5694,26 @@
             <a:r>
               <a:rPr sz="1050" b="1">
                 <a:solidFill>
-                  <a:srgbClr val="243447"/>
-                </a:solidFill>
-                <a:latin typeface="Apple SD Gothic Neo"/>
-                <a:ea typeface="Apple SD Gothic Neo"/>
-              </a:rPr>
-              <a:t>이 방식의 가치: 협업의 전 과정이 커밋 로그로 남아 재현·감사가 가능 — 중앙은행과 일하는 형식 그 자체가 신뢰의 근거가 됩니다.</a:t>
-            </a:r>
-          </a:p>
-        </p:txBody>
-      </p:sp>
-      <p:sp>
-        <p:nvSpPr>
-          <p:cNvPr id="30" name="TextBox 29"/>
+                  <a:srgbClr val="008A3E"/>
+                </a:solidFill>
+                <a:latin typeface="Apple SD Gothic Neo"/>
+                <a:ea typeface="Apple SD Gothic Neo"/>
+              </a:rPr>
+              <a:t>산출물 = 코드</a:t>
+            </a:r>
+          </a:p>
+        </p:txBody>
+      </p:sp>
+      <p:sp>
+        <p:nvSpPr>
+          <p:cNvPr id="32" name="TextBox 31"/>
           <p:cNvSpPr txBox="1"/>
           <p:nvPr/>
         </p:nvSpPr>
         <p:spPr>
           <a:xfrm>
-            <a:off x="548640" y="6492240"/>
-            <a:ext cx="10607040" cy="274320"/>
+            <a:off x="6510528" y="5468112"/>
+            <a:ext cx="5074920" cy="566928"/>
           </a:xfrm>
           <a:prstGeom prst="rect">
             <a:avLst/>
@@ -5652,6 +5732,174 @@
               </a:spcAft>
             </a:pPr>
             <a:r>
+              <a:rPr sz="919" b="0">
+                <a:solidFill>
+                  <a:srgbClr val="262626"/>
+                </a:solidFill>
+                <a:latin typeface="Apple SD Gothic Neo"/>
+                <a:ea typeface="Apple SD Gothic Neo"/>
+              </a:rPr>
+              <a:t>실험 스크립트 50여 종을 결과·교훈 주석과 함께 커밋 — 실패(기각 실험)도 재현 가능한 기록으로</a:t>
+            </a:r>
+          </a:p>
+        </p:txBody>
+      </p:sp>
+      <p:sp>
+        <p:nvSpPr>
+          <p:cNvPr id="33" name="Rectangle 32"/>
+          <p:cNvSpPr/>
+          <p:nvPr/>
+        </p:nvSpPr>
+        <p:spPr>
+          <a:xfrm>
+            <a:off x="548640" y="6053328"/>
+            <a:ext cx="11091672" cy="384048"/>
+          </a:xfrm>
+          <a:prstGeom prst="rect">
+            <a:avLst/>
+          </a:prstGeom>
+          <a:solidFill>
+            <a:srgbClr val="F5F5F4"/>
+          </a:solidFill>
+          <a:ln>
+            <a:noFill/>
+          </a:ln>
+          <a:effectLst/>
+        </p:spPr>
+        <p:style>
+          <a:lnRef idx="1">
+            <a:schemeClr val="accent1"/>
+          </a:lnRef>
+          <a:fillRef idx="3">
+            <a:schemeClr val="accent1"/>
+          </a:fillRef>
+          <a:effectRef idx="2">
+            <a:schemeClr val="accent1"/>
+          </a:effectRef>
+          <a:fontRef idx="minor">
+            <a:schemeClr val="lt1"/>
+          </a:fontRef>
+        </p:style>
+        <p:txBody>
+          <a:bodyPr rtlCol="0" anchor="ctr"/>
+          <a:lstStyle/>
+          <a:p>
+            <a:pPr algn="ctr"/>
+          </a:p>
+        </p:txBody>
+      </p:sp>
+      <p:sp>
+        <p:nvSpPr>
+          <p:cNvPr id="34" name="Rectangle 33"/>
+          <p:cNvSpPr/>
+          <p:nvPr/>
+        </p:nvSpPr>
+        <p:spPr>
+          <a:xfrm>
+            <a:off x="548640" y="6053328"/>
+            <a:ext cx="41148" cy="384048"/>
+          </a:xfrm>
+          <a:prstGeom prst="rect">
+            <a:avLst/>
+          </a:prstGeom>
+          <a:solidFill>
+            <a:srgbClr val="243447"/>
+          </a:solidFill>
+          <a:ln>
+            <a:noFill/>
+          </a:ln>
+          <a:effectLst/>
+        </p:spPr>
+        <p:style>
+          <a:lnRef idx="1">
+            <a:schemeClr val="accent1"/>
+          </a:lnRef>
+          <a:fillRef idx="3">
+            <a:schemeClr val="accent1"/>
+          </a:fillRef>
+          <a:effectRef idx="2">
+            <a:schemeClr val="accent1"/>
+          </a:effectRef>
+          <a:fontRef idx="minor">
+            <a:schemeClr val="lt1"/>
+          </a:fontRef>
+        </p:style>
+        <p:txBody>
+          <a:bodyPr rtlCol="0" anchor="ctr"/>
+          <a:lstStyle/>
+          <a:p>
+            <a:pPr algn="ctr"/>
+          </a:p>
+        </p:txBody>
+      </p:sp>
+      <p:sp>
+        <p:nvSpPr>
+          <p:cNvPr id="35" name="TextBox 34"/>
+          <p:cNvSpPr txBox="1"/>
+          <p:nvPr/>
+        </p:nvSpPr>
+        <p:spPr>
+          <a:xfrm>
+            <a:off x="777240" y="6108192"/>
+            <a:ext cx="10698480" cy="292608"/>
+          </a:xfrm>
+          <a:prstGeom prst="rect">
+            <a:avLst/>
+          </a:prstGeom>
+          <a:noFill/>
+        </p:spPr>
+        <p:txBody>
+          <a:bodyPr wrap="square" anchor="t" lIns="18288" rIns="18288" tIns="9144" bIns="9144">
+            <a:spAutoFit/>
+          </a:bodyPr>
+          <a:lstStyle/>
+          <a:p>
+            <a:pPr algn="l">
+              <a:spcAft>
+                <a:spcPts val="200"/>
+              </a:spcAft>
+            </a:pPr>
+            <a:r>
+              <a:rPr sz="1050" b="1">
+                <a:solidFill>
+                  <a:srgbClr val="243447"/>
+                </a:solidFill>
+                <a:latin typeface="Apple SD Gothic Neo"/>
+                <a:ea typeface="Apple SD Gothic Neo"/>
+              </a:rPr>
+              <a:t>모든 과정이 커밋 기록으로 남아 언제든 재현하고 감사할 수 있습니다 — 중앙은행과 일할 때는 이 형식 자체가 신뢰를 만듭니다.</a:t>
+            </a:r>
+          </a:p>
+        </p:txBody>
+      </p:sp>
+      <p:sp>
+        <p:nvSpPr>
+          <p:cNvPr id="36" name="TextBox 35"/>
+          <p:cNvSpPr txBox="1"/>
+          <p:nvPr/>
+        </p:nvSpPr>
+        <p:spPr>
+          <a:xfrm>
+            <a:off x="548640" y="6492240"/>
+            <a:ext cx="10607040" cy="274320"/>
+          </a:xfrm>
+          <a:prstGeom prst="rect">
+            <a:avLst/>
+          </a:prstGeom>
+          <a:noFill/>
+        </p:spPr>
+        <p:txBody>
+          <a:bodyPr wrap="square" anchor="t" lIns="18288" rIns="18288" tIns="9144" bIns="9144">
+            <a:spAutoFit/>
+          </a:bodyPr>
+          <a:lstStyle/>
+          <a:p>
+            <a:pPr algn="l">
+              <a:spcAft>
+                <a:spcPts val="200"/>
+              </a:spcAft>
+            </a:pPr>
+            <a:r>
               <a:rPr sz="800" b="0">
                 <a:solidFill>
                   <a:srgbClr val="6B6B6B"/>
@@ -5666,7 +5914,7 @@
       </p:sp>
       <p:sp>
         <p:nvSpPr>
-          <p:cNvPr id="31" name="TextBox 30"/>
+          <p:cNvPr id="37" name="TextBox 36"/>
           <p:cNvSpPr txBox="1"/>
           <p:nvPr/>
         </p:nvSpPr>
@@ -5797,7 +6045,7 @@
                 <a:latin typeface="Apple SD Gothic Neo"/>
                 <a:ea typeface="Apple SD Gothic Neo"/>
               </a:rPr>
-              <a:t>협업의 위치가 바뀌었습니다 — 검증 파트너에서 공동 연구 파트너로</a:t>
+              <a:t>검증 파트너에서 공동 연구 파트너로 — 협업의 성격이 달라졌습니다</a:t>
             </a:r>
           </a:p>
         </p:txBody>
@@ -6368,7 +6616,7 @@
                 <a:latin typeface="Apple SD Gothic Neo"/>
                 <a:ea typeface="Apple SD Gothic Neo"/>
               </a:rPr>
-              <a:t>FDE로서의 3개월: 출발점이었던 BISTRO 해석 질의에 원본 실측과 적응 개선으로 답하며 한 바퀴를 완성 — 고객의 결함엔 당일 재검증으로, 진단엔 원인 규명으로, 제안엔 첫 실증으로.</a:t>
+              <a:t>FDE로서의 3개월 — 출발점이었던 BISTRO 해석 질의에 원본 실측과 적응 개선으로 답했습니다. 코드 개정에는 당일 재검증으로, 진단에는 원인 규명으로, 제안에는 첫 실증으로 대응했습니다.</a:t>
             </a:r>
           </a:p>
         </p:txBody>
@@ -6546,7 +6794,7 @@
                 <a:latin typeface="Apple SD Gothic Neo"/>
                 <a:ea typeface="Apple SD Gothic Neo"/>
               </a:rPr>
-              <a:t>한 문장 요약 — 정면 승부에서 시작해, 게임의 규칙을 다시 정의하는 것으로 끝났습니다</a:t>
+              <a:t>요약 — 정확도 경쟁에서 출발해, 평가 기준을 함께 다시 세우는 데까지 왔습니다</a:t>
             </a:r>
           </a:p>
         </p:txBody>
@@ -6745,7 +6993,7 @@
                 <a:latin typeface="Apple SD Gothic Neo"/>
                 <a:ea typeface="Apple SD Gothic Neo"/>
               </a:rPr>
-              <a:t>한은 측의 시계열 파운데이션 모델(BISTRO, BIS WP 1337) 해석 질의에서 출발 — 현행 시스템(DFM+XGBoost)을 실시간 빈티지로 재현해 검증 기반 확립</a:t>
+              <a:t>한은 측의 시계열 파운데이션 모델(BISTRO, BIS WP 1337) 해석 질의에서 출발. FDE Consulting &amp; Planning팀(김지혜·김민승)과 초기 방향성을 함께 수립하고, 현행 시스템(DFM+XGBoost)을 실시간 빈티지로 재현해 검증 기반을 세움</a:t>
             </a:r>
           </a:p>
         </p:txBody>
@@ -9021,7 +9269,7 @@
                 <a:latin typeface="Apple SD Gothic Neo"/>
                 <a:ea typeface="Apple SD Gothic Neo"/>
               </a:rPr>
-              <a:t>"이 표본에서는 누구도 우승을 증명할 수 없다" — 그래서 게임을 바꿨습니다</a:t>
+              <a:t>"이 표본에서는 어떤 모형의 우위도 증명이 어렵다" — 그래서 평가의 축을 바꿨습니다</a:t>
             </a:r>
           </a:p>
         </p:txBody>
@@ -9701,7 +9949,7 @@
                 <a:latin typeface="Apple SD Gothic Neo"/>
                 <a:ea typeface="Apple SD Gothic Neo"/>
               </a:rPr>
-              <a:t>고객의 코드 개정에 당일 대응 — 위기가 신뢰의 전환점이 됐습니다</a:t>
+              <a:t>한은의 코드 개정에 당일 재검증으로 대응했습니다</a:t>
             </a:r>
           </a:p>
         </p:txBody>
@@ -10165,7 +10413,7 @@
                 <a:latin typeface="Apple SD Gothic Neo"/>
                 <a:ea typeface="Apple SD Gothic Neo"/>
               </a:rPr>
-              <a:t>"어떤 딥러닝이 되는가"를 조건으로 답했습니다 — BIS 모델 원본 실측 포함</a:t>
+              <a:t>딥러닝은 조건부로 유효했습니다 — BIS 공개 모델 원본 실측 포함</a:t>
             </a:r>
           </a:p>
         </p:txBody>
@@ -10629,7 +10877,7 @@
                 <a:latin typeface="Apple SD Gothic Neo"/>
                 <a:ea typeface="Apple SD Gothic Neo"/>
               </a:rPr>
-              <a:t>한은이 제안한 방향을 당사가 먼저 실증 — 평탄성이 풀리기 시작했습니다</a:t>
+              <a:t>한은이 제안한 적응학습을 당사가 먼저 실증했습니다</a:t>
             </a:r>
           </a:p>
         </p:txBody>
@@ -11110,7 +11358,7 @@
                 <a:latin typeface="Apple SD Gothic Neo"/>
                 <a:ea typeface="Apple SD Gothic Neo"/>
               </a:rPr>
-              <a:t>최종 구성 — 기준선 대비 -2.3%, 여정의 모든 발견이 한 구조에 들어있습니다</a:t>
+              <a:t>최종 구성 — 기준선 대비 -2.3%, 지금까지의 발견을 하나의 구성으로 정리했습니다</a:t>
             </a:r>
           </a:p>
         </p:txBody>

--- a/docs/한은협업_여정보고_대표_2026-09-01.pptx
+++ b/docs/한은협업_여정보고_대표_2026-09-01.pptx
@@ -512,7 +512,7 @@
           <a:lstStyle/>
           <a:p>
             <a:r>
-              <a:t>3개월 여정의 한 줄 요약: 정면 승부(국면전환) → 통계적 벽 확인 → 축 전환(조건부 가치) → 고객이 협업 확대를 제안하는 위치까지. 발표 시간 10분 기준, 2·5·9번 장이 핵심.</a:t>
+              <a:t>3개월 여정의 한 줄 요약: 정면 승부(국면전환) → 통계적 벽 확인 → 축 전환(조건부 가치) → 고객이 협업 확대를 제안하는 위치까지. 발표 시간 10분 기준, 2·5·9번 장이 핵심. (참고: 대표님은 한은 FDE 전사 사례 보고 — 1순위 규정 온톨로지, 코딩 어시스턴트 등 — 를 이미 받으심. 본 덱은 그 지도에서 우선순위 2위 '시계열 Track1'의 상세 보고에 해당. 시계열 Track2(뉴스 인과관계, 데이터사이언스팀 이현규 과장)와는 별개 트랙.</a:t>
             </a:r>
           </a:p>
         </p:txBody>
@@ -4427,6 +4427,46 @@
       <p:sp>
         <p:nvSpPr>
           <p:cNvPr id="6" name="TextBox 5"/>
+          <p:cNvSpPr txBox="1"/>
+          <p:nvPr/>
+        </p:nvSpPr>
+        <p:spPr>
+          <a:xfrm>
+            <a:off x="713232" y="5715000"/>
+            <a:ext cx="10241280" cy="320040"/>
+          </a:xfrm>
+          <a:prstGeom prst="rect">
+            <a:avLst/>
+          </a:prstGeom>
+          <a:noFill/>
+        </p:spPr>
+        <p:txBody>
+          <a:bodyPr wrap="square" anchor="t" lIns="18288" rIns="18288" tIns="9144" bIns="9144">
+            <a:spAutoFit/>
+          </a:bodyPr>
+          <a:lstStyle/>
+          <a:p>
+            <a:pPr algn="l">
+              <a:spcAft>
+                <a:spcPts val="200"/>
+              </a:spcAft>
+            </a:pPr>
+            <a:r>
+              <a:rPr sz="1050" b="0">
+                <a:solidFill>
+                  <a:srgbClr val="6B6B6B"/>
+                </a:solidFill>
+                <a:latin typeface="Apple SD Gothic Neo"/>
+                <a:ea typeface="Apple SD Gothic Neo"/>
+              </a:rPr>
+              <a:t>한은–네이버 2026년 협력과제 8건 중 우선순위 2위 「시계열 Track1 (거시경제 예측)」 — 한은 담당: 이창훈·윤희근 (디지털혁신실)</a:t>
+            </a:r>
+          </a:p>
+        </p:txBody>
+      </p:sp>
+      <p:sp>
+        <p:nvSpPr>
+          <p:cNvPr id="7" name="TextBox 6"/>
           <p:cNvSpPr txBox="1"/>
           <p:nvPr/>
         </p:nvSpPr>

--- a/docs/한은협업_여정보고_대표_2026-09-01.pptx
+++ b/docs/한은협업_여정보고_대표_2026-09-01.pptx
@@ -652,7 +652,7 @@
           <a:lstStyle/>
           <a:p>
             <a:r>
-              <a:t>마지막 문장이 대표 보고의 결론 — FDE 모델의 가치 입증. 다음 결정 3건 중 대표 승인이 필요한 것은 특별히 없으며(진행 보고), 논문 저자 구성 등 회사 차원 조율이 필요해지면 별도 보고 예정.</a:t>
+              <a:t>마지막 문장이 대표 보고의 결론 — FDE 모델의 가치 입증. 다음 결정 3건 중 대표 승인이 필요한 것은 특별히 없으며(진행 보고), 논문 저자 구성 등 회사 차원 조율이 필요해지면 별도 보고 예정. (조직 지형 구두 보충: 경제모형실 산학협력의 학계 파트너는 서범석 교수로 파악 — 문서 명시는 피하고 구두로만. BISTRO 관련 대외 서술은 항상 '동일 규약 실측·공개 체크포인트 기준' 프레임 유지.)</a:t>
             </a:r>
           </a:p>
         </p:txBody>
@@ -6133,14 +6133,14 @@
         </p:nvSpPr>
         <p:spPr>
           <a:xfrm>
-            <a:off x="548640" y="1371600"/>
-            <a:ext cx="41148" cy="1005840"/>
+            <a:off x="548640" y="1325880"/>
+            <a:ext cx="41148" cy="841248"/>
           </a:xfrm>
           <a:prstGeom prst="rect">
             <a:avLst/>
           </a:prstGeom>
           <a:solidFill>
-            <a:srgbClr val="008A3E"/>
+            <a:srgbClr val="B0532F"/>
           </a:solidFill>
           <a:ln>
             <a:noFill/>
@@ -6177,7 +6177,7 @@
         </p:nvSpPr>
         <p:spPr>
           <a:xfrm>
-            <a:off x="777240" y="1371600"/>
+            <a:off x="777240" y="1325880"/>
             <a:ext cx="1920240" cy="365760"/>
           </a:xfrm>
           <a:prstGeom prst="rect">
@@ -6197,14 +6197,14 @@
               </a:spcAft>
             </a:pPr>
             <a:r>
-              <a:rPr sz="1250" b="1">
+              <a:rPr sz="1200" b="1">
                 <a:solidFill>
                   <a:srgbClr val="243447"/>
                 </a:solidFill>
                 <a:latin typeface="Apple SD Gothic Neo"/>
                 <a:ea typeface="Apple SD Gothic Neo"/>
               </a:rPr>
-              <a:t>협업 관계</a:t>
+              <a:t>고객 조직 지형</a:t>
             </a:r>
           </a:p>
         </p:txBody>
@@ -6217,7 +6217,7 @@
         </p:nvSpPr>
         <p:spPr>
           <a:xfrm>
-            <a:off x="2788920" y="1371600"/>
+            <a:off x="2788920" y="1325880"/>
             <a:ext cx="8778240" cy="822960"/>
           </a:xfrm>
           <a:prstGeom prst="rect">
@@ -6237,14 +6237,14 @@
               </a:spcAft>
             </a:pPr>
             <a:r>
-              <a:rPr sz="1050" b="0">
+              <a:rPr sz="1000" b="0">
                 <a:solidFill>
                   <a:srgbClr val="262626"/>
                 </a:solidFill>
                 <a:latin typeface="Apple SD Gothic Neo"/>
                 <a:ea typeface="Apple SD Gothic Neo"/>
               </a:rPr>
-              <a:t>한은이 당사 자료를 자체 저장소에 수록하고, 적응학습으로의 협업 범위 확대를 먼저 제안 — 역할 분담 협의 중</a:t>
+              <a:t>디지털혁신실(협업 파트너)은 딥러닝 기반 나우캐스팅 시스템 개선을, 경제모형실은 전문가 판단 기반 전망을 맡는 구도 — 경제모형실이 최근 산학협력으로 BISTRO 시계열 모델을 연구 중이어서 두 조직은 경쟁 관계로 보임. 당사의 BISTRO 원본 실측·적응 실증은 파트너가 이 지형에서 기술 근거를 갖게 하는 위치</a:t>
             </a:r>
           </a:p>
         </p:txBody>
@@ -6257,14 +6257,14 @@
         </p:nvSpPr>
         <p:spPr>
           <a:xfrm>
-            <a:off x="548640" y="2560320"/>
-            <a:ext cx="41148" cy="1005840"/>
+            <a:off x="548640" y="2295144"/>
+            <a:ext cx="41148" cy="841248"/>
           </a:xfrm>
           <a:prstGeom prst="rect">
             <a:avLst/>
           </a:prstGeom>
           <a:solidFill>
-            <a:srgbClr val="243447"/>
+            <a:srgbClr val="008A3E"/>
           </a:solidFill>
           <a:ln>
             <a:noFill/>
@@ -6301,7 +6301,7 @@
         </p:nvSpPr>
         <p:spPr>
           <a:xfrm>
-            <a:off x="777240" y="2560320"/>
+            <a:off x="777240" y="2295144"/>
             <a:ext cx="1920240" cy="365760"/>
           </a:xfrm>
           <a:prstGeom prst="rect">
@@ -6321,14 +6321,14 @@
               </a:spcAft>
             </a:pPr>
             <a:r>
-              <a:rPr sz="1250" b="1">
+              <a:rPr sz="1200" b="1">
                 <a:solidFill>
                   <a:srgbClr val="243447"/>
                 </a:solidFill>
                 <a:latin typeface="Apple SD Gothic Neo"/>
                 <a:ea typeface="Apple SD Gothic Neo"/>
               </a:rPr>
-              <a:t>기술 자산</a:t>
+              <a:t>협업 관계</a:t>
             </a:r>
           </a:p>
         </p:txBody>
@@ -6341,7 +6341,7 @@
         </p:nvSpPr>
         <p:spPr>
           <a:xfrm>
-            <a:off x="2788920" y="2560320"/>
+            <a:off x="2788920" y="2295144"/>
             <a:ext cx="8778240" cy="822960"/>
           </a:xfrm>
           <a:prstGeom prst="rect">
@@ -6361,14 +6361,14 @@
               </a:spcAft>
             </a:pPr>
             <a:r>
-              <a:rPr sz="1050" b="0">
+              <a:rPr sz="1000" b="0">
                 <a:solidFill>
                   <a:srgbClr val="262626"/>
                 </a:solidFill>
                 <a:latin typeface="Apple SD Gothic Neo"/>
                 <a:ea typeface="Apple SD Gothic Neo"/>
               </a:rPr>
-              <a:t>실시간 검증 하네스 · 일별 빠른신호 파이프라인 · FM 절제/흡수력 진단 프레임 · LoRA 적응 러너 — 전부 재현 가능 스크립트로 관리 (50여 종)</a:t>
+              <a:t>한은이 당사 자료를 자체 저장소에 수록하고, 적응학습으로의 협업 범위 확대를 먼저 제안 — 역할 분담 협의 중</a:t>
             </a:r>
           </a:p>
         </p:txBody>
@@ -6381,8 +6381,8 @@
         </p:nvSpPr>
         <p:spPr>
           <a:xfrm>
-            <a:off x="548640" y="3749039"/>
-            <a:ext cx="41148" cy="1005840"/>
+            <a:off x="548640" y="3264408"/>
+            <a:ext cx="41148" cy="841248"/>
           </a:xfrm>
           <a:prstGeom prst="rect">
             <a:avLst/>
@@ -6425,7 +6425,7 @@
         </p:nvSpPr>
         <p:spPr>
           <a:xfrm>
-            <a:off x="777240" y="3749039"/>
+            <a:off x="777240" y="3264408"/>
             <a:ext cx="1920240" cy="365760"/>
           </a:xfrm>
           <a:prstGeom prst="rect">
@@ -6445,14 +6445,14 @@
               </a:spcAft>
             </a:pPr>
             <a:r>
-              <a:rPr sz="1250" b="1">
+              <a:rPr sz="1200" b="1">
                 <a:solidFill>
                   <a:srgbClr val="243447"/>
                 </a:solidFill>
                 <a:latin typeface="Apple SD Gothic Neo"/>
                 <a:ea typeface="Apple SD Gothic Neo"/>
               </a:rPr>
-              <a:t>공동 논문</a:t>
+              <a:t>기술 자산</a:t>
             </a:r>
           </a:p>
         </p:txBody>
@@ -6465,7 +6465,7 @@
         </p:nvSpPr>
         <p:spPr>
           <a:xfrm>
-            <a:off x="2788920" y="3749039"/>
+            <a:off x="2788920" y="3264408"/>
             <a:ext cx="8778240" cy="822960"/>
           </a:xfrm>
           <a:prstGeom prst="rect">
@@ -6485,14 +6485,14 @@
               </a:spcAft>
             </a:pPr>
             <a:r>
-              <a:rPr sz="1050" b="0">
+              <a:rPr sz="1000" b="0">
                 <a:solidFill>
                   <a:srgbClr val="262626"/>
                 </a:solidFill>
                 <a:latin typeface="Apple SD Gothic Neo"/>
                 <a:ea typeface="Apple SD Gothic Neo"/>
               </a:rPr>
-              <a:t>"사전학습 시계열 모델은 언제 가치를 더하는가" — 기여 5건 실측 완료 + 적응학습 장(章) 추가. 한은 WP 선행 후 국제 학술지(IJF) 투고 구도</a:t>
+              <a:t>실시간 검증 하네스 · 일별 빠른신호 파이프라인 · FM 절제/흡수력 진단 프레임 · LoRA 적응 러너 — 전부 재현 가능 스크립트로 관리 (50여 종)</a:t>
             </a:r>
           </a:p>
         </p:txBody>
@@ -6505,14 +6505,14 @@
         </p:nvSpPr>
         <p:spPr>
           <a:xfrm>
-            <a:off x="548640" y="4937759"/>
-            <a:ext cx="41148" cy="1005840"/>
+            <a:off x="548640" y="4233672"/>
+            <a:ext cx="41148" cy="841248"/>
           </a:xfrm>
           <a:prstGeom prst="rect">
             <a:avLst/>
           </a:prstGeom>
           <a:solidFill>
-            <a:srgbClr val="B0532F"/>
+            <a:srgbClr val="243447"/>
           </a:solidFill>
           <a:ln>
             <a:noFill/>
@@ -6549,7 +6549,7 @@
         </p:nvSpPr>
         <p:spPr>
           <a:xfrm>
-            <a:off x="777240" y="4937759"/>
+            <a:off x="777240" y="4233672"/>
             <a:ext cx="1920240" cy="365760"/>
           </a:xfrm>
           <a:prstGeom prst="rect">
@@ -6569,14 +6569,14 @@
               </a:spcAft>
             </a:pPr>
             <a:r>
-              <a:rPr sz="1250" b="1">
+              <a:rPr sz="1200" b="1">
                 <a:solidFill>
                   <a:srgbClr val="243447"/>
                 </a:solidFill>
                 <a:latin typeface="Apple SD Gothic Neo"/>
                 <a:ea typeface="Apple SD Gothic Neo"/>
               </a:rPr>
-              <a:t>다음 결정</a:t>
+              <a:t>공동 논문</a:t>
             </a:r>
           </a:p>
         </p:txBody>
@@ -6589,7 +6589,7 @@
         </p:nvSpPr>
         <p:spPr>
           <a:xfrm>
-            <a:off x="2788920" y="4937759"/>
+            <a:off x="2788920" y="4233672"/>
             <a:ext cx="8778240" cy="822960"/>
           </a:xfrm>
           <a:prstGeom prst="rect">
@@ -6609,28 +6609,72 @@
               </a:spcAft>
             </a:pPr>
             <a:r>
-              <a:rPr sz="1050" b="0">
+              <a:rPr sz="1000" b="0">
                 <a:solidFill>
                   <a:srgbClr val="262626"/>
                 </a:solidFill>
                 <a:latin typeface="Apple SD Gothic Neo"/>
                 <a:ea typeface="Apple SD Gothic Neo"/>
               </a:rPr>
-              <a:t>① 적응학습 역할 분담 확정(당사: Chronos-2 트랙·적응 안정화) ② 논문 집필 착수 ③ 운영 권고안의 병행 산출 개시 여부</a:t>
-            </a:r>
-          </a:p>
-        </p:txBody>
-      </p:sp>
-      <p:sp>
-        <p:nvSpPr>
-          <p:cNvPr id="17" name="TextBox 16"/>
+              <a:t>"사전학습 시계열 모델은 언제 가치를 더하는가" — 기여 5건 실측 완료 + 적응학습 장(章) 추가. 한은 WP 선행 후 국제 학술지(IJF) 투고 구도</a:t>
+            </a:r>
+          </a:p>
+        </p:txBody>
+      </p:sp>
+      <p:sp>
+        <p:nvSpPr>
+          <p:cNvPr id="17" name="Rectangle 16"/>
+          <p:cNvSpPr/>
+          <p:nvPr/>
+        </p:nvSpPr>
+        <p:spPr>
+          <a:xfrm>
+            <a:off x="548640" y="5202936"/>
+            <a:ext cx="41148" cy="841248"/>
+          </a:xfrm>
+          <a:prstGeom prst="rect">
+            <a:avLst/>
+          </a:prstGeom>
+          <a:solidFill>
+            <a:srgbClr val="B0532F"/>
+          </a:solidFill>
+          <a:ln>
+            <a:noFill/>
+          </a:ln>
+          <a:effectLst/>
+        </p:spPr>
+        <p:style>
+          <a:lnRef idx="1">
+            <a:schemeClr val="accent1"/>
+          </a:lnRef>
+          <a:fillRef idx="3">
+            <a:schemeClr val="accent1"/>
+          </a:fillRef>
+          <a:effectRef idx="2">
+            <a:schemeClr val="accent1"/>
+          </a:effectRef>
+          <a:fontRef idx="minor">
+            <a:schemeClr val="lt1"/>
+          </a:fontRef>
+        </p:style>
+        <p:txBody>
+          <a:bodyPr rtlCol="0" anchor="ctr"/>
+          <a:lstStyle/>
+          <a:p>
+            <a:pPr algn="ctr"/>
+          </a:p>
+        </p:txBody>
+      </p:sp>
+      <p:sp>
+        <p:nvSpPr>
+          <p:cNvPr id="18" name="TextBox 17"/>
           <p:cNvSpPr txBox="1"/>
           <p:nvPr/>
         </p:nvSpPr>
         <p:spPr>
           <a:xfrm>
-            <a:off x="548640" y="6172200"/>
-            <a:ext cx="10972800" cy="274320"/>
+            <a:off x="777240" y="5202936"/>
+            <a:ext cx="1920240" cy="365760"/>
           </a:xfrm>
           <a:prstGeom prst="rect">
             <a:avLst/>
@@ -6649,28 +6693,28 @@
               </a:spcAft>
             </a:pPr>
             <a:r>
-              <a:rPr sz="1100" b="1">
+              <a:rPr sz="1200" b="1">
                 <a:solidFill>
                   <a:srgbClr val="243447"/>
                 </a:solidFill>
                 <a:latin typeface="Apple SD Gothic Neo"/>
                 <a:ea typeface="Apple SD Gothic Neo"/>
               </a:rPr>
-              <a:t>FDE로서의 3개월 — 출발점이었던 BISTRO 해석 질의에 원본 실측과 적응 개선으로 답했습니다. 코드 개정에는 당일 재검증으로, 진단에는 원인 규명으로, 제안에는 첫 실증으로 대응했습니다.</a:t>
-            </a:r>
-          </a:p>
-        </p:txBody>
-      </p:sp>
-      <p:sp>
-        <p:nvSpPr>
-          <p:cNvPr id="18" name="TextBox 17"/>
+              <a:t>다음 결정</a:t>
+            </a:r>
+          </a:p>
+        </p:txBody>
+      </p:sp>
+      <p:sp>
+        <p:nvSpPr>
+          <p:cNvPr id="19" name="TextBox 18"/>
           <p:cNvSpPr txBox="1"/>
           <p:nvPr/>
         </p:nvSpPr>
         <p:spPr>
           <a:xfrm>
-            <a:off x="548640" y="6492240"/>
-            <a:ext cx="10607040" cy="274320"/>
+            <a:off x="2788920" y="5202936"/>
+            <a:ext cx="8778240" cy="822960"/>
           </a:xfrm>
           <a:prstGeom prst="rect">
             <a:avLst/>
@@ -6689,6 +6733,86 @@
               </a:spcAft>
             </a:pPr>
             <a:r>
+              <a:rPr sz="1000" b="0">
+                <a:solidFill>
+                  <a:srgbClr val="262626"/>
+                </a:solidFill>
+                <a:latin typeface="Apple SD Gothic Neo"/>
+                <a:ea typeface="Apple SD Gothic Neo"/>
+              </a:rPr>
+              <a:t>① 적응학습 역할 분담 확정(당사: Chronos-2 트랙·적응 안정화) ② 논문 집필 착수 ③ 운영 권고안의 병행 산출 개시 여부</a:t>
+            </a:r>
+          </a:p>
+        </p:txBody>
+      </p:sp>
+      <p:sp>
+        <p:nvSpPr>
+          <p:cNvPr id="20" name="TextBox 19"/>
+          <p:cNvSpPr txBox="1"/>
+          <p:nvPr/>
+        </p:nvSpPr>
+        <p:spPr>
+          <a:xfrm>
+            <a:off x="548640" y="6199632"/>
+            <a:ext cx="10972800" cy="274320"/>
+          </a:xfrm>
+          <a:prstGeom prst="rect">
+            <a:avLst/>
+          </a:prstGeom>
+          <a:noFill/>
+        </p:spPr>
+        <p:txBody>
+          <a:bodyPr wrap="square" anchor="t" lIns="18288" rIns="18288" tIns="9144" bIns="9144">
+            <a:spAutoFit/>
+          </a:bodyPr>
+          <a:lstStyle/>
+          <a:p>
+            <a:pPr algn="l">
+              <a:spcAft>
+                <a:spcPts val="200"/>
+              </a:spcAft>
+            </a:pPr>
+            <a:r>
+              <a:rPr sz="1100" b="1">
+                <a:solidFill>
+                  <a:srgbClr val="243447"/>
+                </a:solidFill>
+                <a:latin typeface="Apple SD Gothic Neo"/>
+                <a:ea typeface="Apple SD Gothic Neo"/>
+              </a:rPr>
+              <a:t>FDE로서의 3개월 — 출발점이었던 BISTRO 해석 질의에 원본 실측과 적응 개선으로 답했습니다. 코드 개정에는 당일 재검증으로, 진단에는 원인 규명으로, 제안에는 첫 실증으로 대응했습니다.</a:t>
+            </a:r>
+          </a:p>
+        </p:txBody>
+      </p:sp>
+      <p:sp>
+        <p:nvSpPr>
+          <p:cNvPr id="21" name="TextBox 20"/>
+          <p:cNvSpPr txBox="1"/>
+          <p:nvPr/>
+        </p:nvSpPr>
+        <p:spPr>
+          <a:xfrm>
+            <a:off x="548640" y="6492240"/>
+            <a:ext cx="10607040" cy="274320"/>
+          </a:xfrm>
+          <a:prstGeom prst="rect">
+            <a:avLst/>
+          </a:prstGeom>
+          <a:noFill/>
+        </p:spPr>
+        <p:txBody>
+          <a:bodyPr wrap="square" anchor="t" lIns="18288" rIns="18288" tIns="9144" bIns="9144">
+            <a:spAutoFit/>
+          </a:bodyPr>
+          <a:lstStyle/>
+          <a:p>
+            <a:pPr algn="l">
+              <a:spcAft>
+                <a:spcPts val="200"/>
+              </a:spcAft>
+            </a:pPr>
+            <a:r>
               <a:rPr sz="800" b="0">
                 <a:solidFill>
                   <a:srgbClr val="6B6B6B"/>
@@ -6703,7 +6827,7 @@
       </p:sp>
       <p:sp>
         <p:nvSpPr>
-          <p:cNvPr id="19" name="TextBox 18"/>
+          <p:cNvPr id="22" name="TextBox 21"/>
           <p:cNvSpPr txBox="1"/>
           <p:nvPr/>
         </p:nvSpPr>

--- a/docs/한은협업_여정보고_대표_2026-09-01.pptx
+++ b/docs/한은협업_여정보고_대표_2026-09-01.pptx
@@ -5035,7 +5035,7 @@
                 <a:latin typeface="Apple SD Gothic Neo"/>
                 <a:ea typeface="Apple SD Gothic Neo"/>
               </a:rPr>
-              <a:t>제공 그리드 그대로 재현 채점 체계 구축 — 이후 모든 실험(양측)이 같은 잣대로 비교 가능해짐</a:t>
+              <a:t>한은 제공 빈티지 데이터셋·전처리 코드를 그대로 재사용해 재현 채점 체계 구축 — 이후 모든 실험(양측)이 같은 잣대로 비교 가능해짐</a:t>
             </a:r>
           </a:p>
         </p:txBody>
@@ -5792,8 +5792,8 @@
         </p:nvSpPr>
         <p:spPr>
           <a:xfrm>
-            <a:off x="548640" y="6053328"/>
-            <a:ext cx="11091672" cy="384048"/>
+            <a:off x="548640" y="5980176"/>
+            <a:ext cx="11091672" cy="493776"/>
           </a:xfrm>
           <a:prstGeom prst="rect">
             <a:avLst/>
@@ -5836,8 +5836,8 @@
         </p:nvSpPr>
         <p:spPr>
           <a:xfrm>
-            <a:off x="548640" y="6053328"/>
-            <a:ext cx="41148" cy="384048"/>
+            <a:off x="548640" y="5980176"/>
+            <a:ext cx="41148" cy="493776"/>
           </a:xfrm>
           <a:prstGeom prst="rect">
             <a:avLst/>
@@ -5880,8 +5880,8 @@
         </p:nvSpPr>
         <p:spPr>
           <a:xfrm>
-            <a:off x="777240" y="6108192"/>
-            <a:ext cx="10698480" cy="292608"/>
+            <a:off x="777240" y="6035040"/>
+            <a:ext cx="10698480" cy="420624"/>
           </a:xfrm>
           <a:prstGeom prst="rect">
             <a:avLst/>
@@ -5900,14 +5900,31 @@
               </a:spcAft>
             </a:pPr>
             <a:r>
-              <a:rPr sz="1050" b="1">
+              <a:rPr sz="1000" b="1">
                 <a:solidFill>
                   <a:srgbClr val="243447"/>
                 </a:solidFill>
                 <a:latin typeface="Apple SD Gothic Neo"/>
                 <a:ea typeface="Apple SD Gothic Neo"/>
               </a:rPr>
-              <a:t>모든 과정이 커밋 기록으로 남아 언제든 재현하고 감사할 수 있습니다 — 중앙은행과 일할 때는 이 형식 자체가 신뢰를 만듭니다.</a:t>
+              <a:t>모든 과정이 커밋 기록으로 남아 언제든 재현하고 감사할 수 있습니다 — 실험 코드의 재현성도 서로 확인하며 진행했습니다.</a:t>
+            </a:r>
+          </a:p>
+          <a:p>
+            <a:pPr algn="l">
+              <a:spcAft>
+                <a:spcPts val="200"/>
+              </a:spcAft>
+            </a:pPr>
+            <a:r>
+              <a:rPr sz="900" b="0">
+                <a:solidFill>
+                  <a:srgbClr val="6B6B6B"/>
+                </a:solidFill>
+                <a:latin typeface="Apple SD Gothic Neo"/>
+                <a:ea typeface="Apple SD Gothic Neo"/>
+              </a:rPr>
+              <a:t>(한은의 개정 수치를 당사가 재계산으로 일치 확인, 당사의 조기 결합 아이디어를 한은이 자체 탐색으로 재현)</a:t>
             </a:r>
           </a:p>
         </p:txBody>

--- a/docs/한은협업_여정보고_대표_2026-09-01.pptx
+++ b/docs/한은협업_여정보고_대표_2026-09-01.pptx
@@ -7023,14 +7023,14 @@
         </p:nvSpPr>
         <p:spPr>
           <a:xfrm>
-            <a:off x="548640" y="1371600"/>
-            <a:ext cx="41148" cy="804672"/>
+            <a:off x="548640" y="1298448"/>
+            <a:ext cx="41148" cy="731520"/>
           </a:xfrm>
           <a:prstGeom prst="rect">
             <a:avLst/>
           </a:prstGeom>
           <a:solidFill>
-            <a:srgbClr val="1C5CAB"/>
+            <a:srgbClr val="6B6B6B"/>
           </a:solidFill>
           <a:ln>
             <a:noFill/>
@@ -7067,7 +7067,7 @@
         </p:nvSpPr>
         <p:spPr>
           <a:xfrm>
-            <a:off x="777240" y="1371600"/>
+            <a:off x="777240" y="1298448"/>
             <a:ext cx="1234440" cy="365760"/>
           </a:xfrm>
           <a:prstGeom prst="rect">
@@ -7087,14 +7087,14 @@
               </a:spcAft>
             </a:pPr>
             <a:r>
-              <a:rPr sz="1200" b="1">
-                <a:solidFill>
-                  <a:srgbClr val="1C5CAB"/>
-                </a:solidFill>
-                <a:latin typeface="Apple SD Gothic Neo"/>
-                <a:ea typeface="Apple SD Gothic Neo"/>
-              </a:rPr>
-              <a:t>6월</a:t>
+              <a:rPr sz="1150" b="1">
+                <a:solidFill>
+                  <a:srgbClr val="6B6B6B"/>
+                </a:solidFill>
+                <a:latin typeface="Apple SD Gothic Neo"/>
+                <a:ea typeface="Apple SD Gothic Neo"/>
+              </a:rPr>
+              <a:t>~5월 (전사)</a:t>
             </a:r>
           </a:p>
         </p:txBody>
@@ -7107,7 +7107,7 @@
         </p:nvSpPr>
         <p:spPr>
           <a:xfrm>
-            <a:off x="2057400" y="1371600"/>
+            <a:off x="2057400" y="1298448"/>
             <a:ext cx="2011680" cy="365760"/>
           </a:xfrm>
           <a:prstGeom prst="rect">
@@ -7127,14 +7127,14 @@
               </a:spcAft>
             </a:pPr>
             <a:r>
-              <a:rPr sz="1200" b="1">
+              <a:rPr sz="1150" b="1">
                 <a:solidFill>
                   <a:srgbClr val="243447"/>
                 </a:solidFill>
                 <a:latin typeface="Apple SD Gothic Neo"/>
                 <a:ea typeface="Apple SD Gothic Neo"/>
               </a:rPr>
-              <a:t>착수·재현</a:t>
+              <a:t>CPI 연구</a:t>
             </a:r>
           </a:p>
         </p:txBody>
@@ -7147,8 +7147,8 @@
         </p:nvSpPr>
         <p:spPr>
           <a:xfrm>
-            <a:off x="4160520" y="1371600"/>
-            <a:ext cx="7406640" cy="731520"/>
+            <a:off x="4160520" y="1298448"/>
+            <a:ext cx="7406640" cy="685800"/>
           </a:xfrm>
           <a:prstGeom prst="rect">
             <a:avLst/>
@@ -7167,14 +7167,14 @@
               </a:spcAft>
             </a:pPr>
             <a:r>
-              <a:rPr sz="1050" b="0">
+              <a:rPr sz="1000" b="0">
                 <a:solidFill>
                   <a:srgbClr val="262626"/>
                 </a:solidFill>
                 <a:latin typeface="Apple SD Gothic Neo"/>
                 <a:ea typeface="Apple SD Gothic Neo"/>
               </a:rPr>
-              <a:t>한은 측의 시계열 파운데이션 모델(BISTRO, BIS WP 1337) 해석 질의에서 출발. FDE Consulting &amp; Planning팀(김지혜·김민승)과 초기 방향성을 함께 수립하고, 현행 시스템(DFM+XGBoost)을 실시간 빈티지로 재현해 검증 기반을 세움</a:t>
+              <a:t>물가(CPI) 예측으로 시작 — 소형 특화 모델·FM·언어모델(HCX·Claude) 3계열 비교 체계 구축. 6월 한은 요청으로 대상을 GDP 성장률로 전환 (검증 하네스는 계승)</a:t>
             </a:r>
           </a:p>
         </p:txBody>
@@ -7187,14 +7187,14 @@
         </p:nvSpPr>
         <p:spPr>
           <a:xfrm>
-            <a:off x="548640" y="2340864"/>
-            <a:ext cx="41148" cy="804672"/>
+            <a:off x="548640" y="2148840"/>
+            <a:ext cx="41148" cy="731520"/>
           </a:xfrm>
           <a:prstGeom prst="rect">
             <a:avLst/>
           </a:prstGeom>
           <a:solidFill>
-            <a:srgbClr val="B0532F"/>
+            <a:srgbClr val="1C5CAB"/>
           </a:solidFill>
           <a:ln>
             <a:noFill/>
@@ -7231,7 +7231,7 @@
         </p:nvSpPr>
         <p:spPr>
           <a:xfrm>
-            <a:off x="777240" y="2340864"/>
+            <a:off x="777240" y="2148840"/>
             <a:ext cx="1234440" cy="365760"/>
           </a:xfrm>
           <a:prstGeom prst="rect">
@@ -7251,14 +7251,14 @@
               </a:spcAft>
             </a:pPr>
             <a:r>
-              <a:rPr sz="1200" b="1">
-                <a:solidFill>
-                  <a:srgbClr val="B0532F"/>
-                </a:solidFill>
-                <a:latin typeface="Apple SD Gothic Neo"/>
-                <a:ea typeface="Apple SD Gothic Neo"/>
-              </a:rPr>
-              <a:t>7월 초</a:t>
+              <a:rPr sz="1150" b="1">
+                <a:solidFill>
+                  <a:srgbClr val="1C5CAB"/>
+                </a:solidFill>
+                <a:latin typeface="Apple SD Gothic Neo"/>
+                <a:ea typeface="Apple SD Gothic Neo"/>
+              </a:rPr>
+              <a:t>6월</a:t>
             </a:r>
           </a:p>
         </p:txBody>
@@ -7271,7 +7271,7 @@
         </p:nvSpPr>
         <p:spPr>
           <a:xfrm>
-            <a:off x="2057400" y="2340864"/>
+            <a:off x="2057400" y="2148840"/>
             <a:ext cx="2011680" cy="365760"/>
           </a:xfrm>
           <a:prstGeom prst="rect">
@@ -7291,14 +7291,14 @@
               </a:spcAft>
             </a:pPr>
             <a:r>
-              <a:rPr sz="1200" b="1">
+              <a:rPr sz="1150" b="1">
                 <a:solidFill>
                   <a:srgbClr val="243447"/>
                 </a:solidFill>
                 <a:latin typeface="Apple SD Gothic Neo"/>
                 <a:ea typeface="Apple SD Gothic Neo"/>
               </a:rPr>
-              <a:t>국면전환 연구</a:t>
+              <a:t>착수·재현</a:t>
             </a:r>
           </a:p>
         </p:txBody>
@@ -7311,8 +7311,8 @@
         </p:nvSpPr>
         <p:spPr>
           <a:xfrm>
-            <a:off x="4160520" y="2340864"/>
-            <a:ext cx="7406640" cy="731520"/>
+            <a:off x="4160520" y="2148840"/>
+            <a:ext cx="7406640" cy="685800"/>
           </a:xfrm>
           <a:prstGeom prst="rect">
             <a:avLst/>
@@ -7331,14 +7331,14 @@
               </a:spcAft>
             </a:pPr>
             <a:r>
-              <a:rPr sz="1050" b="0">
+              <a:rPr sz="1000" b="0">
                 <a:solidFill>
                   <a:srgbClr val="262626"/>
                 </a:solidFill>
                 <a:latin typeface="Apple SD Gothic Neo"/>
                 <a:ea typeface="Apple SD Gothic Neo"/>
               </a:rPr>
-              <a:t>국면별 모델 교대(v1→v3)로 최고 성능 도달 — 그러나 방법론 수용성 문제로 채택 보류</a:t>
+              <a:t>한은 측의 시계열 파운데이션 모델(BISTRO, BIS WP 1337) 해석 질의에서 출발. FDE Consulting &amp; Planning팀(김지혜·김민승)과 초기 방향성을 함께 수립하고, 현행 시스템(DFM+XGBoost)을 실시간 빈티지로 재현</a:t>
             </a:r>
           </a:p>
         </p:txBody>
@@ -7351,14 +7351,14 @@
         </p:nvSpPr>
         <p:spPr>
           <a:xfrm>
-            <a:off x="548640" y="3310128"/>
-            <a:ext cx="41148" cy="804672"/>
+            <a:off x="548640" y="2999232"/>
+            <a:ext cx="41148" cy="731520"/>
           </a:xfrm>
           <a:prstGeom prst="rect">
             <a:avLst/>
           </a:prstGeom>
           <a:solidFill>
-            <a:srgbClr val="243447"/>
+            <a:srgbClr val="B0532F"/>
           </a:solidFill>
           <a:ln>
             <a:noFill/>
@@ -7395,7 +7395,7 @@
         </p:nvSpPr>
         <p:spPr>
           <a:xfrm>
-            <a:off x="777240" y="3310128"/>
+            <a:off x="777240" y="2999232"/>
             <a:ext cx="1234440" cy="365760"/>
           </a:xfrm>
           <a:prstGeom prst="rect">
@@ -7415,14 +7415,14 @@
               </a:spcAft>
             </a:pPr>
             <a:r>
-              <a:rPr sz="1200" b="1">
-                <a:solidFill>
-                  <a:srgbClr val="243447"/>
-                </a:solidFill>
-                <a:latin typeface="Apple SD Gothic Neo"/>
-                <a:ea typeface="Apple SD Gothic Neo"/>
-              </a:rPr>
-              <a:t>7월 말</a:t>
+              <a:rPr sz="1150" b="1">
+                <a:solidFill>
+                  <a:srgbClr val="B0532F"/>
+                </a:solidFill>
+                <a:latin typeface="Apple SD Gothic Neo"/>
+                <a:ea typeface="Apple SD Gothic Neo"/>
+              </a:rPr>
+              <a:t>7월 초</a:t>
             </a:r>
           </a:p>
         </p:txBody>
@@ -7435,7 +7435,7 @@
         </p:nvSpPr>
         <p:spPr>
           <a:xfrm>
-            <a:off x="2057400" y="3310128"/>
+            <a:off x="2057400" y="2999232"/>
             <a:ext cx="2011680" cy="365760"/>
           </a:xfrm>
           <a:prstGeom prst="rect">
@@ -7455,14 +7455,14 @@
               </a:spcAft>
             </a:pPr>
             <a:r>
-              <a:rPr sz="1200" b="1">
+              <a:rPr sz="1150" b="1">
                 <a:solidFill>
                   <a:srgbClr val="243447"/>
                 </a:solidFill>
                 <a:latin typeface="Apple SD Gothic Neo"/>
                 <a:ea typeface="Apple SD Gothic Neo"/>
               </a:rPr>
-              <a:t>축 전환</a:t>
+              <a:t>국면전환 연구</a:t>
             </a:r>
           </a:p>
         </p:txBody>
@@ -7475,8 +7475,8 @@
         </p:nvSpPr>
         <p:spPr>
           <a:xfrm>
-            <a:off x="4160520" y="3310128"/>
-            <a:ext cx="7406640" cy="731520"/>
+            <a:off x="4160520" y="2999232"/>
+            <a:ext cx="7406640" cy="685800"/>
           </a:xfrm>
           <a:prstGeom prst="rect">
             <a:avLst/>
@@ -7495,14 +7495,14 @@
               </a:spcAft>
             </a:pPr>
             <a:r>
-              <a:rPr sz="1050" b="0">
+              <a:rPr sz="1000" b="0">
                 <a:solidFill>
                   <a:srgbClr val="262626"/>
                 </a:solidFill>
                 <a:latin typeface="Apple SD Gothic Neo"/>
                 <a:ea typeface="Apple SD Gothic Neo"/>
               </a:rPr>
-              <a:t>"32개 분기에선 누구도 우승을 증명 못 한다"(검정력 분석) → 조건부 가치·분포로 성과 재정의</a:t>
+              <a:t>국면별 모델 교대(v1→v3)로 최고 성능 도달 — 그러나 방법론 수용성 문제로 채택 보류</a:t>
             </a:r>
           </a:p>
         </p:txBody>
@@ -7515,14 +7515,14 @@
         </p:nvSpPr>
         <p:spPr>
           <a:xfrm>
-            <a:off x="548640" y="4279392"/>
-            <a:ext cx="41148" cy="804672"/>
+            <a:off x="548640" y="3849624"/>
+            <a:ext cx="41148" cy="731520"/>
           </a:xfrm>
           <a:prstGeom prst="rect">
             <a:avLst/>
           </a:prstGeom>
           <a:solidFill>
-            <a:srgbClr val="6B6B6B"/>
+            <a:srgbClr val="243447"/>
           </a:solidFill>
           <a:ln>
             <a:noFill/>
@@ -7559,7 +7559,7 @@
         </p:nvSpPr>
         <p:spPr>
           <a:xfrm>
-            <a:off x="777240" y="4279392"/>
+            <a:off x="777240" y="3849624"/>
             <a:ext cx="1234440" cy="365760"/>
           </a:xfrm>
           <a:prstGeom prst="rect">
@@ -7579,14 +7579,14 @@
               </a:spcAft>
             </a:pPr>
             <a:r>
-              <a:rPr sz="1200" b="1">
-                <a:solidFill>
-                  <a:srgbClr val="6B6B6B"/>
-                </a:solidFill>
-                <a:latin typeface="Apple SD Gothic Neo"/>
-                <a:ea typeface="Apple SD Gothic Neo"/>
-              </a:rPr>
-              <a:t>8월 초</a:t>
+              <a:rPr sz="1150" b="1">
+                <a:solidFill>
+                  <a:srgbClr val="243447"/>
+                </a:solidFill>
+                <a:latin typeface="Apple SD Gothic Neo"/>
+                <a:ea typeface="Apple SD Gothic Neo"/>
+              </a:rPr>
+              <a:t>7월 말</a:t>
             </a:r>
           </a:p>
         </p:txBody>
@@ -7599,7 +7599,7 @@
         </p:nvSpPr>
         <p:spPr>
           <a:xfrm>
-            <a:off x="2057400" y="4279392"/>
+            <a:off x="2057400" y="3849624"/>
             <a:ext cx="2011680" cy="365760"/>
           </a:xfrm>
           <a:prstGeom prst="rect">
@@ -7619,14 +7619,14 @@
               </a:spcAft>
             </a:pPr>
             <a:r>
-              <a:rPr sz="1200" b="1">
+              <a:rPr sz="1150" b="1">
                 <a:solidFill>
                   <a:srgbClr val="243447"/>
                 </a:solidFill>
                 <a:latin typeface="Apple SD Gothic Neo"/>
                 <a:ea typeface="Apple SD Gothic Neo"/>
               </a:rPr>
-              <a:t>기준선 격변</a:t>
+              <a:t>축 전환</a:t>
             </a:r>
           </a:p>
         </p:txBody>
@@ -7639,8 +7639,8 @@
         </p:nvSpPr>
         <p:spPr>
           <a:xfrm>
-            <a:off x="4160520" y="4279392"/>
-            <a:ext cx="7406640" cy="731520"/>
+            <a:off x="4160520" y="3849624"/>
+            <a:ext cx="7406640" cy="685800"/>
           </a:xfrm>
           <a:prstGeom prst="rect">
             <a:avLst/>
@@ -7659,14 +7659,14 @@
               </a:spcAft>
             </a:pPr>
             <a:r>
-              <a:rPr sz="1050" b="0">
+              <a:rPr sz="1000" b="0">
                 <a:solidFill>
                   <a:srgbClr val="262626"/>
                 </a:solidFill>
                 <a:latin typeface="Apple SD Gothic Neo"/>
                 <a:ea typeface="Apple SD Gothic Neo"/>
               </a:rPr>
-              <a:t>한은이 자체 코드의 단위 결함을 개정 — 전 실험 즉시 재검증, XGBoost 단독이 새 기준선</a:t>
+              <a:t>"32개 분기에선 누구도 우승을 증명 못 한다"(검정력 분석) → 조건부 가치·분포로 성과 재정의</a:t>
             </a:r>
           </a:p>
         </p:txBody>
@@ -7679,14 +7679,14 @@
         </p:nvSpPr>
         <p:spPr>
           <a:xfrm>
-            <a:off x="548640" y="5248656"/>
-            <a:ext cx="41148" cy="804672"/>
+            <a:off x="548640" y="4700016"/>
+            <a:ext cx="41148" cy="731520"/>
           </a:xfrm>
           <a:prstGeom prst="rect">
             <a:avLst/>
           </a:prstGeom>
           <a:solidFill>
-            <a:srgbClr val="008A3E"/>
+            <a:srgbClr val="6B6B6B"/>
           </a:solidFill>
           <a:ln>
             <a:noFill/>
@@ -7723,7 +7723,7 @@
         </p:nvSpPr>
         <p:spPr>
           <a:xfrm>
-            <a:off x="777240" y="5248656"/>
+            <a:off x="777240" y="4700016"/>
             <a:ext cx="1234440" cy="365760"/>
           </a:xfrm>
           <a:prstGeom prst="rect">
@@ -7743,14 +7743,14 @@
               </a:spcAft>
             </a:pPr>
             <a:r>
-              <a:rPr sz="1200" b="1">
-                <a:solidFill>
-                  <a:srgbClr val="008A3E"/>
-                </a:solidFill>
-                <a:latin typeface="Apple SD Gothic Neo"/>
-                <a:ea typeface="Apple SD Gothic Neo"/>
-              </a:rPr>
-              <a:t>8월 말</a:t>
+              <a:rPr sz="1150" b="1">
+                <a:solidFill>
+                  <a:srgbClr val="6B6B6B"/>
+                </a:solidFill>
+                <a:latin typeface="Apple SD Gothic Neo"/>
+                <a:ea typeface="Apple SD Gothic Neo"/>
+              </a:rPr>
+              <a:t>8월 초</a:t>
             </a:r>
           </a:p>
         </p:txBody>
@@ -7763,7 +7763,7 @@
         </p:nvSpPr>
         <p:spPr>
           <a:xfrm>
-            <a:off x="2057400" y="5248656"/>
+            <a:off x="2057400" y="4700016"/>
             <a:ext cx="2011680" cy="365760"/>
           </a:xfrm>
           <a:prstGeom prst="rect">
@@ -7783,14 +7783,14 @@
               </a:spcAft>
             </a:pPr>
             <a:r>
-              <a:rPr sz="1200" b="1">
+              <a:rPr sz="1150" b="1">
                 <a:solidFill>
                   <a:srgbClr val="243447"/>
                 </a:solidFill>
                 <a:latin typeface="Apple SD Gothic Neo"/>
                 <a:ea typeface="Apple SD Gothic Neo"/>
               </a:rPr>
-              <a:t>적응학습 실증</a:t>
+              <a:t>기준선 격변</a:t>
             </a:r>
           </a:p>
         </p:txBody>
@@ -7803,8 +7803,8 @@
         </p:nvSpPr>
         <p:spPr>
           <a:xfrm>
-            <a:off x="4160520" y="5248656"/>
-            <a:ext cx="7406640" cy="731520"/>
+            <a:off x="4160520" y="4700016"/>
+            <a:ext cx="7406640" cy="685800"/>
           </a:xfrm>
           <a:prstGeom prst="rect">
             <a:avLst/>
@@ -7823,28 +7823,72 @@
               </a:spcAft>
             </a:pPr>
             <a:r>
-              <a:rPr sz="1050" b="0">
+              <a:rPr sz="1000" b="0">
                 <a:solidFill>
                   <a:srgbClr val="262626"/>
                 </a:solidFill>
                 <a:latin typeface="Apple SD Gothic Neo"/>
                 <a:ea typeface="Apple SD Gothic Neo"/>
               </a:rPr>
-              <a:t>한은 제안(적응학습)을 당사가 첫 실증 — LoRA + 임계 규칙으로 32분기 신기록(0.733)</a:t>
-            </a:r>
-          </a:p>
-        </p:txBody>
-      </p:sp>
-      <p:sp>
-        <p:nvSpPr>
-          <p:cNvPr id="25" name="TextBox 24"/>
+              <a:t>한은이 자체 코드의 단위 결함을 개정 — 전 실험 즉시 재검증, XGBoost 단독이 새 기준선</a:t>
+            </a:r>
+          </a:p>
+        </p:txBody>
+      </p:sp>
+      <p:sp>
+        <p:nvSpPr>
+          <p:cNvPr id="25" name="Rectangle 24"/>
+          <p:cNvSpPr/>
+          <p:nvPr/>
+        </p:nvSpPr>
+        <p:spPr>
+          <a:xfrm>
+            <a:off x="548640" y="5550407"/>
+            <a:ext cx="41148" cy="731520"/>
+          </a:xfrm>
+          <a:prstGeom prst="rect">
+            <a:avLst/>
+          </a:prstGeom>
+          <a:solidFill>
+            <a:srgbClr val="008A3E"/>
+          </a:solidFill>
+          <a:ln>
+            <a:noFill/>
+          </a:ln>
+          <a:effectLst/>
+        </p:spPr>
+        <p:style>
+          <a:lnRef idx="1">
+            <a:schemeClr val="accent1"/>
+          </a:lnRef>
+          <a:fillRef idx="3">
+            <a:schemeClr val="accent1"/>
+          </a:fillRef>
+          <a:effectRef idx="2">
+            <a:schemeClr val="accent1"/>
+          </a:effectRef>
+          <a:fontRef idx="minor">
+            <a:schemeClr val="lt1"/>
+          </a:fontRef>
+        </p:style>
+        <p:txBody>
+          <a:bodyPr rtlCol="0" anchor="ctr"/>
+          <a:lstStyle/>
+          <a:p>
+            <a:pPr algn="ctr"/>
+          </a:p>
+        </p:txBody>
+      </p:sp>
+      <p:sp>
+        <p:nvSpPr>
+          <p:cNvPr id="26" name="TextBox 25"/>
           <p:cNvSpPr txBox="1"/>
           <p:nvPr/>
         </p:nvSpPr>
         <p:spPr>
           <a:xfrm>
-            <a:off x="548640" y="6492240"/>
-            <a:ext cx="10607040" cy="274320"/>
+            <a:off x="777240" y="5550407"/>
+            <a:ext cx="1234440" cy="365760"/>
           </a:xfrm>
           <a:prstGeom prst="rect">
             <a:avLst/>
@@ -7863,6 +7907,126 @@
               </a:spcAft>
             </a:pPr>
             <a:r>
+              <a:rPr sz="1150" b="1">
+                <a:solidFill>
+                  <a:srgbClr val="008A3E"/>
+                </a:solidFill>
+                <a:latin typeface="Apple SD Gothic Neo"/>
+                <a:ea typeface="Apple SD Gothic Neo"/>
+              </a:rPr>
+              <a:t>8월 말</a:t>
+            </a:r>
+          </a:p>
+        </p:txBody>
+      </p:sp>
+      <p:sp>
+        <p:nvSpPr>
+          <p:cNvPr id="27" name="TextBox 26"/>
+          <p:cNvSpPr txBox="1"/>
+          <p:nvPr/>
+        </p:nvSpPr>
+        <p:spPr>
+          <a:xfrm>
+            <a:off x="2057400" y="5550407"/>
+            <a:ext cx="2011680" cy="365760"/>
+          </a:xfrm>
+          <a:prstGeom prst="rect">
+            <a:avLst/>
+          </a:prstGeom>
+          <a:noFill/>
+        </p:spPr>
+        <p:txBody>
+          <a:bodyPr wrap="square" anchor="t" lIns="18288" rIns="18288" tIns="9144" bIns="9144">
+            <a:spAutoFit/>
+          </a:bodyPr>
+          <a:lstStyle/>
+          <a:p>
+            <a:pPr algn="l">
+              <a:spcAft>
+                <a:spcPts val="200"/>
+              </a:spcAft>
+            </a:pPr>
+            <a:r>
+              <a:rPr sz="1150" b="1">
+                <a:solidFill>
+                  <a:srgbClr val="243447"/>
+                </a:solidFill>
+                <a:latin typeface="Apple SD Gothic Neo"/>
+                <a:ea typeface="Apple SD Gothic Neo"/>
+              </a:rPr>
+              <a:t>적응학습 실증</a:t>
+            </a:r>
+          </a:p>
+        </p:txBody>
+      </p:sp>
+      <p:sp>
+        <p:nvSpPr>
+          <p:cNvPr id="28" name="TextBox 27"/>
+          <p:cNvSpPr txBox="1"/>
+          <p:nvPr/>
+        </p:nvSpPr>
+        <p:spPr>
+          <a:xfrm>
+            <a:off x="4160520" y="5550407"/>
+            <a:ext cx="7406640" cy="685800"/>
+          </a:xfrm>
+          <a:prstGeom prst="rect">
+            <a:avLst/>
+          </a:prstGeom>
+          <a:noFill/>
+        </p:spPr>
+        <p:txBody>
+          <a:bodyPr wrap="square" anchor="t" lIns="18288" rIns="18288" tIns="9144" bIns="9144">
+            <a:spAutoFit/>
+          </a:bodyPr>
+          <a:lstStyle/>
+          <a:p>
+            <a:pPr algn="l">
+              <a:spcAft>
+                <a:spcPts val="200"/>
+              </a:spcAft>
+            </a:pPr>
+            <a:r>
+              <a:rPr sz="1000" b="0">
+                <a:solidFill>
+                  <a:srgbClr val="262626"/>
+                </a:solidFill>
+                <a:latin typeface="Apple SD Gothic Neo"/>
+                <a:ea typeface="Apple SD Gothic Neo"/>
+              </a:rPr>
+              <a:t>한은 제안(적응학습)을 당사가 첫 실증 — LoRA + 임계 규칙으로 32분기 신기록(0.733)</a:t>
+            </a:r>
+          </a:p>
+        </p:txBody>
+      </p:sp>
+      <p:sp>
+        <p:nvSpPr>
+          <p:cNvPr id="29" name="TextBox 28"/>
+          <p:cNvSpPr txBox="1"/>
+          <p:nvPr/>
+        </p:nvSpPr>
+        <p:spPr>
+          <a:xfrm>
+            <a:off x="548640" y="6492240"/>
+            <a:ext cx="10607040" cy="274320"/>
+          </a:xfrm>
+          <a:prstGeom prst="rect">
+            <a:avLst/>
+          </a:prstGeom>
+          <a:noFill/>
+        </p:spPr>
+        <p:txBody>
+          <a:bodyPr wrap="square" anchor="t" lIns="18288" rIns="18288" tIns="9144" bIns="9144">
+            <a:spAutoFit/>
+          </a:bodyPr>
+          <a:lstStyle/>
+          <a:p>
+            <a:pPr algn="l">
+              <a:spcAft>
+                <a:spcPts val="200"/>
+              </a:spcAft>
+            </a:pPr>
+            <a:r>
               <a:rPr sz="800" b="0">
                 <a:solidFill>
                   <a:srgbClr val="6B6B6B"/>
@@ -7877,7 +8041,7 @@
       </p:sp>
       <p:sp>
         <p:nvSpPr>
-          <p:cNvPr id="26" name="TextBox 25"/>
+          <p:cNvPr id="30" name="TextBox 29"/>
           <p:cNvSpPr txBox="1"/>
           <p:nvPr/>
         </p:nvSpPr>
@@ -9542,7 +9706,41 @@
                 <a:latin typeface="Apple SD Gothic Neo"/>
                 <a:ea typeface="Apple SD Gothic Neo"/>
               </a:rPr>
-              <a:t>· 표본 = 32개 분기. 주간 19발은 분기 내 강한 상관 —</a:t>
+              <a:t>· GDP는 분기 지표 — 1년에 관측 4개, 8년을 다 모아도 32개.</a:t>
+            </a:r>
+          </a:p>
+          <a:p>
+            <a:pPr algn="l">
+              <a:spcAft>
+                <a:spcPts val="200"/>
+              </a:spcAft>
+            </a:pPr>
+            <a:r>
+              <a:rPr sz="1050" b="0">
+                <a:solidFill>
+                  <a:srgbClr val="262626"/>
+                </a:solidFill>
+                <a:latin typeface="Apple SD Gothic Neo"/>
+                <a:ea typeface="Apple SD Gothic Neo"/>
+              </a:rPr>
+              <a:t>  저표본에서 패턴을 찾아야 하는 과제의 구조적 어려움</a:t>
+            </a:r>
+          </a:p>
+          <a:p>
+            <a:pPr algn="l">
+              <a:spcAft>
+                <a:spcPts val="200"/>
+              </a:spcAft>
+            </a:pPr>
+            <a:r>
+              <a:rPr sz="1050" b="0">
+                <a:solidFill>
+                  <a:srgbClr val="262626"/>
+                </a:solidFill>
+                <a:latin typeface="Apple SD Gothic Neo"/>
+                <a:ea typeface="Apple SD Gothic Neo"/>
+              </a:rPr>
+              <a:t>· 주간 19발은 분기 내 강한 상관 —</a:t>
             </a:r>
           </a:p>
           <a:p>
@@ -10670,6 +10868,57 @@
                 <a:ea typeface="Apple SD Gothic Neo"/>
               </a:rPr>
               <a:t>전수 검증의 결론</a:t>
+            </a:r>
+          </a:p>
+          <a:p>
+            <a:pPr algn="l">
+              <a:spcAft>
+                <a:spcPts val="200"/>
+              </a:spcAft>
+            </a:pPr>
+            <a:r>
+              <a:rPr sz="1050" b="0">
+                <a:solidFill>
+                  <a:srgbClr val="262626"/>
+                </a:solidFill>
+                <a:latin typeface="Apple SD Gothic Neo"/>
+                <a:ea typeface="Apple SD Gothic Neo"/>
+              </a:rPr>
+              <a:t>· 언어모델(Claude·HCX) 시계열 활용도 타진 — 가능성은</a:t>
+            </a:r>
+          </a:p>
+          <a:p>
+            <a:pPr algn="l">
+              <a:spcAft>
+                <a:spcPts val="200"/>
+              </a:spcAft>
+            </a:pPr>
+            <a:r>
+              <a:rPr sz="1050" b="0">
+                <a:solidFill>
+                  <a:srgbClr val="262626"/>
+                </a:solidFill>
+                <a:latin typeface="Apple SD Gothic Neo"/>
+                <a:ea typeface="Apple SD Gothic Neo"/>
+              </a:rPr>
+              <a:t>  관찰됐으나 통계적 유의성 미확보, 학습데이터 오염으로</a:t>
+            </a:r>
+          </a:p>
+          <a:p>
+            <a:pPr algn="l">
+              <a:spcAft>
+                <a:spcPts val="200"/>
+              </a:spcAft>
+            </a:pPr>
+            <a:r>
+              <a:rPr sz="1050" b="0">
+                <a:solidFill>
+                  <a:srgbClr val="262626"/>
+                </a:solidFill>
+                <a:latin typeface="Apple SD Gothic Neo"/>
+                <a:ea typeface="Apple SD Gothic Neo"/>
+              </a:rPr>
+              <a:t>  실시간 공정 채점이 성립하지 않아 채택 제외</a:t>
             </a:r>
           </a:p>
           <a:p>

--- a/docs/한은협업_여정보고_대표_2026-09-01.pptx
+++ b/docs/한은협업_여정보고_대표_2026-09-01.pptx
@@ -4246,12 +4246,12 @@
               </a:spcAft>
             </a:pPr>
             <a:r>
-              <a:rPr sz="1200" b="1">
+              <a:rPr sz="1380" b="1">
                 <a:solidFill>
                   <a:srgbClr val="6B6B6B"/>
                 </a:solidFill>
-                <a:latin typeface="Apple SD Gothic Neo"/>
-                <a:ea typeface="Apple SD Gothic Neo"/>
+                <a:latin typeface="NanumSquare"/>
+                <a:ea typeface="NanumSquare"/>
               </a:rPr>
               <a:t>네이버클라우드 AX Forward Lab</a:t>
             </a:r>
@@ -4286,12 +4286,12 @@
               </a:spcAft>
             </a:pPr>
             <a:r>
-              <a:rPr sz="3100" b="1">
+              <a:rPr sz="3560" b="1">
                 <a:solidFill>
                   <a:srgbClr val="243447"/>
                 </a:solidFill>
-                <a:latin typeface="Apple SD Gothic Neo"/>
-                <a:ea typeface="Apple SD Gothic Neo"/>
+                <a:latin typeface="NanumSquare"/>
+                <a:ea typeface="NanumSquare"/>
               </a:rPr>
               <a:t>한국은행 GDP Nowcasting 협업 — 3개월의 여정</a:t>
             </a:r>
@@ -4303,12 +4303,12 @@
               </a:spcAft>
             </a:pPr>
             <a:r>
-              <a:rPr sz="800" b="0">
+              <a:rPr sz="919" b="0">
                 <a:solidFill>
                   <a:srgbClr val="262626"/>
                 </a:solidFill>
-                <a:latin typeface="Apple SD Gothic Neo"/>
-                <a:ea typeface="Apple SD Gothic Neo"/>
+                <a:latin typeface="NanumSquare"/>
+                <a:ea typeface="NanumSquare"/>
               </a:rPr>
               <a:t/>
             </a:r>
@@ -4320,12 +4320,12 @@
               </a:spcAft>
             </a:pPr>
             <a:r>
-              <a:rPr sz="1600" b="0">
+              <a:rPr sz="1839" b="0">
                 <a:solidFill>
                   <a:srgbClr val="262626"/>
                 </a:solidFill>
-                <a:latin typeface="Apple SD Gothic Neo"/>
-                <a:ea typeface="Apple SD Gothic Neo"/>
+                <a:latin typeface="NanumSquare"/>
+                <a:ea typeface="NanumSquare"/>
               </a:rPr>
               <a:t>국면전환 가설에서 파운데이션 모델 적응학습까지, 그리고 공동 연구 어젠다</a:t>
             </a:r>
@@ -4395,12 +4395,12 @@
               </a:spcAft>
             </a:pPr>
             <a:r>
-              <a:rPr sz="1200" b="0">
+              <a:rPr sz="1380" b="0">
                 <a:solidFill>
                   <a:srgbClr val="6B6B6B"/>
                 </a:solidFill>
-                <a:latin typeface="Apple SD Gothic Neo"/>
-                <a:ea typeface="Apple SD Gothic Neo"/>
+                <a:latin typeface="NanumSquare"/>
+                <a:ea typeface="NanumSquare"/>
               </a:rPr>
               <a:t>40여 개 모형 구성 · 실험 스크립트 50여 종 · 동일 규약 실시간 재현 채점 608발 × 32개 분기.</a:t>
             </a:r>
@@ -4412,12 +4412,12 @@
               </a:spcAft>
             </a:pPr>
             <a:r>
-              <a:rPr sz="1200" b="0">
+              <a:rPr sz="1380" b="0">
                 <a:solidFill>
                   <a:srgbClr val="6B6B6B"/>
                 </a:solidFill>
-                <a:latin typeface="Apple SD Gothic Neo"/>
-                <a:ea typeface="Apple SD Gothic Neo"/>
+                <a:latin typeface="NanumSquare"/>
+                <a:ea typeface="NanumSquare"/>
               </a:rPr>
               <a:t>정확도 신기록(-2.3%)과 함께, 한은이 협업 범위 확대를 먼저 제안해온 상태입니다.</a:t>
             </a:r>
@@ -4452,12 +4452,12 @@
               </a:spcAft>
             </a:pPr>
             <a:r>
-              <a:rPr sz="1050" b="0">
+              <a:rPr sz="1210" b="0">
                 <a:solidFill>
                   <a:srgbClr val="6B6B6B"/>
                 </a:solidFill>
-                <a:latin typeface="Apple SD Gothic Neo"/>
-                <a:ea typeface="Apple SD Gothic Neo"/>
+                <a:latin typeface="NanumSquare"/>
+                <a:ea typeface="NanumSquare"/>
               </a:rPr>
               <a:t>한은–네이버 2026년 협력과제 8건 중 우선순위 2위 「시계열 Track1 (거시경제 예측)」 — 한은 담당: 이창훈·윤희근 (디지털혁신실)</a:t>
             </a:r>
@@ -4492,12 +4492,12 @@
               </a:spcAft>
             </a:pPr>
             <a:r>
-              <a:rPr sz="1100" b="0">
+              <a:rPr sz="1260" b="0">
                 <a:solidFill>
                   <a:srgbClr val="6B6B6B"/>
                 </a:solidFill>
-                <a:latin typeface="Apple SD Gothic Neo"/>
-                <a:ea typeface="Apple SD Gothic Neo"/>
+                <a:latin typeface="NanumSquare"/>
+                <a:ea typeface="NanumSquare"/>
               </a:rPr>
               <a:t>2026. 9.  |  대표 보고  |  작성: 김용민</a:t>
             </a:r>
@@ -4550,12 +4550,12 @@
               </a:spcAft>
             </a:pPr>
             <a:r>
-              <a:rPr sz="1050" b="1">
+              <a:rPr sz="1210" b="1">
                 <a:solidFill>
                   <a:srgbClr val="6B6B6B"/>
                 </a:solidFill>
-                <a:latin typeface="Apple SD Gothic Neo"/>
-                <a:ea typeface="Apple SD Gothic Neo"/>
+                <a:latin typeface="NanumSquare"/>
+                <a:ea typeface="NanumSquare"/>
               </a:rPr>
               <a:t>9  |  일하는 방식</a:t>
             </a:r>
@@ -4590,12 +4590,12 @@
               </a:spcAft>
             </a:pPr>
             <a:r>
-              <a:rPr sz="1700" b="1">
+              <a:rPr sz="1950" b="1">
                 <a:solidFill>
                   <a:srgbClr val="243447"/>
                 </a:solidFill>
-                <a:latin typeface="Apple SD Gothic Neo"/>
-                <a:ea typeface="Apple SD Gothic Neo"/>
+                <a:latin typeface="NanumSquare"/>
+                <a:ea typeface="NanumSquare"/>
               </a:rPr>
               <a:t>모든 협업을 GitHub 문서와 코드 리뷰로 진행했습니다</a:t>
             </a:r>
@@ -4665,12 +4665,12 @@
               </a:spcAft>
             </a:pPr>
             <a:r>
-              <a:rPr sz="1050" b="0">
+              <a:rPr sz="1210" b="0">
                 <a:solidFill>
                   <a:srgbClr val="262626"/>
                 </a:solidFill>
-                <a:latin typeface="Apple SD Gothic Neo"/>
-                <a:ea typeface="Apple SD Gothic Neo"/>
+                <a:latin typeface="NanumSquare"/>
+                <a:ea typeface="NanumSquare"/>
               </a:rPr>
               <a:t>한은이 코드와 리포트를 커밋하면, 당사가 커밋 단위로 리뷰·재검증하고 재현 가능한 스크립트와 문서로 회신하는 비동기 협업 방식이었습니다. 고객 코드를 읽는 것이 요구사항 분석이었습니다.</a:t>
             </a:r>
@@ -4705,12 +4705,12 @@
               </a:spcAft>
             </a:pPr>
             <a:r>
-              <a:rPr sz="1200" b="1">
+              <a:rPr sz="1380" b="1">
                 <a:solidFill>
                   <a:srgbClr val="243447"/>
                 </a:solidFill>
-                <a:latin typeface="Apple SD Gothic Neo"/>
-                <a:ea typeface="Apple SD Gothic Neo"/>
+                <a:latin typeface="NanumSquare"/>
+                <a:ea typeface="NanumSquare"/>
               </a:rPr>
               <a:t>이창훈 과장(한은)의 커밋</a:t>
             </a:r>
@@ -4745,12 +4745,12 @@
               </a:spcAft>
             </a:pPr>
             <a:r>
-              <a:rPr sz="1200" b="1">
+              <a:rPr sz="1380" b="1">
                 <a:solidFill>
                   <a:srgbClr val="008A3E"/>
                 </a:solidFill>
-                <a:latin typeface="Apple SD Gothic Neo"/>
-                <a:ea typeface="Apple SD Gothic Neo"/>
+                <a:latin typeface="NanumSquare"/>
+                <a:ea typeface="NanumSquare"/>
               </a:rPr>
               <a:t>당사의 응답</a:t>
             </a:r>
@@ -4864,12 +4864,12 @@
               </a:spcAft>
             </a:pPr>
             <a:r>
-              <a:rPr sz="1050" b="1">
+              <a:rPr sz="1210" b="1">
                 <a:solidFill>
                   <a:srgbClr val="262626"/>
                 </a:solidFill>
-                <a:latin typeface="Apple SD Gothic Neo"/>
-                <a:ea typeface="Apple SD Gothic Neo"/>
+                <a:latin typeface="NanumSquare"/>
+                <a:ea typeface="NanumSquare"/>
               </a:rPr>
               <a:t>6월~  빈티지 데이터셋·평가 기준 정비</a:t>
             </a:r>
@@ -4904,12 +4904,12 @@
               </a:spcAft>
             </a:pPr>
             <a:r>
-              <a:rPr sz="919" b="0">
+              <a:rPr sz="1060" b="0">
                 <a:solidFill>
                   <a:srgbClr val="6B6B6B"/>
                 </a:solidFill>
-                <a:latin typeface="Apple SD Gothic Neo"/>
-                <a:ea typeface="Apple SD Gothic Neo"/>
+                <a:latin typeface="NanumSquare"/>
+                <a:ea typeface="NanumSquare"/>
               </a:rPr>
               <a:t>주간 실시간 빈티지(73개 지표)·기준모형 예측·평가 그리드를 정비해 제공 — 협업의 공통 잣대를 한은이 먼저 명확히 함</a:t>
             </a:r>
@@ -4988,12 +4988,12 @@
               </a:spcAft>
             </a:pPr>
             <a:r>
-              <a:rPr sz="1050" b="1">
+              <a:rPr sz="1210" b="1">
                 <a:solidFill>
                   <a:srgbClr val="008A3E"/>
                 </a:solidFill>
-                <a:latin typeface="Apple SD Gothic Neo"/>
-                <a:ea typeface="Apple SD Gothic Neo"/>
+                <a:latin typeface="NanumSquare"/>
+                <a:ea typeface="NanumSquare"/>
               </a:rPr>
               <a:t>그 잣대 위에 하네스</a:t>
             </a:r>
@@ -5028,12 +5028,12 @@
               </a:spcAft>
             </a:pPr>
             <a:r>
-              <a:rPr sz="919" b="0">
+              <a:rPr sz="1060" b="0">
                 <a:solidFill>
                   <a:srgbClr val="262626"/>
                 </a:solidFill>
-                <a:latin typeface="Apple SD Gothic Neo"/>
-                <a:ea typeface="Apple SD Gothic Neo"/>
+                <a:latin typeface="NanumSquare"/>
+                <a:ea typeface="NanumSquare"/>
               </a:rPr>
               <a:t>한은 제공 빈티지 데이터셋·전처리 코드를 그대로 재사용해 재현 채점 체계 구축 — 이후 모든 실험(양측)이 같은 잣대로 비교 가능해짐</a:t>
             </a:r>
@@ -5112,12 +5112,12 @@
               </a:spcAft>
             </a:pPr>
             <a:r>
-              <a:rPr sz="1050" b="1">
+              <a:rPr sz="1210" b="1">
                 <a:solidFill>
                   <a:srgbClr val="262626"/>
                 </a:solidFill>
-                <a:latin typeface="Apple SD Gothic Neo"/>
-                <a:ea typeface="Apple SD Gothic Neo"/>
+                <a:latin typeface="NanumSquare"/>
+                <a:ea typeface="NanumSquare"/>
               </a:rPr>
               <a:t>8/4  "코드 수정 및 산출물 저장"</a:t>
             </a:r>
@@ -5152,12 +5152,12 @@
               </a:spcAft>
             </a:pPr>
             <a:r>
-              <a:rPr sz="919" b="0">
+              <a:rPr sz="1060" b="0">
                 <a:solidFill>
                   <a:srgbClr val="6B6B6B"/>
                 </a:solidFill>
-                <a:latin typeface="Apple SD Gothic Neo"/>
-                <a:ea typeface="Apple SD Gothic Neo"/>
+                <a:latin typeface="NanumSquare"/>
+                <a:ea typeface="NanumSquare"/>
               </a:rPr>
               <a:t>예측단위 개정(schema v2) + 구버전 산출물 차단 검증 로직 — 기준점을 스스로 바로잡음</a:t>
             </a:r>
@@ -5236,12 +5236,12 @@
               </a:spcAft>
             </a:pPr>
             <a:r>
-              <a:rPr sz="1050" b="1">
+              <a:rPr sz="1210" b="1">
                 <a:solidFill>
                   <a:srgbClr val="008A3E"/>
                 </a:solidFill>
-                <a:latin typeface="Apple SD Gothic Neo"/>
-                <a:ea typeface="Apple SD Gothic Neo"/>
+                <a:latin typeface="NanumSquare"/>
+                <a:ea typeface="NanumSquare"/>
               </a:rPr>
               <a:t>당일 재검증</a:t>
             </a:r>
@@ -5276,12 +5276,12 @@
               </a:spcAft>
             </a:pPr>
             <a:r>
-              <a:rPr sz="919" b="0">
+              <a:rPr sz="1060" b="0">
                 <a:solidFill>
                   <a:srgbClr val="262626"/>
                 </a:solidFill>
-                <a:latin typeface="Apple SD Gothic Neo"/>
-                <a:ea typeface="Apple SD Gothic Neo"/>
+                <a:latin typeface="NanumSquare"/>
+                <a:ea typeface="NanumSquare"/>
               </a:rPr>
               <a:t>40여 구성 전면 재채점 → 신 기준선(XGBoost 단독) 확정, 당사 종전 기록도 함께 폐기</a:t>
             </a:r>
@@ -5360,12 +5360,12 @@
               </a:spcAft>
             </a:pPr>
             <a:r>
-              <a:rPr sz="1050" b="1">
+              <a:rPr sz="1210" b="1">
                 <a:solidFill>
                   <a:srgbClr val="262626"/>
                 </a:solidFill>
-                <a:latin typeface="Apple SD Gothic Neo"/>
-                <a:ea typeface="Apple SD Gothic Neo"/>
+                <a:latin typeface="NanumSquare"/>
+                <a:ea typeface="NanumSquare"/>
               </a:rPr>
               <a:t>8/25  "Add BISTRO nowcasting experiments..."</a:t>
             </a:r>
@@ -5400,12 +5400,12 @@
               </a:spcAft>
             </a:pPr>
             <a:r>
-              <a:rPr sz="919" b="0">
+              <a:rPr sz="1060" b="0">
                 <a:solidFill>
                   <a:srgbClr val="6B6B6B"/>
                 </a:solidFill>
-                <a:latin typeface="Apple SD Gothic Neo"/>
-                <a:ea typeface="Apple SD Gothic Neo"/>
+                <a:latin typeface="NanumSquare"/>
+                <a:ea typeface="NanumSquare"/>
               </a:rPr>
               <a:t>실험 코드 16종 + 테스트 + 회의자료 3.7만 줄 — 코드에서 실험 설계·한계까지 독해</a:t>
             </a:r>
@@ -5484,12 +5484,12 @@
               </a:spcAft>
             </a:pPr>
             <a:r>
-              <a:rPr sz="1050" b="1">
+              <a:rPr sz="1210" b="1">
                 <a:solidFill>
                   <a:srgbClr val="008A3E"/>
                 </a:solidFill>
-                <a:latin typeface="Apple SD Gothic Neo"/>
-                <a:ea typeface="Apple SD Gothic Neo"/>
+                <a:latin typeface="NanumSquare"/>
+                <a:ea typeface="NanumSquare"/>
               </a:rPr>
               <a:t>익일 진단 재현 → 3일 내 첫 실증</a:t>
             </a:r>
@@ -5524,12 +5524,12 @@
               </a:spcAft>
             </a:pPr>
             <a:r>
-              <a:rPr sz="919" b="0">
+              <a:rPr sz="1060" b="0">
                 <a:solidFill>
                   <a:srgbClr val="262626"/>
                 </a:solidFill>
-                <a:latin typeface="Apple SD Gothic Neo"/>
-                <a:ea typeface="Apple SD Gothic Neo"/>
+                <a:latin typeface="NanumSquare"/>
+                <a:ea typeface="NanumSquare"/>
               </a:rPr>
               <a:t>주차별 흡수력 진단 재현·원인 규명 → 그들이 제안만 한 적응학습을 LoRA로 첫 실측</a:t>
             </a:r>
@@ -5608,12 +5608,12 @@
               </a:spcAft>
             </a:pPr>
             <a:r>
-              <a:rPr sz="1050" b="1">
+              <a:rPr sz="1210" b="1">
                 <a:solidFill>
                   <a:srgbClr val="262626"/>
                 </a:solidFill>
-                <a:latin typeface="Apple SD Gothic Neo"/>
-                <a:ea typeface="Apple SD Gothic Neo"/>
+                <a:latin typeface="NanumSquare"/>
+                <a:ea typeface="NanumSquare"/>
               </a:rPr>
               <a:t>(수신 확인도 커밋으로)</a:t>
             </a:r>
@@ -5648,12 +5648,12 @@
               </a:spcAft>
             </a:pPr>
             <a:r>
-              <a:rPr sz="919" b="0">
+              <a:rPr sz="1060" b="0">
                 <a:solidFill>
                   <a:srgbClr val="6B6B6B"/>
                 </a:solidFill>
-                <a:latin typeface="Apple SD Gothic Neo"/>
-                <a:ea typeface="Apple SD Gothic Neo"/>
+                <a:latin typeface="NanumSquare"/>
+                <a:ea typeface="NanumSquare"/>
               </a:rPr>
               <a:t>당사 종합리포트 PDF를 한은이 자기 저장소에 커밋 — 산출물이 고객의 공식 기록에 편입</a:t>
             </a:r>
@@ -5732,12 +5732,12 @@
               </a:spcAft>
             </a:pPr>
             <a:r>
-              <a:rPr sz="1050" b="1">
+              <a:rPr sz="1210" b="1">
                 <a:solidFill>
                   <a:srgbClr val="008A3E"/>
                 </a:solidFill>
-                <a:latin typeface="Apple SD Gothic Neo"/>
-                <a:ea typeface="Apple SD Gothic Neo"/>
+                <a:latin typeface="NanumSquare"/>
+                <a:ea typeface="NanumSquare"/>
               </a:rPr>
               <a:t>산출물 = 코드</a:t>
             </a:r>
@@ -5772,12 +5772,12 @@
               </a:spcAft>
             </a:pPr>
             <a:r>
-              <a:rPr sz="919" b="0">
+              <a:rPr sz="1060" b="0">
                 <a:solidFill>
                   <a:srgbClr val="262626"/>
                 </a:solidFill>
-                <a:latin typeface="Apple SD Gothic Neo"/>
-                <a:ea typeface="Apple SD Gothic Neo"/>
+                <a:latin typeface="NanumSquare"/>
+                <a:ea typeface="NanumSquare"/>
               </a:rPr>
               <a:t>실험 스크립트 50여 종을 결과·교훈 주석과 함께 커밋 — 실패(기각 실험)도 재현 가능한 기록으로</a:t>
             </a:r>
@@ -5900,12 +5900,12 @@
               </a:spcAft>
             </a:pPr>
             <a:r>
-              <a:rPr sz="1000" b="1">
+              <a:rPr sz="1150" b="1">
                 <a:solidFill>
                   <a:srgbClr val="243447"/>
                 </a:solidFill>
-                <a:latin typeface="Apple SD Gothic Neo"/>
-                <a:ea typeface="Apple SD Gothic Neo"/>
+                <a:latin typeface="NanumSquare"/>
+                <a:ea typeface="NanumSquare"/>
               </a:rPr>
               <a:t>모든 과정이 커밋 기록으로 남아 언제든 재현하고 감사할 수 있습니다 — 실험 코드의 재현성도 서로 확인하며 진행했습니다.</a:t>
             </a:r>
@@ -5917,12 +5917,12 @@
               </a:spcAft>
             </a:pPr>
             <a:r>
-              <a:rPr sz="900" b="0">
+              <a:rPr sz="1030" b="0">
                 <a:solidFill>
                   <a:srgbClr val="6B6B6B"/>
                 </a:solidFill>
-                <a:latin typeface="Apple SD Gothic Neo"/>
-                <a:ea typeface="Apple SD Gothic Neo"/>
+                <a:latin typeface="NanumSquare"/>
+                <a:ea typeface="NanumSquare"/>
               </a:rPr>
               <a:t>(한은의 개정 수치를 당사가 재계산으로 일치 확인, 당사의 조기 결합 아이디어를 한은이 자체 탐색으로 재현)</a:t>
             </a:r>
@@ -5957,12 +5957,12 @@
               </a:spcAft>
             </a:pPr>
             <a:r>
-              <a:rPr sz="800" b="0">
+              <a:rPr sz="919" b="0">
                 <a:solidFill>
                   <a:srgbClr val="6B6B6B"/>
                 </a:solidFill>
-                <a:latin typeface="Apple SD Gothic Neo"/>
-                <a:ea typeface="Apple SD Gothic Neo"/>
+                <a:latin typeface="NanumSquare"/>
+                <a:ea typeface="NanumSquare"/>
               </a:rPr>
               <a:t>주: 당사 저장소 커밋 90여 건(6~8월) · 한은 저장소는 pull 전용(푸시하지 않음) — 산출물은 문서·PDF로 전달.</a:t>
             </a:r>
@@ -5997,12 +5997,12 @@
               </a:spcAft>
             </a:pPr>
             <a:r>
-              <a:rPr sz="900" b="0">
+              <a:rPr sz="1030" b="0">
                 <a:solidFill>
                   <a:srgbClr val="6B6B6B"/>
                 </a:solidFill>
-                <a:latin typeface="Apple SD Gothic Neo"/>
-                <a:ea typeface="Apple SD Gothic Neo"/>
+                <a:latin typeface="NanumSquare"/>
+                <a:ea typeface="NanumSquare"/>
               </a:rPr>
               <a:t>10</a:t>
             </a:r>
@@ -6055,12 +6055,12 @@
               </a:spcAft>
             </a:pPr>
             <a:r>
-              <a:rPr sz="1050" b="1">
+              <a:rPr sz="1210" b="1">
                 <a:solidFill>
                   <a:srgbClr val="6B6B6B"/>
                 </a:solidFill>
-                <a:latin typeface="Apple SD Gothic Neo"/>
-                <a:ea typeface="Apple SD Gothic Neo"/>
+                <a:latin typeface="NanumSquare"/>
+                <a:ea typeface="NanumSquare"/>
               </a:rPr>
               <a:t>10  |  성과와 다음 단계</a:t>
             </a:r>
@@ -6095,12 +6095,12 @@
               </a:spcAft>
             </a:pPr>
             <a:r>
-              <a:rPr sz="1700" b="1">
+              <a:rPr sz="1950" b="1">
                 <a:solidFill>
                   <a:srgbClr val="243447"/>
                 </a:solidFill>
-                <a:latin typeface="Apple SD Gothic Neo"/>
-                <a:ea typeface="Apple SD Gothic Neo"/>
+                <a:latin typeface="NanumSquare"/>
+                <a:ea typeface="NanumSquare"/>
               </a:rPr>
               <a:t>검증 파트너에서 공동 연구 파트너로 — 협업의 성격이 달라졌습니다</a:t>
             </a:r>
@@ -6214,12 +6214,12 @@
               </a:spcAft>
             </a:pPr>
             <a:r>
-              <a:rPr sz="1200" b="1">
+              <a:rPr sz="1380" b="1">
                 <a:solidFill>
                   <a:srgbClr val="243447"/>
                 </a:solidFill>
-                <a:latin typeface="Apple SD Gothic Neo"/>
-                <a:ea typeface="Apple SD Gothic Neo"/>
+                <a:latin typeface="NanumSquare"/>
+                <a:ea typeface="NanumSquare"/>
               </a:rPr>
               <a:t>고객 조직 지형</a:t>
             </a:r>
@@ -6254,12 +6254,12 @@
               </a:spcAft>
             </a:pPr>
             <a:r>
-              <a:rPr sz="1000" b="0">
+              <a:rPr sz="1150" b="0">
                 <a:solidFill>
                   <a:srgbClr val="262626"/>
                 </a:solidFill>
-                <a:latin typeface="Apple SD Gothic Neo"/>
-                <a:ea typeface="Apple SD Gothic Neo"/>
+                <a:latin typeface="NanumSquare"/>
+                <a:ea typeface="NanumSquare"/>
               </a:rPr>
               <a:t>디지털혁신실(협업 파트너)은 딥러닝 기반 나우캐스팅 시스템 개선을, 경제모형실은 전문가 판단 기반 전망을 맡는 구도 — 경제모형실이 최근 산학협력으로 BISTRO 시계열 모델을 연구 중이어서 두 조직은 경쟁 관계로 보임. 당사의 BISTRO 원본 실측·적응 실증은 파트너가 이 지형에서 기술 근거를 갖게 하는 위치</a:t>
             </a:r>
@@ -6338,12 +6338,12 @@
               </a:spcAft>
             </a:pPr>
             <a:r>
-              <a:rPr sz="1200" b="1">
+              <a:rPr sz="1380" b="1">
                 <a:solidFill>
                   <a:srgbClr val="243447"/>
                 </a:solidFill>
-                <a:latin typeface="Apple SD Gothic Neo"/>
-                <a:ea typeface="Apple SD Gothic Neo"/>
+                <a:latin typeface="NanumSquare"/>
+                <a:ea typeface="NanumSquare"/>
               </a:rPr>
               <a:t>협업 관계</a:t>
             </a:r>
@@ -6378,12 +6378,12 @@
               </a:spcAft>
             </a:pPr>
             <a:r>
-              <a:rPr sz="1000" b="0">
+              <a:rPr sz="1150" b="0">
                 <a:solidFill>
                   <a:srgbClr val="262626"/>
                 </a:solidFill>
-                <a:latin typeface="Apple SD Gothic Neo"/>
-                <a:ea typeface="Apple SD Gothic Neo"/>
+                <a:latin typeface="NanumSquare"/>
+                <a:ea typeface="NanumSquare"/>
               </a:rPr>
               <a:t>한은이 당사 자료를 자체 저장소에 수록하고, 적응학습으로의 협업 범위 확대를 먼저 제안 — 역할 분담 협의 중</a:t>
             </a:r>
@@ -6462,12 +6462,12 @@
               </a:spcAft>
             </a:pPr>
             <a:r>
-              <a:rPr sz="1200" b="1">
+              <a:rPr sz="1380" b="1">
                 <a:solidFill>
                   <a:srgbClr val="243447"/>
                 </a:solidFill>
-                <a:latin typeface="Apple SD Gothic Neo"/>
-                <a:ea typeface="Apple SD Gothic Neo"/>
+                <a:latin typeface="NanumSquare"/>
+                <a:ea typeface="NanumSquare"/>
               </a:rPr>
               <a:t>기술 자산</a:t>
             </a:r>
@@ -6502,12 +6502,12 @@
               </a:spcAft>
             </a:pPr>
             <a:r>
-              <a:rPr sz="1000" b="0">
+              <a:rPr sz="1150" b="0">
                 <a:solidFill>
                   <a:srgbClr val="262626"/>
                 </a:solidFill>
-                <a:latin typeface="Apple SD Gothic Neo"/>
-                <a:ea typeface="Apple SD Gothic Neo"/>
+                <a:latin typeface="NanumSquare"/>
+                <a:ea typeface="NanumSquare"/>
               </a:rPr>
               <a:t>실시간 검증 하네스 · 일별 빠른신호 파이프라인 · FM 절제/흡수력 진단 프레임 · LoRA 적응 러너 — 전부 재현 가능 스크립트로 관리 (50여 종)</a:t>
             </a:r>
@@ -6586,12 +6586,12 @@
               </a:spcAft>
             </a:pPr>
             <a:r>
-              <a:rPr sz="1200" b="1">
+              <a:rPr sz="1380" b="1">
                 <a:solidFill>
                   <a:srgbClr val="243447"/>
                 </a:solidFill>
-                <a:latin typeface="Apple SD Gothic Neo"/>
-                <a:ea typeface="Apple SD Gothic Neo"/>
+                <a:latin typeface="NanumSquare"/>
+                <a:ea typeface="NanumSquare"/>
               </a:rPr>
               <a:t>공동 논문</a:t>
             </a:r>
@@ -6626,12 +6626,12 @@
               </a:spcAft>
             </a:pPr>
             <a:r>
-              <a:rPr sz="1000" b="0">
+              <a:rPr sz="1150" b="0">
                 <a:solidFill>
                   <a:srgbClr val="262626"/>
                 </a:solidFill>
-                <a:latin typeface="Apple SD Gothic Neo"/>
-                <a:ea typeface="Apple SD Gothic Neo"/>
+                <a:latin typeface="NanumSquare"/>
+                <a:ea typeface="NanumSquare"/>
               </a:rPr>
               <a:t>"사전학습 시계열 모델은 언제 가치를 더하는가" — 기여 5건 실측 완료 + 적응학습 장(章) 추가. 한은 WP 선행 후 국제 학술지(IJF) 투고 구도</a:t>
             </a:r>
@@ -6710,12 +6710,12 @@
               </a:spcAft>
             </a:pPr>
             <a:r>
-              <a:rPr sz="1200" b="1">
+              <a:rPr sz="1380" b="1">
                 <a:solidFill>
                   <a:srgbClr val="243447"/>
                 </a:solidFill>
-                <a:latin typeface="Apple SD Gothic Neo"/>
-                <a:ea typeface="Apple SD Gothic Neo"/>
+                <a:latin typeface="NanumSquare"/>
+                <a:ea typeface="NanumSquare"/>
               </a:rPr>
               <a:t>다음 결정</a:t>
             </a:r>
@@ -6750,12 +6750,12 @@
               </a:spcAft>
             </a:pPr>
             <a:r>
-              <a:rPr sz="1000" b="0">
+              <a:rPr sz="1150" b="0">
                 <a:solidFill>
                   <a:srgbClr val="262626"/>
                 </a:solidFill>
-                <a:latin typeface="Apple SD Gothic Neo"/>
-                <a:ea typeface="Apple SD Gothic Neo"/>
+                <a:latin typeface="NanumSquare"/>
+                <a:ea typeface="NanumSquare"/>
               </a:rPr>
               <a:t>① 적응학습 역할 분담 확정(당사: Chronos-2 트랙·적응 안정화) ② 논문 집필 착수 ③ 운영 권고안의 병행 산출 개시 여부</a:t>
             </a:r>
@@ -6790,12 +6790,12 @@
               </a:spcAft>
             </a:pPr>
             <a:r>
-              <a:rPr sz="1100" b="1">
+              <a:rPr sz="1260" b="1">
                 <a:solidFill>
                   <a:srgbClr val="243447"/>
                 </a:solidFill>
-                <a:latin typeface="Apple SD Gothic Neo"/>
-                <a:ea typeface="Apple SD Gothic Neo"/>
+                <a:latin typeface="NanumSquare"/>
+                <a:ea typeface="NanumSquare"/>
               </a:rPr>
               <a:t>FDE로서의 3개월 — 출발점이었던 BISTRO 해석 질의에 원본 실측과 적응 개선으로 답했습니다. 코드 개정에는 당일 재검증으로, 진단에는 원인 규명으로, 제안에는 첫 실증으로 대응했습니다.</a:t>
             </a:r>
@@ -6830,12 +6830,12 @@
               </a:spcAft>
             </a:pPr>
             <a:r>
-              <a:rPr sz="800" b="0">
+              <a:rPr sz="919" b="0">
                 <a:solidFill>
                   <a:srgbClr val="6B6B6B"/>
                 </a:solidFill>
-                <a:latin typeface="Apple SD Gothic Neo"/>
-                <a:ea typeface="Apple SD Gothic Neo"/>
+                <a:latin typeface="NanumSquare"/>
+                <a:ea typeface="NanumSquare"/>
               </a:rPr>
               <a:t>주: 공통 규약: 한은 실시간 빈티지 · 속보치 기준 · 전망주차 w[-19,-1] 평균 RMSE · 2018Q1~2025Q4(32개 분기). 낮을수록 정확.</a:t>
             </a:r>
@@ -6870,12 +6870,12 @@
               </a:spcAft>
             </a:pPr>
             <a:r>
-              <a:rPr sz="900" b="0">
+              <a:rPr sz="1030" b="0">
                 <a:solidFill>
                   <a:srgbClr val="6B6B6B"/>
                 </a:solidFill>
-                <a:latin typeface="Apple SD Gothic Neo"/>
-                <a:ea typeface="Apple SD Gothic Neo"/>
+                <a:latin typeface="NanumSquare"/>
+                <a:ea typeface="NanumSquare"/>
               </a:rPr>
               <a:t>11</a:t>
             </a:r>
@@ -6928,12 +6928,12 @@
               </a:spcAft>
             </a:pPr>
             <a:r>
-              <a:rPr sz="1050" b="1">
+              <a:rPr sz="1210" b="1">
                 <a:solidFill>
                   <a:srgbClr val="6B6B6B"/>
                 </a:solidFill>
-                <a:latin typeface="Apple SD Gothic Neo"/>
-                <a:ea typeface="Apple SD Gothic Neo"/>
+                <a:latin typeface="NanumSquare"/>
+                <a:ea typeface="NanumSquare"/>
               </a:rPr>
               <a:t>1  |  과제와 여정</a:t>
             </a:r>
@@ -6968,12 +6968,12 @@
               </a:spcAft>
             </a:pPr>
             <a:r>
-              <a:rPr sz="1700" b="1">
+              <a:rPr sz="1950" b="1">
                 <a:solidFill>
                   <a:srgbClr val="243447"/>
                 </a:solidFill>
-                <a:latin typeface="Apple SD Gothic Neo"/>
-                <a:ea typeface="Apple SD Gothic Neo"/>
+                <a:latin typeface="NanumSquare"/>
+                <a:ea typeface="NanumSquare"/>
               </a:rPr>
               <a:t>요약 — 정확도 경쟁에서 출발해, 평가 기준을 함께 다시 세우는 데까지 왔습니다</a:t>
             </a:r>
@@ -7087,12 +7087,12 @@
               </a:spcAft>
             </a:pPr>
             <a:r>
-              <a:rPr sz="1150" b="1">
+              <a:rPr sz="1320" b="1">
                 <a:solidFill>
                   <a:srgbClr val="6B6B6B"/>
                 </a:solidFill>
-                <a:latin typeface="Apple SD Gothic Neo"/>
-                <a:ea typeface="Apple SD Gothic Neo"/>
+                <a:latin typeface="NanumSquare"/>
+                <a:ea typeface="NanumSquare"/>
               </a:rPr>
               <a:t>~5월 (전사)</a:t>
             </a:r>
@@ -7127,12 +7127,12 @@
               </a:spcAft>
             </a:pPr>
             <a:r>
-              <a:rPr sz="1150" b="1">
+              <a:rPr sz="1320" b="1">
                 <a:solidFill>
                   <a:srgbClr val="243447"/>
                 </a:solidFill>
-                <a:latin typeface="Apple SD Gothic Neo"/>
-                <a:ea typeface="Apple SD Gothic Neo"/>
+                <a:latin typeface="NanumSquare"/>
+                <a:ea typeface="NanumSquare"/>
               </a:rPr>
               <a:t>CPI 연구</a:t>
             </a:r>
@@ -7167,12 +7167,12 @@
               </a:spcAft>
             </a:pPr>
             <a:r>
-              <a:rPr sz="1000" b="0">
+              <a:rPr sz="1150" b="0">
                 <a:solidFill>
                   <a:srgbClr val="262626"/>
                 </a:solidFill>
-                <a:latin typeface="Apple SD Gothic Neo"/>
-                <a:ea typeface="Apple SD Gothic Neo"/>
+                <a:latin typeface="NanumSquare"/>
+                <a:ea typeface="NanumSquare"/>
               </a:rPr>
               <a:t>물가(CPI) 예측으로 시작 — 소형 특화 모델·FM·언어모델(HCX·Claude) 3계열 비교 체계 구축. 6월 한은 요청으로 대상을 GDP 성장률로 전환 (검증 하네스는 계승)</a:t>
             </a:r>
@@ -7251,12 +7251,12 @@
               </a:spcAft>
             </a:pPr>
             <a:r>
-              <a:rPr sz="1150" b="1">
+              <a:rPr sz="1320" b="1">
                 <a:solidFill>
                   <a:srgbClr val="1C5CAB"/>
                 </a:solidFill>
-                <a:latin typeface="Apple SD Gothic Neo"/>
-                <a:ea typeface="Apple SD Gothic Neo"/>
+                <a:latin typeface="NanumSquare"/>
+                <a:ea typeface="NanumSquare"/>
               </a:rPr>
               <a:t>6월</a:t>
             </a:r>
@@ -7291,12 +7291,12 @@
               </a:spcAft>
             </a:pPr>
             <a:r>
-              <a:rPr sz="1150" b="1">
+              <a:rPr sz="1320" b="1">
                 <a:solidFill>
                   <a:srgbClr val="243447"/>
                 </a:solidFill>
-                <a:latin typeface="Apple SD Gothic Neo"/>
-                <a:ea typeface="Apple SD Gothic Neo"/>
+                <a:latin typeface="NanumSquare"/>
+                <a:ea typeface="NanumSquare"/>
               </a:rPr>
               <a:t>착수·재현</a:t>
             </a:r>
@@ -7331,12 +7331,12 @@
               </a:spcAft>
             </a:pPr>
             <a:r>
-              <a:rPr sz="1000" b="0">
+              <a:rPr sz="1150" b="0">
                 <a:solidFill>
                   <a:srgbClr val="262626"/>
                 </a:solidFill>
-                <a:latin typeface="Apple SD Gothic Neo"/>
-                <a:ea typeface="Apple SD Gothic Neo"/>
+                <a:latin typeface="NanumSquare"/>
+                <a:ea typeface="NanumSquare"/>
               </a:rPr>
               <a:t>한은 측의 시계열 파운데이션 모델(BISTRO, BIS WP 1337) 해석 질의에서 출발. FDE Consulting &amp; Planning팀(김지혜·김민승)과 초기 방향성을 함께 수립하고, 현행 시스템(DFM+XGBoost)을 실시간 빈티지로 재현</a:t>
             </a:r>
@@ -7415,12 +7415,12 @@
               </a:spcAft>
             </a:pPr>
             <a:r>
-              <a:rPr sz="1150" b="1">
+              <a:rPr sz="1320" b="1">
                 <a:solidFill>
                   <a:srgbClr val="B0532F"/>
                 </a:solidFill>
-                <a:latin typeface="Apple SD Gothic Neo"/>
-                <a:ea typeface="Apple SD Gothic Neo"/>
+                <a:latin typeface="NanumSquare"/>
+                <a:ea typeface="NanumSquare"/>
               </a:rPr>
               <a:t>7월 초</a:t>
             </a:r>
@@ -7455,12 +7455,12 @@
               </a:spcAft>
             </a:pPr>
             <a:r>
-              <a:rPr sz="1150" b="1">
+              <a:rPr sz="1320" b="1">
                 <a:solidFill>
                   <a:srgbClr val="243447"/>
                 </a:solidFill>
-                <a:latin typeface="Apple SD Gothic Neo"/>
-                <a:ea typeface="Apple SD Gothic Neo"/>
+                <a:latin typeface="NanumSquare"/>
+                <a:ea typeface="NanumSquare"/>
               </a:rPr>
               <a:t>국면전환 연구</a:t>
             </a:r>
@@ -7495,12 +7495,12 @@
               </a:spcAft>
             </a:pPr>
             <a:r>
-              <a:rPr sz="1000" b="0">
+              <a:rPr sz="1150" b="0">
                 <a:solidFill>
                   <a:srgbClr val="262626"/>
                 </a:solidFill>
-                <a:latin typeface="Apple SD Gothic Neo"/>
-                <a:ea typeface="Apple SD Gothic Neo"/>
+                <a:latin typeface="NanumSquare"/>
+                <a:ea typeface="NanumSquare"/>
               </a:rPr>
               <a:t>국면별 모델 교대(v1→v3)로 최고 성능 도달 — 그러나 방법론 수용성 문제로 채택 보류</a:t>
             </a:r>
@@ -7579,12 +7579,12 @@
               </a:spcAft>
             </a:pPr>
             <a:r>
-              <a:rPr sz="1150" b="1">
+              <a:rPr sz="1320" b="1">
                 <a:solidFill>
                   <a:srgbClr val="243447"/>
                 </a:solidFill>
-                <a:latin typeface="Apple SD Gothic Neo"/>
-                <a:ea typeface="Apple SD Gothic Neo"/>
+                <a:latin typeface="NanumSquare"/>
+                <a:ea typeface="NanumSquare"/>
               </a:rPr>
               <a:t>7월 말</a:t>
             </a:r>
@@ -7619,12 +7619,12 @@
               </a:spcAft>
             </a:pPr>
             <a:r>
-              <a:rPr sz="1150" b="1">
+              <a:rPr sz="1320" b="1">
                 <a:solidFill>
                   <a:srgbClr val="243447"/>
                 </a:solidFill>
-                <a:latin typeface="Apple SD Gothic Neo"/>
-                <a:ea typeface="Apple SD Gothic Neo"/>
+                <a:latin typeface="NanumSquare"/>
+                <a:ea typeface="NanumSquare"/>
               </a:rPr>
               <a:t>축 전환</a:t>
             </a:r>
@@ -7659,12 +7659,12 @@
               </a:spcAft>
             </a:pPr>
             <a:r>
-              <a:rPr sz="1000" b="0">
+              <a:rPr sz="1150" b="0">
                 <a:solidFill>
                   <a:srgbClr val="262626"/>
                 </a:solidFill>
-                <a:latin typeface="Apple SD Gothic Neo"/>
-                <a:ea typeface="Apple SD Gothic Neo"/>
+                <a:latin typeface="NanumSquare"/>
+                <a:ea typeface="NanumSquare"/>
               </a:rPr>
               <a:t>"32개 분기에선 누구도 우승을 증명 못 한다"(검정력 분석) → 조건부 가치·분포로 성과 재정의</a:t>
             </a:r>
@@ -7743,12 +7743,12 @@
               </a:spcAft>
             </a:pPr>
             <a:r>
-              <a:rPr sz="1150" b="1">
+              <a:rPr sz="1320" b="1">
                 <a:solidFill>
                   <a:srgbClr val="6B6B6B"/>
                 </a:solidFill>
-                <a:latin typeface="Apple SD Gothic Neo"/>
-                <a:ea typeface="Apple SD Gothic Neo"/>
+                <a:latin typeface="NanumSquare"/>
+                <a:ea typeface="NanumSquare"/>
               </a:rPr>
               <a:t>8월 초</a:t>
             </a:r>
@@ -7783,12 +7783,12 @@
               </a:spcAft>
             </a:pPr>
             <a:r>
-              <a:rPr sz="1150" b="1">
+              <a:rPr sz="1320" b="1">
                 <a:solidFill>
                   <a:srgbClr val="243447"/>
                 </a:solidFill>
-                <a:latin typeface="Apple SD Gothic Neo"/>
-                <a:ea typeface="Apple SD Gothic Neo"/>
+                <a:latin typeface="NanumSquare"/>
+                <a:ea typeface="NanumSquare"/>
               </a:rPr>
               <a:t>기준선 격변</a:t>
             </a:r>
@@ -7823,12 +7823,12 @@
               </a:spcAft>
             </a:pPr>
             <a:r>
-              <a:rPr sz="1000" b="0">
+              <a:rPr sz="1150" b="0">
                 <a:solidFill>
                   <a:srgbClr val="262626"/>
                 </a:solidFill>
-                <a:latin typeface="Apple SD Gothic Neo"/>
-                <a:ea typeface="Apple SD Gothic Neo"/>
+                <a:latin typeface="NanumSquare"/>
+                <a:ea typeface="NanumSquare"/>
               </a:rPr>
               <a:t>한은이 자체 코드의 단위 결함을 개정 — 전 실험 즉시 재검증, XGBoost 단독이 새 기준선</a:t>
             </a:r>
@@ -7907,12 +7907,12 @@
               </a:spcAft>
             </a:pPr>
             <a:r>
-              <a:rPr sz="1150" b="1">
+              <a:rPr sz="1320" b="1">
                 <a:solidFill>
                   <a:srgbClr val="008A3E"/>
                 </a:solidFill>
-                <a:latin typeface="Apple SD Gothic Neo"/>
-                <a:ea typeface="Apple SD Gothic Neo"/>
+                <a:latin typeface="NanumSquare"/>
+                <a:ea typeface="NanumSquare"/>
               </a:rPr>
               <a:t>8월 말</a:t>
             </a:r>
@@ -7947,12 +7947,12 @@
               </a:spcAft>
             </a:pPr>
             <a:r>
-              <a:rPr sz="1150" b="1">
+              <a:rPr sz="1320" b="1">
                 <a:solidFill>
                   <a:srgbClr val="243447"/>
                 </a:solidFill>
-                <a:latin typeface="Apple SD Gothic Neo"/>
-                <a:ea typeface="Apple SD Gothic Neo"/>
+                <a:latin typeface="NanumSquare"/>
+                <a:ea typeface="NanumSquare"/>
               </a:rPr>
               <a:t>적응학습 실증</a:t>
             </a:r>
@@ -7987,12 +7987,12 @@
               </a:spcAft>
             </a:pPr>
             <a:r>
-              <a:rPr sz="1000" b="0">
+              <a:rPr sz="1150" b="0">
                 <a:solidFill>
                   <a:srgbClr val="262626"/>
                 </a:solidFill>
-                <a:latin typeface="Apple SD Gothic Neo"/>
-                <a:ea typeface="Apple SD Gothic Neo"/>
+                <a:latin typeface="NanumSquare"/>
+                <a:ea typeface="NanumSquare"/>
               </a:rPr>
               <a:t>한은 제안(적응학습)을 당사가 첫 실증 — LoRA + 임계 규칙으로 32분기 신기록(0.733)</a:t>
             </a:r>
@@ -8027,12 +8027,12 @@
               </a:spcAft>
             </a:pPr>
             <a:r>
-              <a:rPr sz="800" b="0">
+              <a:rPr sz="919" b="0">
                 <a:solidFill>
                   <a:srgbClr val="6B6B6B"/>
                 </a:solidFill>
-                <a:latin typeface="Apple SD Gothic Neo"/>
-                <a:ea typeface="Apple SD Gothic Neo"/>
+                <a:latin typeface="NanumSquare"/>
+                <a:ea typeface="NanumSquare"/>
               </a:rPr>
               <a:t>주: 공통 규약: 한은 실시간 빈티지 · 속보치 기준 · 전망주차 w[-19,-1] 평균 RMSE · 2018Q1~2025Q4(32개 분기). 낮을수록 정확.</a:t>
             </a:r>
@@ -8067,12 +8067,12 @@
               </a:spcAft>
             </a:pPr>
             <a:r>
-              <a:rPr sz="900" b="0">
+              <a:rPr sz="1030" b="0">
                 <a:solidFill>
                   <a:srgbClr val="6B6B6B"/>
                 </a:solidFill>
-                <a:latin typeface="Apple SD Gothic Neo"/>
-                <a:ea typeface="Apple SD Gothic Neo"/>
+                <a:latin typeface="NanumSquare"/>
+                <a:ea typeface="NanumSquare"/>
               </a:rPr>
               <a:t>2</a:t>
             </a:r>
@@ -8125,12 +8125,12 @@
               </a:spcAft>
             </a:pPr>
             <a:r>
-              <a:rPr sz="1050" b="1">
+              <a:rPr sz="1210" b="1">
                 <a:solidFill>
                   <a:srgbClr val="6B6B6B"/>
                 </a:solidFill>
-                <a:latin typeface="Apple SD Gothic Neo"/>
-                <a:ea typeface="Apple SD Gothic Neo"/>
+                <a:latin typeface="NanumSquare"/>
+                <a:ea typeface="NanumSquare"/>
               </a:rPr>
               <a:t>2  |  검증 체계</a:t>
             </a:r>
@@ -8165,12 +8165,12 @@
               </a:spcAft>
             </a:pPr>
             <a:r>
-              <a:rPr sz="1700" b="1">
+              <a:rPr sz="1950" b="1">
                 <a:solidFill>
                   <a:srgbClr val="243447"/>
                 </a:solidFill>
-                <a:latin typeface="Apple SD Gothic Neo"/>
-                <a:ea typeface="Apple SD Gothic Neo"/>
+                <a:latin typeface="NanumSquare"/>
+                <a:ea typeface="NanumSquare"/>
               </a:rPr>
               <a:t>모든 주장의 바닥에 하나의 채점 규약 — 실시간 재현, 예외 없음</a:t>
             </a:r>
@@ -8240,12 +8240,12 @@
               </a:spcAft>
             </a:pPr>
             <a:r>
-              <a:rPr sz="1250" b="1">
+              <a:rPr sz="1440" b="1">
                 <a:solidFill>
                   <a:srgbClr val="243447"/>
                 </a:solidFill>
-                <a:latin typeface="Apple SD Gothic Neo"/>
-                <a:ea typeface="Apple SD Gothic Neo"/>
+                <a:latin typeface="NanumSquare"/>
+                <a:ea typeface="NanumSquare"/>
               </a:rPr>
               <a:t>설계 원칙</a:t>
             </a:r>
@@ -8257,12 +8257,12 @@
               </a:spcAft>
             </a:pPr>
             <a:r>
-              <a:rPr sz="1050" b="0">
+              <a:rPr sz="1210" b="0">
                 <a:solidFill>
                   <a:srgbClr val="262626"/>
                 </a:solidFill>
-                <a:latin typeface="Apple SD Gothic Neo"/>
-                <a:ea typeface="Apple SD Gothic Neo"/>
+                <a:latin typeface="NanumSquare"/>
+                <a:ea typeface="NanumSquare"/>
               </a:rPr>
               <a:t>· 실시간 빈티지: 각 예측 시점에 '그때 존재했던' 데이터만 사용</a:t>
             </a:r>
@@ -8274,12 +8274,12 @@
               </a:spcAft>
             </a:pPr>
             <a:r>
-              <a:rPr sz="950" b="0">
+              <a:rPr sz="1090" b="0">
                 <a:solidFill>
                   <a:srgbClr val="6B6B6B"/>
                 </a:solidFill>
-                <a:latin typeface="Apple SD Gothic Neo"/>
-                <a:ea typeface="Apple SD Gothic Neo"/>
+                <a:latin typeface="NanumSquare"/>
+                <a:ea typeface="NanumSquare"/>
               </a:rPr>
               <a:t>  — look-ahead 원천 차단, 개정 이력 보존</a:t>
             </a:r>
@@ -8291,12 +8291,12 @@
               </a:spcAft>
             </a:pPr>
             <a:r>
-              <a:rPr sz="1050" b="0">
+              <a:rPr sz="1210" b="0">
                 <a:solidFill>
                   <a:srgbClr val="262626"/>
                 </a:solidFill>
-                <a:latin typeface="Apple SD Gothic Neo"/>
-                <a:ea typeface="Apple SD Gothic Neo"/>
+                <a:latin typeface="NanumSquare"/>
+                <a:ea typeface="NanumSquare"/>
               </a:rPr>
               <a:t>· 정답 = 속보치, 분기당 19회 주간 갱신 예측 (총 608발)</a:t>
             </a:r>
@@ -8308,12 +8308,12 @@
               </a:spcAft>
             </a:pPr>
             <a:r>
-              <a:rPr sz="1050" b="0">
+              <a:rPr sz="1210" b="0">
                 <a:solidFill>
                   <a:srgbClr val="262626"/>
                 </a:solidFill>
-                <a:latin typeface="Apple SD Gothic Neo"/>
-                <a:ea typeface="Apple SD Gothic Neo"/>
+                <a:latin typeface="NanumSquare"/>
+                <a:ea typeface="NanumSquare"/>
               </a:rPr>
               <a:t>· 2018Q1~2025Q4, 코로나 급변기 포함 전 구간</a:t>
             </a:r>
@@ -8325,12 +8325,12 @@
               </a:spcAft>
             </a:pPr>
             <a:r>
-              <a:rPr sz="600" b="0">
+              <a:rPr sz="690" b="0">
                 <a:solidFill>
                   <a:srgbClr val="262626"/>
                 </a:solidFill>
-                <a:latin typeface="Apple SD Gothic Neo"/>
-                <a:ea typeface="Apple SD Gothic Neo"/>
+                <a:latin typeface="NanumSquare"/>
+                <a:ea typeface="NanumSquare"/>
               </a:rPr>
               <a:t/>
             </a:r>
@@ -8342,12 +8342,12 @@
               </a:spcAft>
             </a:pPr>
             <a:r>
-              <a:rPr sz="1250" b="1">
+              <a:rPr sz="1440" b="1">
                 <a:solidFill>
                   <a:srgbClr val="243447"/>
                 </a:solidFill>
-                <a:latin typeface="Apple SD Gothic Neo"/>
-                <a:ea typeface="Apple SD Gothic Neo"/>
+                <a:latin typeface="NanumSquare"/>
+                <a:ea typeface="NanumSquare"/>
               </a:rPr>
               <a:t>통계적 안전장치</a:t>
             </a:r>
@@ -8359,12 +8359,12 @@
               </a:spcAft>
             </a:pPr>
             <a:r>
-              <a:rPr sz="1050" b="0">
+              <a:rPr sz="1210" b="0">
                 <a:solidFill>
                   <a:srgbClr val="262626"/>
                 </a:solidFill>
-                <a:latin typeface="Apple SD Gothic Neo"/>
-                <a:ea typeface="Apple SD Gothic Neo"/>
+                <a:latin typeface="NanumSquare"/>
+                <a:ea typeface="NanumSquare"/>
               </a:rPr>
               <a:t>· 검정: Diebold-Mariano(HAC), Model Confidence Set</a:t>
             </a:r>
@@ -8376,12 +8376,12 @@
               </a:spcAft>
             </a:pPr>
             <a:r>
-              <a:rPr sz="1050" b="0">
+              <a:rPr sz="1210" b="0">
                 <a:solidFill>
                   <a:srgbClr val="262626"/>
                 </a:solidFill>
-                <a:latin typeface="Apple SD Gothic Neo"/>
-                <a:ea typeface="Apple SD Gothic Neo"/>
+                <a:latin typeface="NanumSquare"/>
+                <a:ea typeface="NanumSquare"/>
               </a:rPr>
               <a:t>· 검정력 분석: 이 표본에선 6% 개선도 p≈0.09 — 사전 확인</a:t>
             </a:r>
@@ -8393,12 +8393,12 @@
               </a:spcAft>
             </a:pPr>
             <a:r>
-              <a:rPr sz="1050" b="0">
+              <a:rPr sz="1210" b="0">
                 <a:solidFill>
                   <a:srgbClr val="262626"/>
                 </a:solidFill>
-                <a:latin typeface="Apple SD Gothic Neo"/>
-                <a:ea typeface="Apple SD Gothic Neo"/>
+                <a:latin typeface="NanumSquare"/>
+                <a:ea typeface="NanumSquare"/>
               </a:rPr>
               <a:t>· 사전 등록: 임계값·설정을 실험 전 문서로 고정</a:t>
             </a:r>
@@ -8410,12 +8410,12 @@
               </a:spcAft>
             </a:pPr>
             <a:r>
-              <a:rPr sz="1050" b="0">
+              <a:rPr sz="1210" b="0">
                 <a:solidFill>
                   <a:srgbClr val="262626"/>
                 </a:solidFill>
-                <a:latin typeface="Apple SD Gothic Neo"/>
-                <a:ea typeface="Apple SD Gothic Neo"/>
+                <a:latin typeface="NanumSquare"/>
+                <a:ea typeface="NanumSquare"/>
               </a:rPr>
               <a:t>· seed 3회 반복 · 선택편의 명시 · 경계 민감도 검사</a:t>
             </a:r>
@@ -8427,12 +8427,12 @@
               </a:spcAft>
             </a:pPr>
             <a:r>
-              <a:rPr sz="1050" b="0">
+              <a:rPr sz="1210" b="0">
                 <a:solidFill>
                   <a:srgbClr val="262626"/>
                 </a:solidFill>
-                <a:latin typeface="Apple SD Gothic Neo"/>
-                <a:ea typeface="Apple SD Gothic Neo"/>
+                <a:latin typeface="NanumSquare"/>
+                <a:ea typeface="NanumSquare"/>
               </a:rPr>
               <a:t>· 단일 실행/단일 분기 수치는 판정에 사용하지 않음 (원칙)</a:t>
             </a:r>
@@ -8555,12 +8555,12 @@
               </a:spcAft>
             </a:pPr>
             <a:r>
-              <a:rPr sz="1200" b="1">
+              <a:rPr sz="1380" b="1">
                 <a:solidFill>
                   <a:srgbClr val="243447"/>
                 </a:solidFill>
-                <a:latin typeface="Apple SD Gothic Neo"/>
-                <a:ea typeface="Apple SD Gothic Neo"/>
+                <a:latin typeface="NanumSquare"/>
+                <a:ea typeface="NanumSquare"/>
               </a:rPr>
               <a:t>이 규약이 실전에서 일한 순간들</a:t>
             </a:r>
@@ -8572,12 +8572,12 @@
               </a:spcAft>
             </a:pPr>
             <a:r>
-              <a:rPr sz="400" b="0">
+              <a:rPr sz="459" b="0">
                 <a:solidFill>
                   <a:srgbClr val="262626"/>
                 </a:solidFill>
-                <a:latin typeface="Apple SD Gothic Neo"/>
-                <a:ea typeface="Apple SD Gothic Neo"/>
+                <a:latin typeface="NanumSquare"/>
+                <a:ea typeface="NanumSquare"/>
               </a:rPr>
               <a:t/>
             </a:r>
@@ -8589,12 +8589,12 @@
               </a:spcAft>
             </a:pPr>
             <a:r>
-              <a:rPr sz="1050" b="0">
+              <a:rPr sz="1210" b="0">
                 <a:solidFill>
                   <a:srgbClr val="262626"/>
                 </a:solidFill>
-                <a:latin typeface="Apple SD Gothic Neo"/>
-                <a:ea typeface="Apple SD Gothic Neo"/>
+                <a:latin typeface="NanumSquare"/>
+                <a:ea typeface="NanumSquare"/>
               </a:rPr>
               <a:t>· 한은 코드 개정(8월) 때: 규약이 이미 서 있어 당일로</a:t>
             </a:r>
@@ -8606,12 +8606,12 @@
               </a:spcAft>
             </a:pPr>
             <a:r>
-              <a:rPr sz="1050" b="0">
+              <a:rPr sz="1210" b="0">
                 <a:solidFill>
                   <a:srgbClr val="262626"/>
                 </a:solidFill>
-                <a:latin typeface="Apple SD Gothic Neo"/>
-                <a:ea typeface="Apple SD Gothic Neo"/>
+                <a:latin typeface="NanumSquare"/>
+                <a:ea typeface="NanumSquare"/>
               </a:rPr>
               <a:t>  40여 구성 전면 재채점 — 기준선 교체에 즉시 대응</a:t>
             </a:r>
@@ -8623,12 +8623,12 @@
               </a:spcAft>
             </a:pPr>
             <a:r>
-              <a:rPr sz="1050" b="0">
+              <a:rPr sz="1210" b="0">
                 <a:solidFill>
                   <a:srgbClr val="262626"/>
                 </a:solidFill>
-                <a:latin typeface="Apple SD Gothic Neo"/>
-                <a:ea typeface="Apple SD Gothic Neo"/>
+                <a:latin typeface="NanumSquare"/>
+                <a:ea typeface="NanumSquare"/>
               </a:rPr>
               <a:t>· seed 미전파 결함 2건을 반복 원칙이 적발 — 행운의</a:t>
             </a:r>
@@ -8640,12 +8640,12 @@
               </a:spcAft>
             </a:pPr>
             <a:r>
-              <a:rPr sz="1050" b="0">
+              <a:rPr sz="1210" b="0">
                 <a:solidFill>
                   <a:srgbClr val="262626"/>
                 </a:solidFill>
-                <a:latin typeface="Apple SD Gothic Neo"/>
-                <a:ea typeface="Apple SD Gothic Neo"/>
+                <a:latin typeface="NanumSquare"/>
+                <a:ea typeface="NanumSquare"/>
               </a:rPr>
               <a:t>  단일 실행이 '신기록'으로 보고될 뻔한 것을 차단</a:t>
             </a:r>
@@ -8657,12 +8657,12 @@
               </a:spcAft>
             </a:pPr>
             <a:r>
-              <a:rPr sz="1050" b="0">
+              <a:rPr sz="1210" b="0">
                 <a:solidFill>
                   <a:srgbClr val="262626"/>
                 </a:solidFill>
-                <a:latin typeface="Apple SD Gothic Neo"/>
-                <a:ea typeface="Apple SD Gothic Neo"/>
+                <a:latin typeface="NanumSquare"/>
+                <a:ea typeface="NanumSquare"/>
               </a:rPr>
               <a:t>· 한은의 자체 MCS 검정이 당사 검정력 분석과 동일</a:t>
             </a:r>
@@ -8674,12 +8674,12 @@
               </a:spcAft>
             </a:pPr>
             <a:r>
-              <a:rPr sz="1050" b="0">
+              <a:rPr sz="1210" b="0">
                 <a:solidFill>
                   <a:srgbClr val="262626"/>
                 </a:solidFill>
-                <a:latin typeface="Apple SD Gothic Neo"/>
-                <a:ea typeface="Apple SD Gothic Neo"/>
+                <a:latin typeface="NanumSquare"/>
+                <a:ea typeface="NanumSquare"/>
               </a:rPr>
               <a:t>  결론에 도달 — 양측이 같은 언어로 논의하게 됨</a:t>
             </a:r>
@@ -8714,12 +8714,12 @@
               </a:spcAft>
             </a:pPr>
             <a:r>
-              <a:rPr sz="800" b="0">
+              <a:rPr sz="919" b="0">
                 <a:solidFill>
                   <a:srgbClr val="6B6B6B"/>
                 </a:solidFill>
-                <a:latin typeface="Apple SD Gothic Neo"/>
-                <a:ea typeface="Apple SD Gothic Neo"/>
+                <a:latin typeface="NanumSquare"/>
+                <a:ea typeface="NanumSquare"/>
               </a:rPr>
               <a:t>주: 공통 규약: 한은 실시간 빈티지 · 속보치 기준 · 전망주차 w[-19,-1] 평균 RMSE · 2018Q1~2025Q4(32개 분기). 낮을수록 정확.</a:t>
             </a:r>
@@ -8754,12 +8754,12 @@
               </a:spcAft>
             </a:pPr>
             <a:r>
-              <a:rPr sz="900" b="0">
+              <a:rPr sz="1030" b="0">
                 <a:solidFill>
                   <a:srgbClr val="6B6B6B"/>
                 </a:solidFill>
-                <a:latin typeface="Apple SD Gothic Neo"/>
-                <a:ea typeface="Apple SD Gothic Neo"/>
+                <a:latin typeface="NanumSquare"/>
+                <a:ea typeface="NanumSquare"/>
               </a:rPr>
               <a:t>3</a:t>
             </a:r>
@@ -8812,12 +8812,12 @@
               </a:spcAft>
             </a:pPr>
             <a:r>
-              <a:rPr sz="1050" b="1">
+              <a:rPr sz="1210" b="1">
                 <a:solidFill>
                   <a:srgbClr val="6B6B6B"/>
                 </a:solidFill>
-                <a:latin typeface="Apple SD Gothic Neo"/>
-                <a:ea typeface="Apple SD Gothic Neo"/>
+                <a:latin typeface="NanumSquare"/>
+                <a:ea typeface="NanumSquare"/>
               </a:rPr>
               <a:t>3  |  1막 · 국면전환 연구</a:t>
             </a:r>
@@ -8852,12 +8852,12 @@
               </a:spcAft>
             </a:pPr>
             <a:r>
-              <a:rPr sz="1700" b="1">
+              <a:rPr sz="1950" b="1">
                 <a:solidFill>
                   <a:srgbClr val="243447"/>
                 </a:solidFill>
-                <a:latin typeface="Apple SD Gothic Neo"/>
-                <a:ea typeface="Apple SD Gothic Neo"/>
+                <a:latin typeface="NanumSquare"/>
+                <a:ea typeface="NanumSquare"/>
               </a:rPr>
               <a:t>성능은 최고였으나, 채택되지 않는 이유를 배웠습니다</a:t>
             </a:r>
@@ -8927,12 +8927,12 @@
               </a:spcAft>
             </a:pPr>
             <a:r>
-              <a:rPr sz="1250" b="1">
+              <a:rPr sz="1440" b="1">
                 <a:solidFill>
                   <a:srgbClr val="243447"/>
                 </a:solidFill>
-                <a:latin typeface="Apple SD Gothic Neo"/>
-                <a:ea typeface="Apple SD Gothic Neo"/>
+                <a:latin typeface="NanumSquare"/>
+                <a:ea typeface="NanumSquare"/>
               </a:rPr>
               <a:t>접근 — 국면전환(regime-switching) 계보</a:t>
             </a:r>
@@ -8944,12 +8944,12 @@
               </a:spcAft>
             </a:pPr>
             <a:r>
-              <a:rPr sz="1050" b="0">
+              <a:rPr sz="1210" b="0">
                 <a:solidFill>
                   <a:srgbClr val="262626"/>
                 </a:solidFill>
-                <a:latin typeface="Apple SD Gothic Neo"/>
-                <a:ea typeface="Apple SD Gothic Neo"/>
+                <a:latin typeface="NanumSquare"/>
+                <a:ea typeface="NanumSquare"/>
               </a:rPr>
               <a:t>경기 국면(급변·안정·반등)마다 최적 모형이 다르다는 가설로</a:t>
             </a:r>
@@ -8961,12 +8961,12 @@
               </a:spcAft>
             </a:pPr>
             <a:r>
-              <a:rPr sz="1050" b="0">
+              <a:rPr sz="1210" b="0">
                 <a:solidFill>
                   <a:srgbClr val="262626"/>
                 </a:solidFill>
-                <a:latin typeface="Apple SD Gothic Neo"/>
-                <a:ea typeface="Apple SD Gothic Neo"/>
+                <a:latin typeface="NanumSquare"/>
+                <a:ea typeface="NanumSquare"/>
               </a:rPr>
               <a:t>국면 감지 + 모델 교대 구조를 3차례 고도화 (v1→v3) —</a:t>
             </a:r>
@@ -8978,12 +8978,12 @@
               </a:spcAft>
             </a:pPr>
             <a:r>
-              <a:rPr sz="1050" b="0">
+              <a:rPr sz="1210" b="0">
                 <a:solidFill>
                   <a:srgbClr val="262626"/>
                 </a:solidFill>
-                <a:latin typeface="Apple SD Gothic Neo"/>
-                <a:ea typeface="Apple SD Gothic Neo"/>
+                <a:latin typeface="NanumSquare"/>
+                <a:ea typeface="NanumSquare"/>
               </a:rPr>
               <a:t>잠재 국면이 관측을 지배한다는 계량경제학의 고전적 발상.</a:t>
             </a:r>
@@ -8995,12 +8995,12 @@
               </a:spcAft>
             </a:pPr>
             <a:r>
-              <a:rPr sz="500" b="0">
+              <a:rPr sz="580" b="0">
                 <a:solidFill>
                   <a:srgbClr val="262626"/>
                 </a:solidFill>
-                <a:latin typeface="Apple SD Gothic Neo"/>
-                <a:ea typeface="Apple SD Gothic Neo"/>
+                <a:latin typeface="NanumSquare"/>
+                <a:ea typeface="NanumSquare"/>
               </a:rPr>
               <a:t/>
             </a:r>
@@ -9012,12 +9012,12 @@
               </a:spcAft>
             </a:pPr>
             <a:r>
-              <a:rPr sz="1250" b="1">
+              <a:rPr sz="1440" b="1">
                 <a:solidFill>
                   <a:srgbClr val="243447"/>
                 </a:solidFill>
-                <a:latin typeface="Apple SD Gothic Neo"/>
-                <a:ea typeface="Apple SD Gothic Neo"/>
+                <a:latin typeface="NanumSquare"/>
+                <a:ea typeface="NanumSquare"/>
               </a:rPr>
               <a:t>결과</a:t>
             </a:r>
@@ -9029,12 +9029,12 @@
               </a:spcAft>
             </a:pPr>
             <a:r>
-              <a:rPr sz="1050" b="0">
+              <a:rPr sz="1210" b="0">
                 <a:solidFill>
                   <a:srgbClr val="262626"/>
                 </a:solidFill>
-                <a:latin typeface="Apple SD Gothic Neo"/>
-                <a:ea typeface="Apple SD Gothic Neo"/>
+                <a:latin typeface="NanumSquare"/>
+                <a:ea typeface="NanumSquare"/>
               </a:rPr>
               <a:t>· v3 = 0.718 — 전체 여정 통틀어 최고 성능 (방향은 옳았음)</a:t>
             </a:r>
@@ -9046,12 +9046,12 @@
               </a:spcAft>
             </a:pPr>
             <a:r>
-              <a:rPr sz="1050" b="0">
+              <a:rPr sz="1210" b="0">
                 <a:solidFill>
                   <a:srgbClr val="262626"/>
                 </a:solidFill>
-                <a:latin typeface="Apple SD Gothic Neo"/>
-                <a:ea typeface="Apple SD Gothic Neo"/>
+                <a:latin typeface="NanumSquare"/>
+                <a:ea typeface="NanumSquare"/>
               </a:rPr>
               <a:t>· DM p=0.088 — 표본 한계로 유의성 문턱 미달</a:t>
             </a:r>
@@ -9063,12 +9063,12 @@
               </a:spcAft>
             </a:pPr>
             <a:r>
-              <a:rPr sz="500" b="0">
+              <a:rPr sz="580" b="0">
                 <a:solidFill>
                   <a:srgbClr val="262626"/>
                 </a:solidFill>
-                <a:latin typeface="Apple SD Gothic Neo"/>
-                <a:ea typeface="Apple SD Gothic Neo"/>
+                <a:latin typeface="NanumSquare"/>
+                <a:ea typeface="NanumSquare"/>
               </a:rPr>
               <a:t/>
             </a:r>
@@ -9080,12 +9080,12 @@
               </a:spcAft>
             </a:pPr>
             <a:r>
-              <a:rPr sz="1250" b="1">
+              <a:rPr sz="1440" b="1">
                 <a:solidFill>
                   <a:srgbClr val="B0532F"/>
                 </a:solidFill>
-                <a:latin typeface="Apple SD Gothic Neo"/>
-                <a:ea typeface="Apple SD Gothic Neo"/>
+                <a:latin typeface="NanumSquare"/>
+                <a:ea typeface="NanumSquare"/>
               </a:rPr>
               <a:t>채택 보류의 이유 (성능이 아니라 수용성)</a:t>
             </a:r>
@@ -9097,12 +9097,12 @@
               </a:spcAft>
             </a:pPr>
             <a:r>
-              <a:rPr sz="1050" b="0">
+              <a:rPr sz="1210" b="0">
                 <a:solidFill>
                   <a:srgbClr val="262626"/>
                 </a:solidFill>
-                <a:latin typeface="Apple SD Gothic Neo"/>
-                <a:ea typeface="Apple SD Gothic Neo"/>
+                <a:latin typeface="NanumSquare"/>
+                <a:ea typeface="NanumSquare"/>
               </a:rPr>
               <a:t>한은 실무 책임자: "현재 시점에 국면을 실시간으로 단정하는</a:t>
             </a:r>
@@ -9114,12 +9114,12 @@
               </a:spcAft>
             </a:pPr>
             <a:r>
-              <a:rPr sz="1050" b="0">
+              <a:rPr sz="1210" b="0">
                 <a:solidFill>
                   <a:srgbClr val="262626"/>
                 </a:solidFill>
-                <a:latin typeface="Apple SD Gothic Neo"/>
-                <a:ea typeface="Apple SD Gothic Neo"/>
+                <a:latin typeface="NanumSquare"/>
+                <a:ea typeface="NanumSquare"/>
               </a:rPr>
               <a:t>것이 맞는가" — 중앙은행 운영 요건(설명책임)과의 충돌.</a:t>
             </a:r>
@@ -9131,12 +9131,12 @@
               </a:spcAft>
             </a:pPr>
             <a:r>
-              <a:rPr sz="1050" b="0">
+              <a:rPr sz="1210" b="0">
                 <a:solidFill>
                   <a:srgbClr val="262626"/>
                 </a:solidFill>
-                <a:latin typeface="Apple SD Gothic Neo"/>
-                <a:ea typeface="Apple SD Gothic Neo"/>
+                <a:latin typeface="NanumSquare"/>
+                <a:ea typeface="NanumSquare"/>
               </a:rPr>
               <a:t>증명을 계속하는 대신 자산화(부품 재사용·논문화)로 전환.</a:t>
             </a:r>
@@ -9259,12 +9259,12 @@
               </a:spcAft>
             </a:pPr>
             <a:r>
-              <a:rPr sz="1200" b="1">
+              <a:rPr sz="1380" b="1">
                 <a:solidFill>
                   <a:srgbClr val="008A3E"/>
                 </a:solidFill>
-                <a:latin typeface="Apple SD Gothic Neo"/>
-                <a:ea typeface="Apple SD Gothic Neo"/>
+                <a:latin typeface="NanumSquare"/>
+                <a:ea typeface="NanumSquare"/>
               </a:rPr>
               <a:t>이 연구가 남긴 자산 (이후 전부 재사용됨)</a:t>
             </a:r>
@@ -9276,12 +9276,12 @@
               </a:spcAft>
             </a:pPr>
             <a:r>
-              <a:rPr sz="400" b="0">
+              <a:rPr sz="459" b="0">
                 <a:solidFill>
                   <a:srgbClr val="262626"/>
                 </a:solidFill>
-                <a:latin typeface="Apple SD Gothic Neo"/>
-                <a:ea typeface="Apple SD Gothic Neo"/>
+                <a:latin typeface="NanumSquare"/>
+                <a:ea typeface="NanumSquare"/>
               </a:rPr>
               <a:t/>
             </a:r>
@@ -9293,12 +9293,12 @@
               </a:spcAft>
             </a:pPr>
             <a:r>
-              <a:rPr sz="1050" b="0">
+              <a:rPr sz="1210" b="0">
                 <a:solidFill>
                   <a:srgbClr val="262626"/>
                 </a:solidFill>
-                <a:latin typeface="Apple SD Gothic Neo"/>
-                <a:ea typeface="Apple SD Gothic Neo"/>
+                <a:latin typeface="NanumSquare"/>
+                <a:ea typeface="NanumSquare"/>
               </a:rPr>
               <a:t>· "반등 국면에서 사전학습 모델이 강하다"는 발견</a:t>
             </a:r>
@@ -9310,12 +9310,12 @@
               </a:spcAft>
             </a:pPr>
             <a:r>
-              <a:rPr sz="1050" b="0">
+              <a:rPr sz="1210" b="0">
                 <a:solidFill>
                   <a:srgbClr val="262626"/>
                 </a:solidFill>
-                <a:latin typeface="Apple SD Gothic Neo"/>
-                <a:ea typeface="Apple SD Gothic Neo"/>
+                <a:latin typeface="NanumSquare"/>
+                <a:ea typeface="NanumSquare"/>
               </a:rPr>
               <a:t>  → 이후 FM 검증·조기 슬롯 설계의 출발점</a:t>
             </a:r>
@@ -9327,12 +9327,12 @@
               </a:spcAft>
             </a:pPr>
             <a:r>
-              <a:rPr sz="1050" b="0">
+              <a:rPr sz="1210" b="0">
                 <a:solidFill>
                   <a:srgbClr val="262626"/>
                 </a:solidFill>
-                <a:latin typeface="Apple SD Gothic Neo"/>
-                <a:ea typeface="Apple SD Gothic Neo"/>
+                <a:latin typeface="NanumSquare"/>
+                <a:ea typeface="NanumSquare"/>
               </a:rPr>
               <a:t>· 국면 신호(심리 저점 통과 등) → 설명 리포트 재료</a:t>
             </a:r>
@@ -9344,12 +9344,12 @@
               </a:spcAft>
             </a:pPr>
             <a:r>
-              <a:rPr sz="1050" b="0">
+              <a:rPr sz="1210" b="0">
                 <a:solidFill>
                   <a:srgbClr val="262626"/>
                 </a:solidFill>
-                <a:latin typeface="Apple SD Gothic Neo"/>
-                <a:ea typeface="Apple SD Gothic Neo"/>
+                <a:latin typeface="NanumSquare"/>
+                <a:ea typeface="NanumSquare"/>
               </a:rPr>
               <a:t>· '이산 국면 단정' 대신 '전망시계 조건화'라는</a:t>
             </a:r>
@@ -9361,12 +9361,12 @@
               </a:spcAft>
             </a:pPr>
             <a:r>
-              <a:rPr sz="1050" b="0">
+              <a:rPr sz="1210" b="0">
                 <a:solidFill>
                   <a:srgbClr val="262626"/>
                 </a:solidFill>
-                <a:latin typeface="Apple SD Gothic Neo"/>
-                <a:ea typeface="Apple SD Gothic Neo"/>
+                <a:latin typeface="NanumSquare"/>
+                <a:ea typeface="NanumSquare"/>
               </a:rPr>
               <a:t>  수용 가능한 프레임 발견 — 최종 구성의 뼈대</a:t>
             </a:r>
@@ -9378,12 +9378,12 @@
               </a:spcAft>
             </a:pPr>
             <a:r>
-              <a:rPr sz="400" b="0">
+              <a:rPr sz="459" b="0">
                 <a:solidFill>
                   <a:srgbClr val="262626"/>
                 </a:solidFill>
-                <a:latin typeface="Apple SD Gothic Neo"/>
-                <a:ea typeface="Apple SD Gothic Neo"/>
+                <a:latin typeface="NanumSquare"/>
+                <a:ea typeface="NanumSquare"/>
               </a:rPr>
               <a:t/>
             </a:r>
@@ -9395,12 +9395,12 @@
               </a:spcAft>
             </a:pPr>
             <a:r>
-              <a:rPr sz="1050" b="0">
+              <a:rPr sz="1210" b="0">
                 <a:solidFill>
                   <a:srgbClr val="262626"/>
                 </a:solidFill>
-                <a:latin typeface="Apple SD Gothic Neo"/>
-                <a:ea typeface="Apple SD Gothic Neo"/>
+                <a:latin typeface="NanumSquare"/>
+                <a:ea typeface="NanumSquare"/>
               </a:rPr>
               <a:t>잠재 국면을 명시적으로 감지하는 대신, 국면 정보가</a:t>
             </a:r>
@@ -9412,12 +9412,12 @@
               </a:spcAft>
             </a:pPr>
             <a:r>
-              <a:rPr sz="1050" b="0">
+              <a:rPr sz="1210" b="0">
                 <a:solidFill>
                   <a:srgbClr val="262626"/>
                 </a:solidFill>
-                <a:latin typeface="Apple SD Gothic Neo"/>
-                <a:ea typeface="Apple SD Gothic Neo"/>
+                <a:latin typeface="NanumSquare"/>
+                <a:ea typeface="NanumSquare"/>
               </a:rPr>
               <a:t>자연히 실리는 조건(전망 주차·일별 신호)으로 우회 —</a:t>
             </a:r>
@@ -9429,12 +9429,12 @@
               </a:spcAft>
             </a:pPr>
             <a:r>
-              <a:rPr sz="1050" b="1">
+              <a:rPr sz="1210" b="1">
                 <a:solidFill>
                   <a:srgbClr val="262626"/>
                 </a:solidFill>
-                <a:latin typeface="Apple SD Gothic Neo"/>
-                <a:ea typeface="Apple SD Gothic Neo"/>
+                <a:latin typeface="NanumSquare"/>
+                <a:ea typeface="NanumSquare"/>
               </a:rPr>
               <a:t>같은 직관의 운영 가능한 번역이었습니다.</a:t>
             </a:r>
@@ -9469,12 +9469,12 @@
               </a:spcAft>
             </a:pPr>
             <a:r>
-              <a:rPr sz="800" b="0">
+              <a:rPr sz="919" b="0">
                 <a:solidFill>
                   <a:srgbClr val="6B6B6B"/>
                 </a:solidFill>
-                <a:latin typeface="Apple SD Gothic Neo"/>
-                <a:ea typeface="Apple SD Gothic Neo"/>
+                <a:latin typeface="NanumSquare"/>
+                <a:ea typeface="NanumSquare"/>
               </a:rPr>
               <a:t>주: 공통 규약: 한은 실시간 빈티지 · 속보치 기준 · 전망주차 w[-19,-1] 평균 RMSE · 2018Q1~2025Q4(32개 분기). 낮을수록 정확. v3 상세: 반등 국면 감지 시 사전학습 모델 결합으로 교대하는 3-arm 구조.</a:t>
             </a:r>
@@ -9509,12 +9509,12 @@
               </a:spcAft>
             </a:pPr>
             <a:r>
-              <a:rPr sz="900" b="0">
+              <a:rPr sz="1030" b="0">
                 <a:solidFill>
                   <a:srgbClr val="6B6B6B"/>
                 </a:solidFill>
-                <a:latin typeface="Apple SD Gothic Neo"/>
-                <a:ea typeface="Apple SD Gothic Neo"/>
+                <a:latin typeface="NanumSquare"/>
+                <a:ea typeface="NanumSquare"/>
               </a:rPr>
               <a:t>4</a:t>
             </a:r>
@@ -9567,12 +9567,12 @@
               </a:spcAft>
             </a:pPr>
             <a:r>
-              <a:rPr sz="1050" b="1">
+              <a:rPr sz="1210" b="1">
                 <a:solidFill>
                   <a:srgbClr val="6B6B6B"/>
                 </a:solidFill>
-                <a:latin typeface="Apple SD Gothic Neo"/>
-                <a:ea typeface="Apple SD Gothic Neo"/>
+                <a:latin typeface="NanumSquare"/>
+                <a:ea typeface="NanumSquare"/>
               </a:rPr>
               <a:t>4  |  2막 · 통계적 벽</a:t>
             </a:r>
@@ -9607,12 +9607,12 @@
               </a:spcAft>
             </a:pPr>
             <a:r>
-              <a:rPr sz="1700" b="1">
+              <a:rPr sz="1950" b="1">
                 <a:solidFill>
                   <a:srgbClr val="243447"/>
                 </a:solidFill>
-                <a:latin typeface="Apple SD Gothic Neo"/>
-                <a:ea typeface="Apple SD Gothic Neo"/>
+                <a:latin typeface="NanumSquare"/>
+                <a:ea typeface="NanumSquare"/>
               </a:rPr>
               <a:t>"이 표본에서는 어떤 모형의 우위도 증명이 어렵다" — 그래서 평가의 축을 바꿨습니다</a:t>
             </a:r>
@@ -9682,12 +9682,12 @@
               </a:spcAft>
             </a:pPr>
             <a:r>
-              <a:rPr sz="1250" b="1">
+              <a:rPr sz="1440" b="1">
                 <a:solidFill>
                   <a:srgbClr val="243447"/>
                 </a:solidFill>
-                <a:latin typeface="Apple SD Gothic Neo"/>
-                <a:ea typeface="Apple SD Gothic Neo"/>
+                <a:latin typeface="NanumSquare"/>
+                <a:ea typeface="NanumSquare"/>
               </a:rPr>
               <a:t>검정력 분석이 말해준 것</a:t>
             </a:r>
@@ -9699,12 +9699,12 @@
               </a:spcAft>
             </a:pPr>
             <a:r>
-              <a:rPr sz="1050" b="0">
+              <a:rPr sz="1210" b="0">
                 <a:solidFill>
                   <a:srgbClr val="262626"/>
                 </a:solidFill>
-                <a:latin typeface="Apple SD Gothic Neo"/>
-                <a:ea typeface="Apple SD Gothic Neo"/>
+                <a:latin typeface="NanumSquare"/>
+                <a:ea typeface="NanumSquare"/>
               </a:rPr>
               <a:t>· GDP는 분기 지표 — 1년에 관측 4개, 8년을 다 모아도 32개.</a:t>
             </a:r>
@@ -9716,12 +9716,12 @@
               </a:spcAft>
             </a:pPr>
             <a:r>
-              <a:rPr sz="1050" b="0">
+              <a:rPr sz="1210" b="0">
                 <a:solidFill>
                   <a:srgbClr val="262626"/>
                 </a:solidFill>
-                <a:latin typeface="Apple SD Gothic Neo"/>
-                <a:ea typeface="Apple SD Gothic Neo"/>
+                <a:latin typeface="NanumSquare"/>
+                <a:ea typeface="NanumSquare"/>
               </a:rPr>
               <a:t>  저표본에서 패턴을 찾아야 하는 과제의 구조적 어려움</a:t>
             </a:r>
@@ -9733,12 +9733,12 @@
               </a:spcAft>
             </a:pPr>
             <a:r>
-              <a:rPr sz="1050" b="0">
+              <a:rPr sz="1210" b="0">
                 <a:solidFill>
                   <a:srgbClr val="262626"/>
                 </a:solidFill>
-                <a:latin typeface="Apple SD Gothic Neo"/>
-                <a:ea typeface="Apple SD Gothic Neo"/>
+                <a:latin typeface="NanumSquare"/>
+                <a:ea typeface="NanumSquare"/>
               </a:rPr>
               <a:t>· 주간 19발은 분기 내 강한 상관 —</a:t>
             </a:r>
@@ -9750,12 +9750,12 @@
               </a:spcAft>
             </a:pPr>
             <a:r>
-              <a:rPr sz="1050" b="0">
+              <a:rPr sz="1210" b="0">
                 <a:solidFill>
                   <a:srgbClr val="262626"/>
                 </a:solidFill>
-                <a:latin typeface="Apple SD Gothic Neo"/>
-                <a:ea typeface="Apple SD Gothic Neo"/>
+                <a:latin typeface="NanumSquare"/>
+                <a:ea typeface="NanumSquare"/>
               </a:rPr>
               <a:t>  유효 표본은 사실상 32</a:t>
             </a:r>
@@ -9767,12 +9767,12 @@
               </a:spcAft>
             </a:pPr>
             <a:r>
-              <a:rPr sz="1050" b="0">
+              <a:rPr sz="1210" b="0">
                 <a:solidFill>
                   <a:srgbClr val="262626"/>
                 </a:solidFill>
-                <a:latin typeface="Apple SD Gothic Neo"/>
-                <a:ea typeface="Apple SD Gothic Neo"/>
+                <a:latin typeface="NanumSquare"/>
+                <a:ea typeface="NanumSquare"/>
               </a:rPr>
               <a:t>· 이 표본에서 6.2% 개선도 DM p=0.088 — 5% 문턱을</a:t>
             </a:r>
@@ -9784,12 +9784,12 @@
               </a:spcAft>
             </a:pPr>
             <a:r>
-              <a:rPr sz="1050" b="0">
+              <a:rPr sz="1210" b="0">
                 <a:solidFill>
                   <a:srgbClr val="262626"/>
                 </a:solidFill>
-                <a:latin typeface="Apple SD Gothic Neo"/>
-                <a:ea typeface="Apple SD Gothic Neo"/>
+                <a:latin typeface="NanumSquare"/>
+                <a:ea typeface="NanumSquare"/>
               </a:rPr>
               <a:t>  넘으려면 표본이 수 배 필요</a:t>
             </a:r>
@@ -9801,12 +9801,12 @@
               </a:spcAft>
             </a:pPr>
             <a:r>
-              <a:rPr sz="1050" b="0">
+              <a:rPr sz="1210" b="0">
                 <a:solidFill>
                   <a:srgbClr val="262626"/>
                 </a:solidFill>
-                <a:latin typeface="Apple SD Gothic Neo"/>
-                <a:ea typeface="Apple SD Gothic Neo"/>
+                <a:latin typeface="NanumSquare"/>
+                <a:ea typeface="NanumSquare"/>
               </a:rPr>
               <a:t>· 한은의 자체 MCS: 비교 12개 모형 전원이 5% 신뢰집합에</a:t>
             </a:r>
@@ -9818,12 +9818,12 @@
               </a:spcAft>
             </a:pPr>
             <a:r>
-              <a:rPr sz="1050" b="0">
+              <a:rPr sz="1210" b="0">
                 <a:solidFill>
                   <a:srgbClr val="262626"/>
                 </a:solidFill>
-                <a:latin typeface="Apple SD Gothic Neo"/>
-                <a:ea typeface="Apple SD Gothic Neo"/>
+                <a:latin typeface="NanumSquare"/>
+                <a:ea typeface="NanumSquare"/>
               </a:rPr>
               <a:t>  잔류 — 독립적으로 같은 결론</a:t>
             </a:r>
@@ -9835,12 +9835,12 @@
               </a:spcAft>
             </a:pPr>
             <a:r>
-              <a:rPr sz="500" b="0">
+              <a:rPr sz="580" b="0">
                 <a:solidFill>
                   <a:srgbClr val="262626"/>
                 </a:solidFill>
-                <a:latin typeface="Apple SD Gothic Neo"/>
-                <a:ea typeface="Apple SD Gothic Neo"/>
+                <a:latin typeface="NanumSquare"/>
+                <a:ea typeface="NanumSquare"/>
               </a:rPr>
               <a:t/>
             </a:r>
@@ -9852,12 +9852,12 @@
               </a:spcAft>
             </a:pPr>
             <a:r>
-              <a:rPr sz="1200" b="1">
+              <a:rPr sz="1380" b="1">
                 <a:solidFill>
                   <a:srgbClr val="B0532F"/>
                 </a:solidFill>
-                <a:latin typeface="Apple SD Gothic Neo"/>
-                <a:ea typeface="Apple SD Gothic Neo"/>
+                <a:latin typeface="NanumSquare"/>
+                <a:ea typeface="NanumSquare"/>
               </a:rPr>
               <a:t>따라서 — 점 RMSE '순위 경쟁'은 판정 불가능한 게임</a:t>
             </a:r>
@@ -9892,12 +9892,12 @@
               </a:spcAft>
             </a:pPr>
             <a:r>
-              <a:rPr sz="1250" b="1">
+              <a:rPr sz="1440" b="1">
                 <a:solidFill>
                   <a:srgbClr val="243447"/>
                 </a:solidFill>
-                <a:latin typeface="Apple SD Gothic Neo"/>
-                <a:ea typeface="Apple SD Gothic Neo"/>
+                <a:latin typeface="NanumSquare"/>
+                <a:ea typeface="NanumSquare"/>
               </a:rPr>
               <a:t>성과 축의 재정의 (7월 말 결정)</a:t>
             </a:r>
@@ -9967,22 +9967,22 @@
               </a:spcAft>
             </a:pPr>
             <a:r>
-              <a:rPr sz="1100" b="1">
+              <a:rPr sz="1260" b="1">
                 <a:solidFill>
                   <a:srgbClr val="262626"/>
                 </a:solidFill>
-                <a:latin typeface="Apple SD Gothic Neo"/>
-                <a:ea typeface="Apple SD Gothic Neo"/>
+                <a:latin typeface="NanumSquare"/>
+                <a:ea typeface="NanumSquare"/>
               </a:rPr>
               <a:t>① 점추정 — </a:t>
             </a:r>
             <a:r>
-              <a:rPr sz="1050" b="0">
+              <a:rPr sz="1210" b="0">
                 <a:solidFill>
                   <a:srgbClr val="262626"/>
                 </a:solidFill>
-                <a:latin typeface="Apple SD Gothic Neo"/>
-                <a:ea typeface="Apple SD Gothic Neo"/>
+                <a:latin typeface="NanumSquare"/>
+                <a:ea typeface="NanumSquare"/>
               </a:rPr>
               <a:t>'비열등 + 개선 방향' 수위로만 주장</a:t>
             </a:r>
@@ -9994,22 +9994,22 @@
               </a:spcAft>
             </a:pPr>
             <a:r>
-              <a:rPr sz="1100" b="1">
+              <a:rPr sz="1260" b="1">
                 <a:solidFill>
                   <a:srgbClr val="262626"/>
                 </a:solidFill>
-                <a:latin typeface="Apple SD Gothic Neo"/>
-                <a:ea typeface="Apple SD Gothic Neo"/>
+                <a:latin typeface="NanumSquare"/>
+                <a:ea typeface="NanumSquare"/>
               </a:rPr>
               <a:t>② 조건부 가치 — </a:t>
             </a:r>
             <a:r>
-              <a:rPr sz="1050" b="0">
+              <a:rPr sz="1210" b="0">
                 <a:solidFill>
                   <a:srgbClr val="262626"/>
                 </a:solidFill>
-                <a:latin typeface="Apple SD Gothic Neo"/>
-                <a:ea typeface="Apple SD Gothic Neo"/>
+                <a:latin typeface="NanumSquare"/>
+                <a:ea typeface="NanumSquare"/>
               </a:rPr>
               <a:t>"언제 무엇이 기여하는가"는 유의성</a:t>
             </a:r>
@@ -10021,12 +10021,12 @@
               </a:spcAft>
             </a:pPr>
             <a:r>
-              <a:rPr sz="1050" b="0">
+              <a:rPr sz="1210" b="0">
                 <a:solidFill>
                   <a:srgbClr val="262626"/>
                 </a:solidFill>
-                <a:latin typeface="Apple SD Gothic Neo"/>
-                <a:ea typeface="Apple SD Gothic Neo"/>
+                <a:latin typeface="NanumSquare"/>
+                <a:ea typeface="NanumSquare"/>
               </a:rPr>
               <a:t>   없이도 성립하는 기술적(descriptive) 발견</a:t>
             </a:r>
@@ -10038,22 +10038,22 @@
               </a:spcAft>
             </a:pPr>
             <a:r>
-              <a:rPr sz="1100" b="1">
+              <a:rPr sz="1260" b="1">
                 <a:solidFill>
                   <a:srgbClr val="262626"/>
                 </a:solidFill>
-                <a:latin typeface="Apple SD Gothic Neo"/>
-                <a:ea typeface="Apple SD Gothic Neo"/>
+                <a:latin typeface="NanumSquare"/>
+                <a:ea typeface="NanumSquare"/>
               </a:rPr>
               <a:t>③ 분포 — </a:t>
             </a:r>
             <a:r>
-              <a:rPr sz="1050" b="0">
+              <a:rPr sz="1210" b="0">
                 <a:solidFill>
                   <a:srgbClr val="262626"/>
                 </a:solidFill>
-                <a:latin typeface="Apple SD Gothic Neo"/>
-                <a:ea typeface="Apple SD Gothic Neo"/>
+                <a:latin typeface="NanumSquare"/>
+                <a:ea typeface="NanumSquare"/>
               </a:rPr>
               <a:t>예측구간 커버리지는 즉시 검증 가능한 축</a:t>
             </a:r>
@@ -10065,12 +10065,12 @@
               </a:spcAft>
             </a:pPr>
             <a:r>
-              <a:rPr sz="1050" b="0">
+              <a:rPr sz="1210" b="0">
                 <a:solidFill>
                   <a:srgbClr val="262626"/>
                 </a:solidFill>
-                <a:latin typeface="Apple SD Gothic Neo"/>
-                <a:ea typeface="Apple SD Gothic Neo"/>
+                <a:latin typeface="NanumSquare"/>
+                <a:ea typeface="NanumSquare"/>
               </a:rPr>
               <a:t>   (컨포멀 보정으로 명목 80% → 실측 81~87% 달성)</a:t>
             </a:r>
@@ -10082,22 +10082,22 @@
               </a:spcAft>
             </a:pPr>
             <a:r>
-              <a:rPr sz="1100" b="1">
+              <a:rPr sz="1260" b="1">
                 <a:solidFill>
                   <a:srgbClr val="262626"/>
                 </a:solidFill>
-                <a:latin typeface="Apple SD Gothic Neo"/>
-                <a:ea typeface="Apple SD Gothic Neo"/>
+                <a:latin typeface="NanumSquare"/>
+                <a:ea typeface="NanumSquare"/>
               </a:rPr>
               <a:t>④ 방법론 — </a:t>
             </a:r>
             <a:r>
-              <a:rPr sz="1050" b="0">
+              <a:rPr sz="1210" b="0">
                 <a:solidFill>
                   <a:srgbClr val="262626"/>
                 </a:solidFill>
-                <a:latin typeface="Apple SD Gothic Neo"/>
-                <a:ea typeface="Apple SD Gothic Neo"/>
+                <a:latin typeface="NanumSquare"/>
+                <a:ea typeface="NanumSquare"/>
               </a:rPr>
               <a:t>검정력·선택편의·재현성 자체를 기여로</a:t>
             </a:r>
@@ -10109,12 +10109,12 @@
               </a:spcAft>
             </a:pPr>
             <a:r>
-              <a:rPr sz="500" b="0">
+              <a:rPr sz="580" b="0">
                 <a:solidFill>
                   <a:srgbClr val="262626"/>
                 </a:solidFill>
-                <a:latin typeface="Apple SD Gothic Neo"/>
-                <a:ea typeface="Apple SD Gothic Neo"/>
+                <a:latin typeface="NanumSquare"/>
+                <a:ea typeface="NanumSquare"/>
               </a:rPr>
               <a:t/>
             </a:r>
@@ -10126,12 +10126,12 @@
               </a:spcAft>
             </a:pPr>
             <a:r>
-              <a:rPr sz="1050" b="0">
+              <a:rPr sz="1210" b="0">
                 <a:solidFill>
                   <a:srgbClr val="262626"/>
                 </a:solidFill>
-                <a:latin typeface="Apple SD Gothic Neo"/>
-                <a:ea typeface="Apple SD Gothic Neo"/>
+                <a:latin typeface="NanumSquare"/>
+                <a:ea typeface="NanumSquare"/>
               </a:rPr>
               <a:t>이 재정의가 이후 모든 산출물의 문법이 됐고,</a:t>
             </a:r>
@@ -10143,12 +10143,12 @@
               </a:spcAft>
             </a:pPr>
             <a:r>
-              <a:rPr sz="1050" b="1">
+              <a:rPr sz="1210" b="1">
                 <a:solidFill>
                   <a:srgbClr val="262626"/>
                 </a:solidFill>
-                <a:latin typeface="Apple SD Gothic Neo"/>
-                <a:ea typeface="Apple SD Gothic Neo"/>
+                <a:latin typeface="NanumSquare"/>
+                <a:ea typeface="NanumSquare"/>
               </a:rPr>
               <a:t>공동 논문 프레임("언제 가치를 더하는가")의 원형입니다.</a:t>
             </a:r>
@@ -10183,12 +10183,12 @@
               </a:spcAft>
             </a:pPr>
             <a:r>
-              <a:rPr sz="800" b="0">
+              <a:rPr sz="919" b="0">
                 <a:solidFill>
                   <a:srgbClr val="6B6B6B"/>
                 </a:solidFill>
-                <a:latin typeface="Apple SD Gothic Neo"/>
-                <a:ea typeface="Apple SD Gothic Neo"/>
+                <a:latin typeface="NanumSquare"/>
+                <a:ea typeface="NanumSquare"/>
               </a:rPr>
               <a:t>주: 공통 규약: 한은 실시간 빈티지 · 속보치 기준 · 전망주차 w[-19,-1] 평균 RMSE · 2018Q1~2025Q4(32개 분기). 낮을수록 정확.</a:t>
             </a:r>
@@ -10223,12 +10223,12 @@
               </a:spcAft>
             </a:pPr>
             <a:r>
-              <a:rPr sz="900" b="0">
+              <a:rPr sz="1030" b="0">
                 <a:solidFill>
                   <a:srgbClr val="6B6B6B"/>
                 </a:solidFill>
-                <a:latin typeface="Apple SD Gothic Neo"/>
-                <a:ea typeface="Apple SD Gothic Neo"/>
+                <a:latin typeface="NanumSquare"/>
+                <a:ea typeface="NanumSquare"/>
               </a:rPr>
               <a:t>5</a:t>
             </a:r>
@@ -10281,12 +10281,12 @@
               </a:spcAft>
             </a:pPr>
             <a:r>
-              <a:rPr sz="1050" b="1">
+              <a:rPr sz="1210" b="1">
                 <a:solidFill>
                   <a:srgbClr val="6B6B6B"/>
                 </a:solidFill>
-                <a:latin typeface="Apple SD Gothic Neo"/>
-                <a:ea typeface="Apple SD Gothic Neo"/>
+                <a:latin typeface="NanumSquare"/>
+                <a:ea typeface="NanumSquare"/>
               </a:rPr>
               <a:t>5  |  3막 · 기준선 격변</a:t>
             </a:r>
@@ -10321,12 +10321,12 @@
               </a:spcAft>
             </a:pPr>
             <a:r>
-              <a:rPr sz="1700" b="1">
+              <a:rPr sz="1950" b="1">
                 <a:solidFill>
                   <a:srgbClr val="243447"/>
                 </a:solidFill>
-                <a:latin typeface="Apple SD Gothic Neo"/>
-                <a:ea typeface="Apple SD Gothic Neo"/>
+                <a:latin typeface="NanumSquare"/>
+                <a:ea typeface="NanumSquare"/>
               </a:rPr>
               <a:t>한은의 코드 개정에 당일 재검증으로 대응했습니다</a:t>
             </a:r>
@@ -10396,12 +10396,12 @@
               </a:spcAft>
             </a:pPr>
             <a:r>
-              <a:rPr sz="1250" b="1">
+              <a:rPr sz="1440" b="1">
                 <a:solidFill>
                   <a:srgbClr val="243447"/>
                 </a:solidFill>
-                <a:latin typeface="Apple SD Gothic Neo"/>
-                <a:ea typeface="Apple SD Gothic Neo"/>
+                <a:latin typeface="NanumSquare"/>
+                <a:ea typeface="NanumSquare"/>
               </a:rPr>
               <a:t>무슨 일이 있었나 (8월 초)</a:t>
             </a:r>
@@ -10413,12 +10413,12 @@
               </a:spcAft>
             </a:pPr>
             <a:r>
-              <a:rPr sz="1050" b="0">
+              <a:rPr sz="1210" b="0">
                 <a:solidFill>
                   <a:srgbClr val="262626"/>
                 </a:solidFill>
-                <a:latin typeface="Apple SD Gothic Neo"/>
-                <a:ea typeface="Apple SD Gothic Neo"/>
+                <a:latin typeface="NanumSquare"/>
+                <a:ea typeface="NanumSquare"/>
               </a:rPr>
               <a:t>· 한은이 자체 ML 예측치의 단위 정합성 결함을 발견·개정</a:t>
             </a:r>
@@ -10430,12 +10430,12 @@
               </a:spcAft>
             </a:pPr>
             <a:r>
-              <a:rPr sz="1050" b="0">
+              <a:rPr sz="1210" b="0">
                 <a:solidFill>
                   <a:srgbClr val="262626"/>
                 </a:solidFill>
-                <a:latin typeface="Apple SD Gothic Neo"/>
-                <a:ea typeface="Apple SD Gothic Neo"/>
+                <a:latin typeface="NanumSquare"/>
+                <a:ea typeface="NanumSquare"/>
               </a:rPr>
               <a:t>  — 표준화값이 원단위와 혼합 채점되던 문제</a:t>
             </a:r>
@@ -10447,12 +10447,12 @@
               </a:spcAft>
             </a:pPr>
             <a:r>
-              <a:rPr sz="1050" b="0">
+              <a:rPr sz="1210" b="0">
                 <a:solidFill>
                   <a:srgbClr val="262626"/>
                 </a:solidFill>
-                <a:latin typeface="Apple SD Gothic Neo"/>
-                <a:ea typeface="Apple SD Gothic Neo"/>
+                <a:latin typeface="NanumSquare"/>
+                <a:ea typeface="NanumSquare"/>
               </a:rPr>
               <a:t>· 종전 공식 기준 'DFM+XGBoost 0.765'가 무효화,</a:t>
             </a:r>
@@ -10464,12 +10464,12 @@
               </a:spcAft>
             </a:pPr>
             <a:r>
-              <a:rPr sz="1050" b="0">
+              <a:rPr sz="1210" b="0">
                 <a:solidFill>
                   <a:srgbClr val="262626"/>
                 </a:solidFill>
-                <a:latin typeface="Apple SD Gothic Neo"/>
-                <a:ea typeface="Apple SD Gothic Neo"/>
+                <a:latin typeface="NanumSquare"/>
+                <a:ea typeface="NanumSquare"/>
               </a:rPr>
               <a:t>  당사의 종전 기록·게이트 수치도 함께 무효</a:t>
             </a:r>
@@ -10481,12 +10481,12 @@
               </a:spcAft>
             </a:pPr>
             <a:r>
-              <a:rPr sz="500" b="0">
+              <a:rPr sz="580" b="0">
                 <a:solidFill>
                   <a:srgbClr val="262626"/>
                 </a:solidFill>
-                <a:latin typeface="Apple SD Gothic Neo"/>
-                <a:ea typeface="Apple SD Gothic Neo"/>
+                <a:latin typeface="NanumSquare"/>
+                <a:ea typeface="NanumSquare"/>
               </a:rPr>
               <a:t/>
             </a:r>
@@ -10498,12 +10498,12 @@
               </a:spcAft>
             </a:pPr>
             <a:r>
-              <a:rPr sz="1250" b="1">
+              <a:rPr sz="1440" b="1">
                 <a:solidFill>
                   <a:srgbClr val="243447"/>
                 </a:solidFill>
-                <a:latin typeface="Apple SD Gothic Neo"/>
-                <a:ea typeface="Apple SD Gothic Neo"/>
+                <a:latin typeface="NanumSquare"/>
+                <a:ea typeface="NanumSquare"/>
               </a:rPr>
               <a:t>당사 대응</a:t>
             </a:r>
@@ -10515,12 +10515,12 @@
               </a:spcAft>
             </a:pPr>
             <a:r>
-              <a:rPr sz="1050" b="0">
+              <a:rPr sz="1210" b="0">
                 <a:solidFill>
                   <a:srgbClr val="262626"/>
                 </a:solidFill>
-                <a:latin typeface="Apple SD Gothic Neo"/>
-                <a:ea typeface="Apple SD Gothic Neo"/>
+                <a:latin typeface="NanumSquare"/>
+                <a:ea typeface="NanumSquare"/>
               </a:rPr>
               <a:t>· 개정 코드 수신 당일 40여 구성 전면 재채점</a:t>
             </a:r>
@@ -10532,12 +10532,12 @@
               </a:spcAft>
             </a:pPr>
             <a:r>
-              <a:rPr sz="1050" b="0">
+              <a:rPr sz="1210" b="0">
                 <a:solidFill>
                   <a:srgbClr val="262626"/>
                 </a:solidFill>
-                <a:latin typeface="Apple SD Gothic Neo"/>
-                <a:ea typeface="Apple SD Gothic Neo"/>
+                <a:latin typeface="NanumSquare"/>
+                <a:ea typeface="NanumSquare"/>
               </a:rPr>
               <a:t>· 신 기준선 확정: XGBoost 단독 0.750 —</a:t>
             </a:r>
@@ -10549,12 +10549,12 @@
               </a:spcAft>
             </a:pPr>
             <a:r>
-              <a:rPr sz="1050" b="0">
+              <a:rPr sz="1210" b="0">
                 <a:solidFill>
                   <a:srgbClr val="262626"/>
                 </a:solidFill>
-                <a:latin typeface="Apple SD Gothic Neo"/>
-                <a:ea typeface="Apple SD Gothic Neo"/>
+                <a:latin typeface="NanumSquare"/>
+                <a:ea typeface="NanumSquare"/>
               </a:rPr>
               <a:t>  "결합이 항상 낫다"던 종전 서사가 결함의 산물이었음을 확인</a:t>
             </a:r>
@@ -10566,12 +10566,12 @@
               </a:spcAft>
             </a:pPr>
             <a:r>
-              <a:rPr sz="1050" b="0">
+              <a:rPr sz="1210" b="0">
                 <a:solidFill>
                   <a:srgbClr val="262626"/>
                 </a:solidFill>
-                <a:latin typeface="Apple SD Gothic Neo"/>
-                <a:ea typeface="Apple SD Gothic Neo"/>
+                <a:latin typeface="NanumSquare"/>
+                <a:ea typeface="NanumSquare"/>
               </a:rPr>
               <a:t>· 한은의 대규모 후보 탐색(911개)에는 선택편의 관점을</a:t>
             </a:r>
@@ -10583,12 +10583,12 @@
               </a:spcAft>
             </a:pPr>
             <a:r>
-              <a:rPr sz="1050" b="0">
+              <a:rPr sz="1210" b="0">
                 <a:solidFill>
                   <a:srgbClr val="262626"/>
                 </a:solidFill>
-                <a:latin typeface="Apple SD Gothic Neo"/>
-                <a:ea typeface="Apple SD Gothic Neo"/>
+                <a:latin typeface="NanumSquare"/>
+                <a:ea typeface="NanumSquare"/>
               </a:rPr>
               <a:t>  정중히 제기 — 그들 자신의 MCS 논리로</a:t>
             </a:r>
@@ -10612,7 +10612,7 @@
         <p:spPr>
           <a:xfrm>
             <a:off x="6263640" y="1463040"/>
-            <a:ext cx="5577840" cy="2778578"/>
+            <a:ext cx="5577840" cy="2624673"/>
           </a:xfrm>
           <a:prstGeom prst="rect">
             <a:avLst/>
@@ -10647,12 +10647,12 @@
               </a:spcAft>
             </a:pPr>
             <a:r>
-              <a:rPr sz="800" b="0">
+              <a:rPr sz="919" b="0">
                 <a:solidFill>
                   <a:srgbClr val="6B6B6B"/>
                 </a:solidFill>
-                <a:latin typeface="Apple SD Gothic Neo"/>
-                <a:ea typeface="Apple SD Gothic Neo"/>
+                <a:latin typeface="NanumSquare"/>
+                <a:ea typeface="NanumSquare"/>
               </a:rPr>
               <a:t>주: 공통 규약: 한은 실시간 빈티지 · 속보치 기준 · 전망주차 w[-19,-1] 평균 RMSE · 2018Q1~2025Q4(32개 분기). 낮을수록 정확. 개정 전 수치와의 혼용 없음 — 이후 모든 수치는 개정(schema v2) 기준.</a:t>
             </a:r>
@@ -10687,12 +10687,12 @@
               </a:spcAft>
             </a:pPr>
             <a:r>
-              <a:rPr sz="900" b="0">
+              <a:rPr sz="1030" b="0">
                 <a:solidFill>
                   <a:srgbClr val="6B6B6B"/>
                 </a:solidFill>
-                <a:latin typeface="Apple SD Gothic Neo"/>
-                <a:ea typeface="Apple SD Gothic Neo"/>
+                <a:latin typeface="NanumSquare"/>
+                <a:ea typeface="NanumSquare"/>
               </a:rPr>
               <a:t>6</a:t>
             </a:r>
@@ -10745,12 +10745,12 @@
               </a:spcAft>
             </a:pPr>
             <a:r>
-              <a:rPr sz="1050" b="1">
+              <a:rPr sz="1210" b="1">
                 <a:solidFill>
                   <a:srgbClr val="6B6B6B"/>
                 </a:solidFill>
-                <a:latin typeface="Apple SD Gothic Neo"/>
-                <a:ea typeface="Apple SD Gothic Neo"/>
+                <a:latin typeface="NanumSquare"/>
+                <a:ea typeface="NanumSquare"/>
               </a:rPr>
               <a:t>6  |  4막 · 파운데이션 모델 전수 검증</a:t>
             </a:r>
@@ -10785,12 +10785,12 @@
               </a:spcAft>
             </a:pPr>
             <a:r>
-              <a:rPr sz="1700" b="1">
+              <a:rPr sz="1950" b="1">
                 <a:solidFill>
                   <a:srgbClr val="243447"/>
                 </a:solidFill>
-                <a:latin typeface="Apple SD Gothic Neo"/>
-                <a:ea typeface="Apple SD Gothic Neo"/>
+                <a:latin typeface="NanumSquare"/>
+                <a:ea typeface="NanumSquare"/>
               </a:rPr>
               <a:t>딥러닝은 조건부로 유효했습니다 — BIS 공개 모델 원본 실측 포함</a:t>
             </a:r>
@@ -10860,12 +10860,12 @@
               </a:spcAft>
             </a:pPr>
             <a:r>
-              <a:rPr sz="1250" b="1">
+              <a:rPr sz="1440" b="1">
                 <a:solidFill>
                   <a:srgbClr val="243447"/>
                 </a:solidFill>
-                <a:latin typeface="Apple SD Gothic Neo"/>
-                <a:ea typeface="Apple SD Gothic Neo"/>
+                <a:latin typeface="NanumSquare"/>
+                <a:ea typeface="NanumSquare"/>
               </a:rPr>
               <a:t>전수 검증의 결론</a:t>
             </a:r>
@@ -10877,12 +10877,12 @@
               </a:spcAft>
             </a:pPr>
             <a:r>
-              <a:rPr sz="1050" b="0">
+              <a:rPr sz="1210" b="0">
                 <a:solidFill>
                   <a:srgbClr val="262626"/>
                 </a:solidFill>
-                <a:latin typeface="Apple SD Gothic Neo"/>
-                <a:ea typeface="Apple SD Gothic Neo"/>
+                <a:latin typeface="NanumSquare"/>
+                <a:ea typeface="NanumSquare"/>
               </a:rPr>
               <a:t>· 언어모델(Claude·HCX) 시계열 활용도 타진 — 가능성은</a:t>
             </a:r>
@@ -10894,12 +10894,12 @@
               </a:spcAft>
             </a:pPr>
             <a:r>
-              <a:rPr sz="1050" b="0">
+              <a:rPr sz="1210" b="0">
                 <a:solidFill>
                   <a:srgbClr val="262626"/>
                 </a:solidFill>
-                <a:latin typeface="Apple SD Gothic Neo"/>
-                <a:ea typeface="Apple SD Gothic Neo"/>
+                <a:latin typeface="NanumSquare"/>
+                <a:ea typeface="NanumSquare"/>
               </a:rPr>
               <a:t>  관찰됐으나 통계적 유의성 미확보, 학습데이터 오염으로</a:t>
             </a:r>
@@ -10911,12 +10911,12 @@
               </a:spcAft>
             </a:pPr>
             <a:r>
-              <a:rPr sz="1050" b="0">
+              <a:rPr sz="1210" b="0">
                 <a:solidFill>
                   <a:srgbClr val="262626"/>
                 </a:solidFill>
-                <a:latin typeface="Apple SD Gothic Neo"/>
-                <a:ea typeface="Apple SD Gothic Neo"/>
+                <a:latin typeface="NanumSquare"/>
+                <a:ea typeface="NanumSquare"/>
               </a:rPr>
               <a:t>  실시간 공정 채점이 성립하지 않아 채택 제외</a:t>
             </a:r>
@@ -10928,12 +10928,12 @@
               </a:spcAft>
             </a:pPr>
             <a:r>
-              <a:rPr sz="1050" b="0">
+              <a:rPr sz="1210" b="0">
                 <a:solidFill>
                   <a:srgbClr val="262626"/>
                 </a:solidFill>
-                <a:latin typeface="Apple SD Gothic Neo"/>
-                <a:ea typeface="Apple SD Gothic Neo"/>
+                <a:latin typeface="NanumSquare"/>
+                <a:ea typeface="NanumSquare"/>
               </a:rPr>
               <a:t>· 직접학습 신경망(LSTM·NCDE 등): 전멸 — 월 140행 소표본</a:t>
             </a:r>
@@ -10945,12 +10945,12 @@
               </a:spcAft>
             </a:pPr>
             <a:r>
-              <a:rPr sz="1050" b="0">
+              <a:rPr sz="1210" b="0">
                 <a:solidFill>
                   <a:srgbClr val="262626"/>
                 </a:solidFill>
-                <a:latin typeface="Apple SD Gothic Neo"/>
-                <a:ea typeface="Apple SD Gothic Neo"/>
+                <a:latin typeface="NanumSquare"/>
+                <a:ea typeface="NanumSquare"/>
               </a:rPr>
               <a:t>· 사전학습 FM(Chronos-2·Moirai/BISTRO): 유효 —</a:t>
             </a:r>
@@ -10962,12 +10962,12 @@
               </a:spcAft>
             </a:pPr>
             <a:r>
-              <a:rPr sz="1050" b="0">
+              <a:rPr sz="1210" b="0">
                 <a:solidFill>
                   <a:srgbClr val="262626"/>
                 </a:solidFill>
-                <a:latin typeface="Apple SD Gothic Neo"/>
-                <a:ea typeface="Apple SD Gothic Neo"/>
+                <a:latin typeface="NanumSquare"/>
+                <a:ea typeface="NanumSquare"/>
               </a:rPr>
               <a:t>  단 '어느 조건에서'가 갈림 (조기 주차·반등기 한정)</a:t>
             </a:r>
@@ -10979,12 +10979,12 @@
               </a:spcAft>
             </a:pPr>
             <a:r>
-              <a:rPr sz="1050" b="0">
+              <a:rPr sz="1210" b="0">
                 <a:solidFill>
                   <a:srgbClr val="262626"/>
                 </a:solidFill>
-                <a:latin typeface="Apple SD Gothic Neo"/>
-                <a:ea typeface="Apple SD Gothic Neo"/>
+                <a:latin typeface="NanumSquare"/>
+                <a:ea typeface="NanumSquare"/>
               </a:rPr>
               <a:t>· BIS 공개 거시 FM(BISTRO, WP1337)을 확보해 동일 규약</a:t>
             </a:r>
@@ -10996,12 +10996,12 @@
               </a:spcAft>
             </a:pPr>
             <a:r>
-              <a:rPr sz="1050" b="0">
+              <a:rPr sz="1210" b="0">
                 <a:solidFill>
                   <a:srgbClr val="262626"/>
                 </a:solidFill>
-                <a:latin typeface="Apple SD Gothic Neo"/>
-                <a:ea typeface="Apple SD Gothic Neo"/>
+                <a:latin typeface="NanumSquare"/>
+                <a:ea typeface="NanumSquare"/>
               </a:rPr>
               <a:t>  직접 실측 — 한은 관심 질문에 원본 기준으로 답</a:t>
             </a:r>
@@ -11013,12 +11013,12 @@
               </a:spcAft>
             </a:pPr>
             <a:r>
-              <a:rPr sz="500" b="0">
+              <a:rPr sz="580" b="0">
                 <a:solidFill>
                   <a:srgbClr val="262626"/>
                 </a:solidFill>
-                <a:latin typeface="Apple SD Gothic Neo"/>
-                <a:ea typeface="Apple SD Gothic Neo"/>
+                <a:latin typeface="NanumSquare"/>
+                <a:ea typeface="NanumSquare"/>
               </a:rPr>
               <a:t/>
             </a:r>
@@ -11030,12 +11030,12 @@
               </a:spcAft>
             </a:pPr>
             <a:r>
-              <a:rPr sz="1250" b="1">
+              <a:rPr sz="1440" b="1">
                 <a:solidFill>
                   <a:srgbClr val="243447"/>
                 </a:solidFill>
-                <a:latin typeface="Apple SD Gothic Neo"/>
-                <a:ea typeface="Apple SD Gothic Neo"/>
+                <a:latin typeface="NanumSquare"/>
+                <a:ea typeface="NanumSquare"/>
               </a:rPr>
               <a:t>핵심 진단 — '힌트 흡수력'</a:t>
             </a:r>
@@ -11047,12 +11047,12 @@
               </a:spcAft>
             </a:pPr>
             <a:r>
-              <a:rPr sz="1050" b="0">
+              <a:rPr sz="1210" b="0">
                 <a:solidFill>
                   <a:srgbClr val="262626"/>
                 </a:solidFill>
-                <a:latin typeface="Apple SD Gothic Neo"/>
-                <a:ea typeface="Apple SD Gothic Neo"/>
+                <a:latin typeface="NanumSquare"/>
+                <a:ea typeface="NanumSquare"/>
               </a:rPr>
               <a:t>같은 일별 신호(주가·환율)를 줘도 활용도가 다름:</a:t>
             </a:r>
@@ -11064,12 +11064,12 @@
               </a:spcAft>
             </a:pPr>
             <a:r>
-              <a:rPr sz="1050" b="1">
+              <a:rPr sz="1210" b="1">
                 <a:solidFill>
                   <a:srgbClr val="262626"/>
                 </a:solidFill>
-                <a:latin typeface="Apple SD Gothic Neo"/>
-                <a:ea typeface="Apple SD Gothic Neo"/>
+                <a:latin typeface="NanumSquare"/>
+                <a:ea typeface="NanumSquare"/>
               </a:rPr>
               <a:t>Chronos-2 -3.4% vs BISTRO 무이득 (절제 실험)</a:t>
             </a:r>
@@ -11081,12 +11081,12 @@
               </a:spcAft>
             </a:pPr>
             <a:r>
-              <a:rPr sz="1050" b="0">
+              <a:rPr sz="1210" b="0">
                 <a:solidFill>
                   <a:srgbClr val="262626"/>
                 </a:solidFill>
-                <a:latin typeface="Apple SD Gothic Neo"/>
-                <a:ea typeface="Apple SD Gothic Neo"/>
+                <a:latin typeface="NanumSquare"/>
+                <a:ea typeface="NanumSquare"/>
               </a:rPr>
               <a:t>원인 = 사전학습 채점 범위 차이 (타깃만 vs 전 변량)</a:t>
             </a:r>
@@ -11098,12 +11098,12 @@
               </a:spcAft>
             </a:pPr>
             <a:r>
-              <a:rPr sz="1050" b="0">
+              <a:rPr sz="1210" b="0">
                 <a:solidFill>
                   <a:srgbClr val="262626"/>
                 </a:solidFill>
-                <a:latin typeface="Apple SD Gothic Neo"/>
-                <a:ea typeface="Apple SD Gothic Neo"/>
+                <a:latin typeface="NanumSquare"/>
+                <a:ea typeface="NanumSquare"/>
               </a:rPr>
               <a:t>— 주차별 오차 평탄성(한은 진단)의 원인을 규명</a:t>
             </a:r>
@@ -11127,7 +11127,7 @@
         <p:spPr>
           <a:xfrm>
             <a:off x="6217920" y="1554480"/>
-            <a:ext cx="5669280" cy="3012135"/>
+            <a:ext cx="5669280" cy="2956075"/>
           </a:xfrm>
           <a:prstGeom prst="rect">
             <a:avLst/>
@@ -11162,12 +11162,12 @@
               </a:spcAft>
             </a:pPr>
             <a:r>
-              <a:rPr sz="800" b="0">
+              <a:rPr sz="919" b="0">
                 <a:solidFill>
                   <a:srgbClr val="6B6B6B"/>
                 </a:solidFill>
-                <a:latin typeface="Apple SD Gothic Neo"/>
-                <a:ea typeface="Apple SD Gothic Neo"/>
+                <a:latin typeface="NanumSquare"/>
+                <a:ea typeface="NanumSquare"/>
               </a:rPr>
               <a:t>주: 공통 규약: 한은 실시간 빈티지 · 속보치 기준 · 전망주차 w[-19,-1] 평균 RMSE · 2018Q1~2025Q4(32개 분기). 낮을수록 정확. 절제(ablation): 공변량을 단계적으로 제거·추가해 기여를 분리하는 실험.</a:t>
             </a:r>
@@ -11202,12 +11202,12 @@
               </a:spcAft>
             </a:pPr>
             <a:r>
-              <a:rPr sz="900" b="0">
+              <a:rPr sz="1030" b="0">
                 <a:solidFill>
                   <a:srgbClr val="6B6B6B"/>
                 </a:solidFill>
-                <a:latin typeface="Apple SD Gothic Neo"/>
-                <a:ea typeface="Apple SD Gothic Neo"/>
+                <a:latin typeface="NanumSquare"/>
+                <a:ea typeface="NanumSquare"/>
               </a:rPr>
               <a:t>7</a:t>
             </a:r>
@@ -11260,12 +11260,12 @@
               </a:spcAft>
             </a:pPr>
             <a:r>
-              <a:rPr sz="1050" b="1">
+              <a:rPr sz="1210" b="1">
                 <a:solidFill>
                   <a:srgbClr val="6B6B6B"/>
                 </a:solidFill>
-                <a:latin typeface="Apple SD Gothic Neo"/>
-                <a:ea typeface="Apple SD Gothic Neo"/>
+                <a:latin typeface="NanumSquare"/>
+                <a:ea typeface="NanumSquare"/>
               </a:rPr>
               <a:t>7  |  5막 · 적응학습(LoRA) 실증</a:t>
             </a:r>
@@ -11300,12 +11300,12 @@
               </a:spcAft>
             </a:pPr>
             <a:r>
-              <a:rPr sz="1700" b="1">
+              <a:rPr sz="1950" b="1">
                 <a:solidFill>
                   <a:srgbClr val="243447"/>
                 </a:solidFill>
-                <a:latin typeface="Apple SD Gothic Neo"/>
-                <a:ea typeface="Apple SD Gothic Neo"/>
+                <a:latin typeface="NanumSquare"/>
+                <a:ea typeface="NanumSquare"/>
               </a:rPr>
               <a:t>한은이 제안한 적응학습을 당사가 먼저 실증했습니다</a:t>
             </a:r>
@@ -11375,12 +11375,12 @@
               </a:spcAft>
             </a:pPr>
             <a:r>
-              <a:rPr sz="1250" b="1">
+              <a:rPr sz="1440" b="1">
                 <a:solidFill>
                   <a:srgbClr val="243447"/>
                 </a:solidFill>
-                <a:latin typeface="Apple SD Gothic Neo"/>
-                <a:ea typeface="Apple SD Gothic Neo"/>
+                <a:latin typeface="NanumSquare"/>
+                <a:ea typeface="NanumSquare"/>
               </a:rPr>
               <a:t>실험 (양 모델 동일 레시피, seed 3회)</a:t>
             </a:r>
@@ -11392,12 +11392,12 @@
               </a:spcAft>
             </a:pPr>
             <a:r>
-              <a:rPr sz="1050" b="0">
+              <a:rPr sz="1210" b="0">
                 <a:solidFill>
                   <a:srgbClr val="262626"/>
                 </a:solidFill>
-                <a:latin typeface="Apple SD Gothic Neo"/>
-                <a:ea typeface="Apple SD Gothic Neo"/>
+                <a:latin typeface="NanumSquare"/>
+                <a:ea typeface="NanumSquare"/>
               </a:rPr>
               <a:t>· 학습 = 과거 빈티지 경로(당시 가용 정보 + 관측 플래그,</a:t>
             </a:r>
@@ -11409,12 +11409,12 @@
               </a:spcAft>
             </a:pPr>
             <a:r>
-              <a:rPr sz="1050" b="0">
+              <a:rPr sz="1210" b="0">
                 <a:solidFill>
                   <a:srgbClr val="262626"/>
                 </a:solidFill>
-                <a:latin typeface="Apple SD Gothic Neo"/>
-                <a:ea typeface="Apple SD Gothic Neo"/>
+                <a:latin typeface="NanumSquare"/>
+                <a:ea typeface="NanumSquare"/>
               </a:rPr>
               <a:t>  라벨은 실제 속보치), 연 1회 fresh 재적응, release-safe</a:t>
             </a:r>
@@ -11426,12 +11426,12 @@
               </a:spcAft>
             </a:pPr>
             <a:r>
-              <a:rPr sz="1050" b="0">
+              <a:rPr sz="1210" b="0">
                 <a:solidFill>
                   <a:srgbClr val="262626"/>
                 </a:solidFill>
-                <a:latin typeface="Apple SD Gothic Neo"/>
-                <a:ea typeface="Apple SD Gothic Neo"/>
+                <a:latin typeface="NanumSquare"/>
+                <a:ea typeface="NanumSquare"/>
               </a:rPr>
               <a:t>· 적응 규모 = 전체 파라미터의 0.6% (LoRA rank 8)</a:t>
             </a:r>
@@ -11443,12 +11443,12 @@
               </a:spcAft>
             </a:pPr>
             <a:r>
-              <a:rPr sz="500" b="0">
+              <a:rPr sz="580" b="0">
                 <a:solidFill>
                   <a:srgbClr val="262626"/>
                 </a:solidFill>
-                <a:latin typeface="Apple SD Gothic Neo"/>
-                <a:ea typeface="Apple SD Gothic Neo"/>
+                <a:latin typeface="NanumSquare"/>
+                <a:ea typeface="NanumSquare"/>
               </a:rPr>
               <a:t/>
             </a:r>
@@ -11460,12 +11460,12 @@
               </a:spcAft>
             </a:pPr>
             <a:r>
-              <a:rPr sz="1250" b="1">
+              <a:rPr sz="1440" b="1">
                 <a:solidFill>
                   <a:srgbClr val="243447"/>
                 </a:solidFill>
-                <a:latin typeface="Apple SD Gothic Neo"/>
-                <a:ea typeface="Apple SD Gothic Neo"/>
+                <a:latin typeface="NanumSquare"/>
+                <a:ea typeface="NanumSquare"/>
               </a:rPr>
               <a:t>결과 (3-seed 예측 평균)</a:t>
             </a:r>
@@ -11477,12 +11477,12 @@
               </a:spcAft>
             </a:pPr>
             <a:r>
-              <a:rPr sz="1050" b="0">
+              <a:rPr sz="1210" b="0">
                 <a:solidFill>
                   <a:srgbClr val="262626"/>
                 </a:solidFill>
-                <a:latin typeface="Apple SD Gothic Neo"/>
-                <a:ea typeface="Apple SD Gothic Neo"/>
+                <a:latin typeface="NanumSquare"/>
+                <a:ea typeface="NanumSquare"/>
               </a:rPr>
               <a:t>· BISTRO 0.596 → 0.560 (-6.0%) — 평탄성 부분 해소</a:t>
             </a:r>
@@ -11494,12 +11494,12 @@
               </a:spcAft>
             </a:pPr>
             <a:r>
-              <a:rPr sz="1050" b="0">
+              <a:rPr sz="1210" b="0">
                 <a:solidFill>
                   <a:srgbClr val="262626"/>
                 </a:solidFill>
-                <a:latin typeface="Apple SD Gothic Neo"/>
-                <a:ea typeface="Apple SD Gothic Neo"/>
+                <a:latin typeface="NanumSquare"/>
+                <a:ea typeface="NanumSquare"/>
               </a:rPr>
               <a:t>· Chronos-2 0.619 → 0.564 (-8.9%)</a:t>
             </a:r>
@@ -11511,12 +11511,12 @@
               </a:spcAft>
             </a:pPr>
             <a:r>
-              <a:rPr sz="1050" b="0">
+              <a:rPr sz="1210" b="0">
                 <a:solidFill>
                   <a:srgbClr val="262626"/>
                 </a:solidFill>
-                <a:latin typeface="Apple SD Gothic Neo"/>
-                <a:ea typeface="Apple SD Gothic Neo"/>
+                <a:latin typeface="NanumSquare"/>
+                <a:ea typeface="NanumSquare"/>
               </a:rPr>
               <a:t>· 한은의 출력층 교체 실험(실패)과 대조 —</a:t>
             </a:r>
@@ -11528,12 +11528,12 @@
               </a:spcAft>
             </a:pPr>
             <a:r>
-              <a:rPr sz="1050" b="1">
+              <a:rPr sz="1210" b="1">
                 <a:solidFill>
                   <a:srgbClr val="262626"/>
                 </a:solidFill>
-                <a:latin typeface="Apple SD Gothic Neo"/>
-                <a:ea typeface="Apple SD Gothic Neo"/>
+                <a:latin typeface="NanumSquare"/>
+                <a:ea typeface="NanumSquare"/>
               </a:rPr>
               <a:t>  "적응의 깊이"가 관건임을 규명</a:t>
             </a:r>
@@ -11545,12 +11545,12 @@
               </a:spcAft>
             </a:pPr>
             <a:r>
-              <a:rPr sz="500" b="0">
+              <a:rPr sz="580" b="0">
                 <a:solidFill>
                   <a:srgbClr val="262626"/>
                 </a:solidFill>
-                <a:latin typeface="Apple SD Gothic Neo"/>
-                <a:ea typeface="Apple SD Gothic Neo"/>
+                <a:latin typeface="NanumSquare"/>
+                <a:ea typeface="NanumSquare"/>
               </a:rPr>
               <a:t/>
             </a:r>
@@ -11562,12 +11562,12 @@
               </a:spcAft>
             </a:pPr>
             <a:r>
-              <a:rPr sz="950" b="0">
+              <a:rPr sz="1090" b="0">
                 <a:solidFill>
                   <a:srgbClr val="6B6B6B"/>
                 </a:solidFill>
-                <a:latin typeface="Apple SD Gothic Neo"/>
-                <a:ea typeface="Apple SD Gothic Neo"/>
+                <a:latin typeface="NanumSquare"/>
+                <a:ea typeface="NanumSquare"/>
               </a:rPr>
               <a:t>정직한 각주: BISTRO 쪽 seed 분산 큼(±0.028) — 단일 실행</a:t>
             </a:r>
@@ -11579,12 +11579,12 @@
               </a:spcAft>
             </a:pPr>
             <a:r>
-              <a:rPr sz="950" b="0">
+              <a:rPr sz="1090" b="0">
                 <a:solidFill>
                   <a:srgbClr val="6B6B6B"/>
                 </a:solidFill>
-                <a:latin typeface="Apple SD Gothic Neo"/>
-                <a:ea typeface="Apple SD Gothic Neo"/>
+                <a:latin typeface="NanumSquare"/>
+                <a:ea typeface="NanumSquare"/>
               </a:rPr>
               <a:t>불신 원칙이 여기서도 작동, 3-seed 평균만 보고</a:t>
             </a:r>
@@ -11643,12 +11643,12 @@
               </a:spcAft>
             </a:pPr>
             <a:r>
-              <a:rPr sz="800" b="0">
+              <a:rPr sz="919" b="0">
                 <a:solidFill>
                   <a:srgbClr val="6B6B6B"/>
                 </a:solidFill>
-                <a:latin typeface="Apple SD Gothic Neo"/>
-                <a:ea typeface="Apple SD Gothic Neo"/>
+                <a:latin typeface="NanumSquare"/>
+                <a:ea typeface="NanumSquare"/>
               </a:rPr>
               <a:t>주: 평가창 2021~2025(적응 데이터 확보 구간) · LoRA = 저계수 어댑터를 주의층에 삽입하는 경량 미세조정.</a:t>
             </a:r>
@@ -11683,12 +11683,12 @@
               </a:spcAft>
             </a:pPr>
             <a:r>
-              <a:rPr sz="900" b="0">
+              <a:rPr sz="1030" b="0">
                 <a:solidFill>
                   <a:srgbClr val="6B6B6B"/>
                 </a:solidFill>
-                <a:latin typeface="Apple SD Gothic Neo"/>
-                <a:ea typeface="Apple SD Gothic Neo"/>
+                <a:latin typeface="NanumSquare"/>
+                <a:ea typeface="NanumSquare"/>
               </a:rPr>
               <a:t>8</a:t>
             </a:r>
@@ -11741,12 +11741,12 @@
               </a:spcAft>
             </a:pPr>
             <a:r>
-              <a:rPr sz="1050" b="1">
+              <a:rPr sz="1210" b="1">
                 <a:solidFill>
                   <a:srgbClr val="6B6B6B"/>
                 </a:solidFill>
-                <a:latin typeface="Apple SD Gothic Neo"/>
-                <a:ea typeface="Apple SD Gothic Neo"/>
+                <a:latin typeface="NanumSquare"/>
+                <a:ea typeface="NanumSquare"/>
               </a:rPr>
               <a:t>8  |  종합</a:t>
             </a:r>
@@ -11781,12 +11781,12 @@
               </a:spcAft>
             </a:pPr>
             <a:r>
-              <a:rPr sz="1700" b="1">
+              <a:rPr sz="1950" b="1">
                 <a:solidFill>
                   <a:srgbClr val="243447"/>
                 </a:solidFill>
-                <a:latin typeface="Apple SD Gothic Neo"/>
-                <a:ea typeface="Apple SD Gothic Neo"/>
+                <a:latin typeface="NanumSquare"/>
+                <a:ea typeface="NanumSquare"/>
               </a:rPr>
               <a:t>최종 구성 — 기준선 대비 -2.3%, 지금까지의 발견을 하나의 구성으로 정리했습니다</a:t>
             </a:r>
@@ -11845,7 +11845,7 @@
         <p:spPr>
           <a:xfrm>
             <a:off x="457200" y="1463040"/>
-            <a:ext cx="6766560" cy="3270202"/>
+            <a:ext cx="6766560" cy="3249221"/>
           </a:xfrm>
           <a:prstGeom prst="rect">
             <a:avLst/>
@@ -11924,12 +11924,12 @@
               </a:spcAft>
             </a:pPr>
             <a:r>
-              <a:rPr sz="1200" b="1">
+              <a:rPr sz="1380" b="1">
                 <a:solidFill>
                   <a:srgbClr val="243447"/>
                 </a:solidFill>
-                <a:latin typeface="Apple SD Gothic Neo"/>
-                <a:ea typeface="Apple SD Gothic Neo"/>
+                <a:latin typeface="NanumSquare"/>
+                <a:ea typeface="NanumSquare"/>
               </a:rPr>
               <a:t>최종 운영 권고</a:t>
             </a:r>
@@ -11941,12 +11941,12 @@
               </a:spcAft>
             </a:pPr>
             <a:r>
-              <a:rPr sz="1050" b="0">
+              <a:rPr sz="1210" b="0">
                 <a:solidFill>
                   <a:srgbClr val="262626"/>
                 </a:solidFill>
-                <a:latin typeface="Apple SD Gothic Neo"/>
-                <a:ea typeface="Apple SD Gothic Neo"/>
+                <a:latin typeface="NanumSquare"/>
+                <a:ea typeface="NanumSquare"/>
               </a:rPr>
               <a:t>기본 = XGBoost 단독 (한은 개정판)</a:t>
             </a:r>
@@ -11958,12 +11958,12 @@
               </a:spcAft>
             </a:pPr>
             <a:r>
-              <a:rPr sz="1050" b="0">
+              <a:rPr sz="1210" b="0">
                 <a:solidFill>
                   <a:srgbClr val="262626"/>
                 </a:solidFill>
-                <a:latin typeface="Apple SD Gothic Neo"/>
-                <a:ea typeface="Apple SD Gothic Neo"/>
+                <a:latin typeface="NanumSquare"/>
+                <a:ea typeface="NanumSquare"/>
               </a:rPr>
               <a:t>조기 6주(지표 공백기) = FM 결합으로 교대</a:t>
             </a:r>
@@ -11975,12 +11975,12 @@
               </a:spcAft>
             </a:pPr>
             <a:r>
-              <a:rPr sz="1050" b="0">
+              <a:rPr sz="1210" b="0">
                 <a:solidFill>
                   <a:srgbClr val="262626"/>
                 </a:solidFill>
-                <a:latin typeface="Apple SD Gothic Neo"/>
-                <a:ea typeface="Apple SD Gothic Neo"/>
+                <a:latin typeface="NanumSquare"/>
+                <a:ea typeface="NanumSquare"/>
               </a:rPr>
               <a:t>  · 적응 이력 12분기 미만 → zero-shot 부품</a:t>
             </a:r>
@@ -11992,12 +11992,12 @@
               </a:spcAft>
             </a:pPr>
             <a:r>
-              <a:rPr sz="1050" b="0">
+              <a:rPr sz="1210" b="0">
                 <a:solidFill>
                   <a:srgbClr val="262626"/>
                 </a:solidFill>
-                <a:latin typeface="Apple SD Gothic Neo"/>
-                <a:ea typeface="Apple SD Gothic Neo"/>
+                <a:latin typeface="NanumSquare"/>
+                <a:ea typeface="NanumSquare"/>
               </a:rPr>
               <a:t>  · 12분기 이상 → LoRA 적응 부품 (임계 규칙)</a:t>
             </a:r>
@@ -12009,12 +12009,12 @@
               </a:spcAft>
             </a:pPr>
             <a:r>
-              <a:rPr sz="400" b="0">
+              <a:rPr sz="459" b="0">
                 <a:solidFill>
                   <a:srgbClr val="262626"/>
                 </a:solidFill>
-                <a:latin typeface="Apple SD Gothic Neo"/>
-                <a:ea typeface="Apple SD Gothic Neo"/>
+                <a:latin typeface="NanumSquare"/>
+                <a:ea typeface="NanumSquare"/>
               </a:rPr>
               <a:t/>
             </a:r>
@@ -12026,12 +12026,12 @@
               </a:spcAft>
             </a:pPr>
             <a:r>
-              <a:rPr sz="950" b="0">
+              <a:rPr sz="1090" b="0">
                 <a:solidFill>
                   <a:srgbClr val="6B6B6B"/>
                 </a:solidFill>
-                <a:latin typeface="Apple SD Gothic Neo"/>
-                <a:ea typeface="Apple SD Gothic Neo"/>
+                <a:latin typeface="NanumSquare"/>
+                <a:ea typeface="NanumSquare"/>
               </a:rPr>
               <a:t>임계 12분기는 사전 등록값 — 초소형 적응(3~7분기)이</a:t>
             </a:r>
@@ -12043,12 +12043,12 @@
               </a:spcAft>
             </a:pPr>
             <a:r>
-              <a:rPr sz="950" b="0">
+              <a:rPr sz="1090" b="0">
                 <a:solidFill>
                   <a:srgbClr val="6B6B6B"/>
                 </a:solidFill>
-                <a:latin typeface="Apple SD Gothic Neo"/>
-                <a:ea typeface="Apple SD Gothic Neo"/>
+                <a:latin typeface="NanumSquare"/>
+                <a:ea typeface="NanumSquare"/>
               </a:rPr>
               <a:t>코로나 구간에서 역효과임을 실측으로 확인한 결과</a:t>
             </a:r>
@@ -12127,12 +12127,12 @@
               </a:spcAft>
             </a:pPr>
             <a:r>
-              <a:rPr sz="1200" b="1">
+              <a:rPr sz="1380" b="1">
                 <a:solidFill>
                   <a:srgbClr val="243447"/>
                 </a:solidFill>
-                <a:latin typeface="Apple SD Gothic Neo"/>
-                <a:ea typeface="Apple SD Gothic Neo"/>
+                <a:latin typeface="NanumSquare"/>
+                <a:ea typeface="NanumSquare"/>
               </a:rPr>
               <a:t>수위 (일관 유지)</a:t>
             </a:r>
@@ -12144,12 +12144,12 @@
               </a:spcAft>
             </a:pPr>
             <a:r>
-              <a:rPr sz="1050" b="0">
+              <a:rPr sz="1210" b="0">
                 <a:solidFill>
                   <a:srgbClr val="262626"/>
                 </a:solidFill>
-                <a:latin typeface="Apple SD Gothic Neo"/>
-                <a:ea typeface="Apple SD Gothic Neo"/>
+                <a:latin typeface="NanumSquare"/>
+                <a:ea typeface="NanumSquare"/>
               </a:rPr>
               <a:t>· -2.3%는 DM p=0.185 — 관례상 비유의,</a:t>
             </a:r>
@@ -12161,12 +12161,12 @@
               </a:spcAft>
             </a:pPr>
             <a:r>
-              <a:rPr sz="1050" b="0">
+              <a:rPr sz="1210" b="0">
                 <a:solidFill>
                   <a:srgbClr val="262626"/>
                 </a:solidFill>
-                <a:latin typeface="Apple SD Gothic Neo"/>
-                <a:ea typeface="Apple SD Gothic Neo"/>
+                <a:latin typeface="NanumSquare"/>
+                <a:ea typeface="NanumSquare"/>
               </a:rPr>
               <a:t>  '비열등 + 개선 방향'으로만 주장</a:t>
             </a:r>
@@ -12178,12 +12178,12 @@
               </a:spcAft>
             </a:pPr>
             <a:r>
-              <a:rPr sz="1050" b="0">
+              <a:rPr sz="1210" b="0">
                 <a:solidFill>
                   <a:srgbClr val="262626"/>
                 </a:solidFill>
-                <a:latin typeface="Apple SD Gothic Neo"/>
-                <a:ea typeface="Apple SD Gothic Neo"/>
+                <a:latin typeface="NanumSquare"/>
+                <a:ea typeface="NanumSquare"/>
               </a:rPr>
               <a:t>· 단, 여정 전체에서 가장 낮은 p·최다 승수(18/32)</a:t>
             </a:r>
@@ -12195,12 +12195,12 @@
               </a:spcAft>
             </a:pPr>
             <a:r>
-              <a:rPr sz="1050" b="0">
+              <a:rPr sz="1210" b="0">
                 <a:solidFill>
                   <a:srgbClr val="262626"/>
                 </a:solidFill>
-                <a:latin typeface="Apple SD Gothic Neo"/>
-                <a:ea typeface="Apple SD Gothic Neo"/>
+                <a:latin typeface="NanumSquare"/>
+                <a:ea typeface="NanumSquare"/>
               </a:rPr>
               <a:t>· 국면전환 v3(0.718)는 참고 기록 — 성능은 더 좋으나</a:t>
             </a:r>
@@ -12212,12 +12212,12 @@
               </a:spcAft>
             </a:pPr>
             <a:r>
-              <a:rPr sz="1050" b="0">
+              <a:rPr sz="1210" b="0">
                 <a:solidFill>
                   <a:srgbClr val="262626"/>
                 </a:solidFill>
-                <a:latin typeface="Apple SD Gothic Neo"/>
-                <a:ea typeface="Apple SD Gothic Neo"/>
+                <a:latin typeface="NanumSquare"/>
+                <a:ea typeface="NanumSquare"/>
               </a:rPr>
               <a:t>  수용성 문제로 보류된 연구 자산</a:t>
             </a:r>
@@ -12252,12 +12252,12 @@
               </a:spcAft>
             </a:pPr>
             <a:r>
-              <a:rPr sz="800" b="0">
+              <a:rPr sz="919" b="0">
                 <a:solidFill>
                   <a:srgbClr val="6B6B6B"/>
                 </a:solidFill>
-                <a:latin typeface="Apple SD Gothic Neo"/>
-                <a:ea typeface="Apple SD Gothic Neo"/>
+                <a:latin typeface="NanumSquare"/>
+                <a:ea typeface="NanumSquare"/>
               </a:rPr>
               <a:t>주: 공통 규약: 한은 실시간 빈티지 · 속보치 기준 · 전망주차 w[-19,-1] 평균 RMSE · 2018Q1~2025Q4(32개 분기). 낮을수록 정확.</a:t>
             </a:r>
@@ -12292,12 +12292,12 @@
               </a:spcAft>
             </a:pPr>
             <a:r>
-              <a:rPr sz="900" b="0">
+              <a:rPr sz="1030" b="0">
                 <a:solidFill>
                   <a:srgbClr val="6B6B6B"/>
                 </a:solidFill>
-                <a:latin typeface="Apple SD Gothic Neo"/>
-                <a:ea typeface="Apple SD Gothic Neo"/>
+                <a:latin typeface="NanumSquare"/>
+                <a:ea typeface="NanumSquare"/>
               </a:rPr>
               <a:t>9</a:t>
             </a:r>
